--- a/CUA_Research_Report.pptx
+++ b/CUA_Research_Report.pptx
@@ -3109,7 +3109,7 @@
     <p:bg>
       <p:bgPr>
         <a:solidFill>
-          <a:srgbClr val="1B1B2F"/>
+          <a:srgbClr val="FAFAFC"/>
         </a:solidFill>
         <a:effectLst/>
       </p:bgPr>
@@ -3136,7 +3136,7 @@
             <a:avLst/>
           </a:prstGeom>
           <a:solidFill>
-            <a:srgbClr val="4E8CFF"/>
+            <a:srgbClr val="2D5BE3"/>
           </a:solidFill>
           <a:ln>
             <a:noFill/>
@@ -3179,7 +3179,7 @@
             <a:avLst/>
           </a:prstGeom>
           <a:solidFill>
-            <a:srgbClr val="4E8CFF"/>
+            <a:srgbClr val="2D5BE3"/>
           </a:solidFill>
           <a:ln>
             <a:noFill/>
@@ -3235,7 +3235,7 @@
               </a:spcAft>
               <a:defRPr sz="5200" b="1">
                 <a:solidFill>
-                  <a:srgbClr val="F0F0F5"/>
+                  <a:srgbClr val="2D5BE3"/>
                 </a:solidFill>
                 <a:latin typeface="Arial"/>
               </a:defRPr>
@@ -3251,7 +3251,7 @@
               </a:spcAft>
               <a:defRPr sz="2400" b="0">
                 <a:solidFill>
-                  <a:srgbClr val="00D4AA"/>
+                  <a:srgbClr val="009B8D"/>
                 </a:solidFill>
                 <a:latin typeface="Arial"/>
               </a:defRPr>
@@ -3267,7 +3267,7 @@
               </a:spcAft>
               <a:defRPr sz="1400" b="0">
                 <a:solidFill>
-                  <a:srgbClr val="B0B0C5"/>
+                  <a:srgbClr val="3D3D56"/>
                 </a:solidFill>
                 <a:latin typeface="Arial"/>
               </a:defRPr>
@@ -3283,7 +3283,7 @@
               </a:spcAft>
               <a:defRPr sz="1400" b="0">
                 <a:solidFill>
-                  <a:srgbClr val="B0B0C5"/>
+                  <a:srgbClr val="3D3D56"/>
                 </a:solidFill>
                 <a:latin typeface="Arial"/>
               </a:defRPr>
@@ -3309,7 +3309,7 @@
             <a:avLst/>
           </a:prstGeom>
           <a:solidFill>
-            <a:srgbClr val="4E8CFF"/>
+            <a:srgbClr val="2D5BE3"/>
           </a:solidFill>
           <a:ln>
             <a:noFill/>
@@ -3365,7 +3365,7 @@
               </a:spcAft>
               <a:defRPr sz="1400" b="0">
                 <a:solidFill>
-                  <a:srgbClr val="80809A"/>
+                  <a:srgbClr val="787896"/>
                 </a:solidFill>
                 <a:latin typeface="Arial"/>
               </a:defRPr>
@@ -3381,7 +3381,7 @@
               </a:spcAft>
               <a:defRPr sz="1400" b="0">
                 <a:solidFill>
-                  <a:srgbClr val="80809A"/>
+                  <a:srgbClr val="787896"/>
                 </a:solidFill>
                 <a:latin typeface="Arial"/>
               </a:defRPr>
@@ -3417,7 +3417,7 @@
             <a:pPr algn="r">
               <a:defRPr sz="1000" b="0">
                 <a:solidFill>
-                  <a:srgbClr val="80809A"/>
+                  <a:srgbClr val="787896"/>
                 </a:solidFill>
                 <a:latin typeface="Arial"/>
               </a:defRPr>
@@ -3442,7 +3442,7 @@
     <p:bg>
       <p:bgPr>
         <a:solidFill>
-          <a:srgbClr val="1B1B2F"/>
+          <a:srgbClr val="FAFAFC"/>
         </a:solidFill>
         <a:effectLst/>
       </p:bgPr>
@@ -3469,7 +3469,7 @@
             <a:avLst/>
           </a:prstGeom>
           <a:solidFill>
-            <a:srgbClr val="25253D"/>
+            <a:srgbClr val="FFFFFF"/>
           </a:solidFill>
           <a:ln>
             <a:noFill/>
@@ -3512,7 +3512,7 @@
             <a:avLst/>
           </a:prstGeom>
           <a:solidFill>
-            <a:srgbClr val="4E8CFF"/>
+            <a:srgbClr val="2D5BE3"/>
           </a:solidFill>
           <a:ln>
             <a:noFill/>
@@ -3565,7 +3565,7 @@
             <a:pPr algn="l">
               <a:defRPr sz="2200" b="1">
                 <a:solidFill>
-                  <a:srgbClr val="F0F0F5"/>
+                  <a:srgbClr val="1A1A2E"/>
                 </a:solidFill>
                 <a:latin typeface="Arial"/>
               </a:defRPr>
@@ -3601,7 +3601,7 @@
             <a:pPr algn="r">
               <a:defRPr sz="1200" b="0">
                 <a:solidFill>
-                  <a:srgbClr val="80809A"/>
+                  <a:srgbClr val="787896"/>
                 </a:solidFill>
                 <a:latin typeface="Arial"/>
               </a:defRPr>
@@ -3646,7 +3646,7 @@
                       <a:pPr>
                         <a:defRPr sz="1200" b="1">
                           <a:solidFill>
-                            <a:srgbClr val="F0F0F5"/>
+                            <a:srgbClr val="FFFFFF"/>
                           </a:solidFill>
                           <a:latin typeface="Arial"/>
                         </a:defRPr>
@@ -3658,7 +3658,7 @@
                   </a:txBody>
                   <a:tcPr>
                     <a:solidFill>
-                      <a:srgbClr val="2D3A6D"/>
+                      <a:srgbClr val="2D5BE3"/>
                     </a:solidFill>
                   </a:tcPr>
                 </a:tc>
@@ -3670,7 +3670,7 @@
                       <a:pPr>
                         <a:defRPr sz="1200" b="1">
                           <a:solidFill>
-                            <a:srgbClr val="F0F0F5"/>
+                            <a:srgbClr val="FFFFFF"/>
                           </a:solidFill>
                           <a:latin typeface="Arial"/>
                         </a:defRPr>
@@ -3682,7 +3682,7 @@
                   </a:txBody>
                   <a:tcPr>
                     <a:solidFill>
-                      <a:srgbClr val="2D3A6D"/>
+                      <a:srgbClr val="2D5BE3"/>
                     </a:solidFill>
                   </a:tcPr>
                 </a:tc>
@@ -3694,7 +3694,7 @@
                       <a:pPr>
                         <a:defRPr sz="1200" b="1">
                           <a:solidFill>
-                            <a:srgbClr val="F0F0F5"/>
+                            <a:srgbClr val="FFFFFF"/>
                           </a:solidFill>
                           <a:latin typeface="Arial"/>
                         </a:defRPr>
@@ -3706,7 +3706,7 @@
                   </a:txBody>
                   <a:tcPr>
                     <a:solidFill>
-                      <a:srgbClr val="2D3A6D"/>
+                      <a:srgbClr val="2D5BE3"/>
                     </a:solidFill>
                   </a:tcPr>
                 </a:tc>
@@ -3718,7 +3718,7 @@
                       <a:pPr>
                         <a:defRPr sz="1200" b="1">
                           <a:solidFill>
-                            <a:srgbClr val="F0F0F5"/>
+                            <a:srgbClr val="FFFFFF"/>
                           </a:solidFill>
                           <a:latin typeface="Arial"/>
                         </a:defRPr>
@@ -3730,7 +3730,7 @@
                   </a:txBody>
                   <a:tcPr>
                     <a:solidFill>
-                      <a:srgbClr val="2D3A6D"/>
+                      <a:srgbClr val="2D5BE3"/>
                     </a:solidFill>
                   </a:tcPr>
                 </a:tc>
@@ -3742,7 +3742,7 @@
                       <a:pPr>
                         <a:defRPr sz="1200" b="1">
                           <a:solidFill>
-                            <a:srgbClr val="F0F0F5"/>
+                            <a:srgbClr val="FFFFFF"/>
                           </a:solidFill>
                           <a:latin typeface="Arial"/>
                         </a:defRPr>
@@ -3754,7 +3754,7 @@
                   </a:txBody>
                   <a:tcPr>
                     <a:solidFill>
-                      <a:srgbClr val="2D3A6D"/>
+                      <a:srgbClr val="2D5BE3"/>
                     </a:solidFill>
                   </a:tcPr>
                 </a:tc>
@@ -3768,7 +3768,7 @@
                       <a:pPr>
                         <a:defRPr sz="1100" b="0">
                           <a:solidFill>
-                            <a:srgbClr val="B0B0C5"/>
+                            <a:srgbClr val="3D3D56"/>
                           </a:solidFill>
                           <a:latin typeface="Arial"/>
                         </a:defRPr>
@@ -3780,7 +3780,7 @@
                   </a:txBody>
                   <a:tcPr>
                     <a:solidFill>
-                      <a:srgbClr val="25253D"/>
+                      <a:srgbClr val="FFFFFF"/>
                     </a:solidFill>
                   </a:tcPr>
                 </a:tc>
@@ -3792,7 +3792,7 @@
                       <a:pPr>
                         <a:defRPr sz="1100" b="0">
                           <a:solidFill>
-                            <a:srgbClr val="B0B0C5"/>
+                            <a:srgbClr val="3D3D56"/>
                           </a:solidFill>
                           <a:latin typeface="Arial"/>
                         </a:defRPr>
@@ -3804,7 +3804,7 @@
                   </a:txBody>
                   <a:tcPr>
                     <a:solidFill>
-                      <a:srgbClr val="25253D"/>
+                      <a:srgbClr val="FFFFFF"/>
                     </a:solidFill>
                   </a:tcPr>
                 </a:tc>
@@ -3816,7 +3816,7 @@
                       <a:pPr>
                         <a:defRPr sz="1100" b="0">
                           <a:solidFill>
-                            <a:srgbClr val="B0B0C5"/>
+                            <a:srgbClr val="3D3D56"/>
                           </a:solidFill>
                           <a:latin typeface="Arial"/>
                         </a:defRPr>
@@ -3828,7 +3828,7 @@
                   </a:txBody>
                   <a:tcPr>
                     <a:solidFill>
-                      <a:srgbClr val="25253D"/>
+                      <a:srgbClr val="FFFFFF"/>
                     </a:solidFill>
                   </a:tcPr>
                 </a:tc>
@@ -3840,7 +3840,7 @@
                       <a:pPr>
                         <a:defRPr sz="1100" b="0">
                           <a:solidFill>
-                            <a:srgbClr val="B0B0C5"/>
+                            <a:srgbClr val="3D3D56"/>
                           </a:solidFill>
                           <a:latin typeface="Arial"/>
                         </a:defRPr>
@@ -3852,7 +3852,7 @@
                   </a:txBody>
                   <a:tcPr>
                     <a:solidFill>
-                      <a:srgbClr val="25253D"/>
+                      <a:srgbClr val="FFFFFF"/>
                     </a:solidFill>
                   </a:tcPr>
                 </a:tc>
@@ -3864,7 +3864,7 @@
                       <a:pPr>
                         <a:defRPr sz="1100" b="0">
                           <a:solidFill>
-                            <a:srgbClr val="B0B0C5"/>
+                            <a:srgbClr val="3D3D56"/>
                           </a:solidFill>
                           <a:latin typeface="Arial"/>
                         </a:defRPr>
@@ -3876,7 +3876,7 @@
                   </a:txBody>
                   <a:tcPr>
                     <a:solidFill>
-                      <a:srgbClr val="25253D"/>
+                      <a:srgbClr val="FFFFFF"/>
                     </a:solidFill>
                   </a:tcPr>
                 </a:tc>
@@ -3890,7 +3890,7 @@
                       <a:pPr>
                         <a:defRPr sz="1100" b="0">
                           <a:solidFill>
-                            <a:srgbClr val="B0B0C5"/>
+                            <a:srgbClr val="3D3D56"/>
                           </a:solidFill>
                           <a:latin typeface="Arial"/>
                         </a:defRPr>
@@ -3902,7 +3902,7 @@
                   </a:txBody>
                   <a:tcPr>
                     <a:solidFill>
-                      <a:srgbClr val="202036"/>
+                      <a:srgbClr val="F0F2F7"/>
                     </a:solidFill>
                   </a:tcPr>
                 </a:tc>
@@ -3914,7 +3914,7 @@
                       <a:pPr>
                         <a:defRPr sz="1100" b="0">
                           <a:solidFill>
-                            <a:srgbClr val="B0B0C5"/>
+                            <a:srgbClr val="3D3D56"/>
                           </a:solidFill>
                           <a:latin typeface="Arial"/>
                         </a:defRPr>
@@ -3926,7 +3926,7 @@
                   </a:txBody>
                   <a:tcPr>
                     <a:solidFill>
-                      <a:srgbClr val="202036"/>
+                      <a:srgbClr val="F0F2F7"/>
                     </a:solidFill>
                   </a:tcPr>
                 </a:tc>
@@ -3938,7 +3938,7 @@
                       <a:pPr>
                         <a:defRPr sz="1100" b="0">
                           <a:solidFill>
-                            <a:srgbClr val="B0B0C5"/>
+                            <a:srgbClr val="3D3D56"/>
                           </a:solidFill>
                           <a:latin typeface="Arial"/>
                         </a:defRPr>
@@ -3950,7 +3950,7 @@
                   </a:txBody>
                   <a:tcPr>
                     <a:solidFill>
-                      <a:srgbClr val="202036"/>
+                      <a:srgbClr val="F0F2F7"/>
                     </a:solidFill>
                   </a:tcPr>
                 </a:tc>
@@ -3962,7 +3962,7 @@
                       <a:pPr>
                         <a:defRPr sz="1100" b="0">
                           <a:solidFill>
-                            <a:srgbClr val="B0B0C5"/>
+                            <a:srgbClr val="3D3D56"/>
                           </a:solidFill>
                           <a:latin typeface="Arial"/>
                         </a:defRPr>
@@ -3974,7 +3974,7 @@
                   </a:txBody>
                   <a:tcPr>
                     <a:solidFill>
-                      <a:srgbClr val="202036"/>
+                      <a:srgbClr val="F0F2F7"/>
                     </a:solidFill>
                   </a:tcPr>
                 </a:tc>
@@ -3986,7 +3986,7 @@
                       <a:pPr>
                         <a:defRPr sz="1100" b="0">
                           <a:solidFill>
-                            <a:srgbClr val="B0B0C5"/>
+                            <a:srgbClr val="3D3D56"/>
                           </a:solidFill>
                           <a:latin typeface="Arial"/>
                         </a:defRPr>
@@ -3998,7 +3998,7 @@
                   </a:txBody>
                   <a:tcPr>
                     <a:solidFill>
-                      <a:srgbClr val="202036"/>
+                      <a:srgbClr val="F0F2F7"/>
                     </a:solidFill>
                   </a:tcPr>
                 </a:tc>
@@ -4012,7 +4012,7 @@
                       <a:pPr>
                         <a:defRPr sz="1100" b="0">
                           <a:solidFill>
-                            <a:srgbClr val="B0B0C5"/>
+                            <a:srgbClr val="3D3D56"/>
                           </a:solidFill>
                           <a:latin typeface="Arial"/>
                         </a:defRPr>
@@ -4024,7 +4024,7 @@
                   </a:txBody>
                   <a:tcPr>
                     <a:solidFill>
-                      <a:srgbClr val="25253D"/>
+                      <a:srgbClr val="FFFFFF"/>
                     </a:solidFill>
                   </a:tcPr>
                 </a:tc>
@@ -4036,7 +4036,7 @@
                       <a:pPr>
                         <a:defRPr sz="1100" b="0">
                           <a:solidFill>
-                            <a:srgbClr val="B0B0C5"/>
+                            <a:srgbClr val="3D3D56"/>
                           </a:solidFill>
                           <a:latin typeface="Arial"/>
                         </a:defRPr>
@@ -4048,7 +4048,7 @@
                   </a:txBody>
                   <a:tcPr>
                     <a:solidFill>
-                      <a:srgbClr val="25253D"/>
+                      <a:srgbClr val="FFFFFF"/>
                     </a:solidFill>
                   </a:tcPr>
                 </a:tc>
@@ -4060,7 +4060,7 @@
                       <a:pPr>
                         <a:defRPr sz="1100" b="0">
                           <a:solidFill>
-                            <a:srgbClr val="B0B0C5"/>
+                            <a:srgbClr val="3D3D56"/>
                           </a:solidFill>
                           <a:latin typeface="Arial"/>
                         </a:defRPr>
@@ -4072,7 +4072,7 @@
                   </a:txBody>
                   <a:tcPr>
                     <a:solidFill>
-                      <a:srgbClr val="25253D"/>
+                      <a:srgbClr val="FFFFFF"/>
                     </a:solidFill>
                   </a:tcPr>
                 </a:tc>
@@ -4084,7 +4084,7 @@
                       <a:pPr>
                         <a:defRPr sz="1100" b="0">
                           <a:solidFill>
-                            <a:srgbClr val="B0B0C5"/>
+                            <a:srgbClr val="3D3D56"/>
                           </a:solidFill>
                           <a:latin typeface="Arial"/>
                         </a:defRPr>
@@ -4096,7 +4096,7 @@
                   </a:txBody>
                   <a:tcPr>
                     <a:solidFill>
-                      <a:srgbClr val="25253D"/>
+                      <a:srgbClr val="FFFFFF"/>
                     </a:solidFill>
                   </a:tcPr>
                 </a:tc>
@@ -4108,7 +4108,7 @@
                       <a:pPr>
                         <a:defRPr sz="1100" b="0">
                           <a:solidFill>
-                            <a:srgbClr val="B0B0C5"/>
+                            <a:srgbClr val="3D3D56"/>
                           </a:solidFill>
                           <a:latin typeface="Arial"/>
                         </a:defRPr>
@@ -4120,7 +4120,7 @@
                   </a:txBody>
                   <a:tcPr>
                     <a:solidFill>
-                      <a:srgbClr val="25253D"/>
+                      <a:srgbClr val="FFFFFF"/>
                     </a:solidFill>
                   </a:tcPr>
                 </a:tc>
@@ -4134,7 +4134,7 @@
                       <a:pPr>
                         <a:defRPr sz="1100" b="0">
                           <a:solidFill>
-                            <a:srgbClr val="B0B0C5"/>
+                            <a:srgbClr val="3D3D56"/>
                           </a:solidFill>
                           <a:latin typeface="Arial"/>
                         </a:defRPr>
@@ -4146,7 +4146,7 @@
                   </a:txBody>
                   <a:tcPr>
                     <a:solidFill>
-                      <a:srgbClr val="202036"/>
+                      <a:srgbClr val="F0F2F7"/>
                     </a:solidFill>
                   </a:tcPr>
                 </a:tc>
@@ -4158,7 +4158,7 @@
                       <a:pPr>
                         <a:defRPr sz="1100" b="0">
                           <a:solidFill>
-                            <a:srgbClr val="B0B0C5"/>
+                            <a:srgbClr val="3D3D56"/>
                           </a:solidFill>
                           <a:latin typeface="Arial"/>
                         </a:defRPr>
@@ -4170,7 +4170,7 @@
                   </a:txBody>
                   <a:tcPr>
                     <a:solidFill>
-                      <a:srgbClr val="202036"/>
+                      <a:srgbClr val="F0F2F7"/>
                     </a:solidFill>
                   </a:tcPr>
                 </a:tc>
@@ -4182,7 +4182,7 @@
                       <a:pPr>
                         <a:defRPr sz="1100" b="0">
                           <a:solidFill>
-                            <a:srgbClr val="B0B0C5"/>
+                            <a:srgbClr val="3D3D56"/>
                           </a:solidFill>
                           <a:latin typeface="Arial"/>
                         </a:defRPr>
@@ -4194,7 +4194,7 @@
                   </a:txBody>
                   <a:tcPr>
                     <a:solidFill>
-                      <a:srgbClr val="202036"/>
+                      <a:srgbClr val="F0F2F7"/>
                     </a:solidFill>
                   </a:tcPr>
                 </a:tc>
@@ -4206,7 +4206,7 @@
                       <a:pPr>
                         <a:defRPr sz="1100" b="0">
                           <a:solidFill>
-                            <a:srgbClr val="B0B0C5"/>
+                            <a:srgbClr val="3D3D56"/>
                           </a:solidFill>
                           <a:latin typeface="Arial"/>
                         </a:defRPr>
@@ -4218,7 +4218,7 @@
                   </a:txBody>
                   <a:tcPr>
                     <a:solidFill>
-                      <a:srgbClr val="202036"/>
+                      <a:srgbClr val="F0F2F7"/>
                     </a:solidFill>
                   </a:tcPr>
                 </a:tc>
@@ -4230,7 +4230,7 @@
                       <a:pPr>
                         <a:defRPr sz="1100" b="0">
                           <a:solidFill>
-                            <a:srgbClr val="B0B0C5"/>
+                            <a:srgbClr val="3D3D56"/>
                           </a:solidFill>
                           <a:latin typeface="Arial"/>
                         </a:defRPr>
@@ -4242,7 +4242,7 @@
                   </a:txBody>
                   <a:tcPr>
                     <a:solidFill>
-                      <a:srgbClr val="202036"/>
+                      <a:srgbClr val="F0F2F7"/>
                     </a:solidFill>
                   </a:tcPr>
                 </a:tc>
@@ -4256,7 +4256,7 @@
                       <a:pPr>
                         <a:defRPr sz="1100" b="0">
                           <a:solidFill>
-                            <a:srgbClr val="B0B0C5"/>
+                            <a:srgbClr val="3D3D56"/>
                           </a:solidFill>
                           <a:latin typeface="Arial"/>
                         </a:defRPr>
@@ -4268,7 +4268,7 @@
                   </a:txBody>
                   <a:tcPr>
                     <a:solidFill>
-                      <a:srgbClr val="25253D"/>
+                      <a:srgbClr val="FFFFFF"/>
                     </a:solidFill>
                   </a:tcPr>
                 </a:tc>
@@ -4280,7 +4280,7 @@
                       <a:pPr>
                         <a:defRPr sz="1100" b="0">
                           <a:solidFill>
-                            <a:srgbClr val="B0B0C5"/>
+                            <a:srgbClr val="3D3D56"/>
                           </a:solidFill>
                           <a:latin typeface="Arial"/>
                         </a:defRPr>
@@ -4292,7 +4292,7 @@
                   </a:txBody>
                   <a:tcPr>
                     <a:solidFill>
-                      <a:srgbClr val="25253D"/>
+                      <a:srgbClr val="FFFFFF"/>
                     </a:solidFill>
                   </a:tcPr>
                 </a:tc>
@@ -4304,7 +4304,7 @@
                       <a:pPr>
                         <a:defRPr sz="1100" b="0">
                           <a:solidFill>
-                            <a:srgbClr val="B0B0C5"/>
+                            <a:srgbClr val="3D3D56"/>
                           </a:solidFill>
                           <a:latin typeface="Arial"/>
                         </a:defRPr>
@@ -4316,7 +4316,7 @@
                   </a:txBody>
                   <a:tcPr>
                     <a:solidFill>
-                      <a:srgbClr val="25253D"/>
+                      <a:srgbClr val="FFFFFF"/>
                     </a:solidFill>
                   </a:tcPr>
                 </a:tc>
@@ -4328,7 +4328,7 @@
                       <a:pPr>
                         <a:defRPr sz="1100" b="0">
                           <a:solidFill>
-                            <a:srgbClr val="B0B0C5"/>
+                            <a:srgbClr val="3D3D56"/>
                           </a:solidFill>
                           <a:latin typeface="Arial"/>
                         </a:defRPr>
@@ -4340,7 +4340,7 @@
                   </a:txBody>
                   <a:tcPr>
                     <a:solidFill>
-                      <a:srgbClr val="25253D"/>
+                      <a:srgbClr val="FFFFFF"/>
                     </a:solidFill>
                   </a:tcPr>
                 </a:tc>
@@ -4352,7 +4352,7 @@
                       <a:pPr>
                         <a:defRPr sz="1100" b="0">
                           <a:solidFill>
-                            <a:srgbClr val="B0B0C5"/>
+                            <a:srgbClr val="3D3D56"/>
                           </a:solidFill>
                           <a:latin typeface="Arial"/>
                         </a:defRPr>
@@ -4364,7 +4364,7 @@
                   </a:txBody>
                   <a:tcPr>
                     <a:solidFill>
-                      <a:srgbClr val="25253D"/>
+                      <a:srgbClr val="FFFFFF"/>
                     </a:solidFill>
                   </a:tcPr>
                 </a:tc>
@@ -4388,10 +4388,12 @@
             <a:avLst/>
           </a:prstGeom>
           <a:solidFill>
-            <a:srgbClr val="25253D"/>
+            <a:srgbClr val="F0F2F7"/>
           </a:solidFill>
-          <a:ln>
-            <a:noFill/>
+          <a:ln w="12700">
+            <a:solidFill>
+              <a:srgbClr val="DEE1EB"/>
+            </a:solidFill>
           </a:ln>
         </p:spPr>
         <p:style>
@@ -4444,7 +4446,7 @@
               </a:spcAft>
               <a:defRPr sz="1600" b="1">
                 <a:solidFill>
-                  <a:srgbClr val="4ECB71"/>
+                  <a:srgbClr val="1B9E4B"/>
                 </a:solidFill>
                 <a:latin typeface="Arial"/>
               </a:defRPr>
@@ -4460,7 +4462,7 @@
               </a:spcAft>
               <a:defRPr sz="1300" b="0">
                 <a:solidFill>
-                  <a:srgbClr val="B0B0C5"/>
+                  <a:srgbClr val="3D3D56"/>
                 </a:solidFill>
                 <a:latin typeface="Arial"/>
               </a:defRPr>
@@ -4476,7 +4478,7 @@
               </a:spcAft>
               <a:defRPr sz="1300" b="0">
                 <a:solidFill>
-                  <a:srgbClr val="B0B0C5"/>
+                  <a:srgbClr val="3D3D56"/>
                 </a:solidFill>
                 <a:latin typeface="Arial"/>
               </a:defRPr>
@@ -4492,7 +4494,7 @@
               </a:spcAft>
               <a:defRPr sz="1300" b="0">
                 <a:solidFill>
-                  <a:srgbClr val="B0B0C5"/>
+                  <a:srgbClr val="3D3D56"/>
                 </a:solidFill>
                 <a:latin typeface="Arial"/>
               </a:defRPr>
@@ -4508,7 +4510,7 @@
               </a:spcAft>
               <a:defRPr sz="1300" b="1">
                 <a:solidFill>
-                  <a:srgbClr val="FF8C42"/>
+                  <a:srgbClr val="E86A17"/>
                 </a:solidFill>
                 <a:latin typeface="Arial"/>
               </a:defRPr>
@@ -4524,7 +4526,7 @@
               </a:spcAft>
               <a:defRPr sz="1300" b="0">
                 <a:solidFill>
-                  <a:srgbClr val="B0B0C5"/>
+                  <a:srgbClr val="3D3D56"/>
                 </a:solidFill>
                 <a:latin typeface="Arial"/>
               </a:defRPr>
@@ -4560,7 +4562,7 @@
             <a:pPr algn="r">
               <a:defRPr sz="1000" b="0">
                 <a:solidFill>
-                  <a:srgbClr val="80809A"/>
+                  <a:srgbClr val="787896"/>
                 </a:solidFill>
                 <a:latin typeface="Arial"/>
               </a:defRPr>
@@ -4585,7 +4587,7 @@
     <p:bg>
       <p:bgPr>
         <a:solidFill>
-          <a:srgbClr val="1B1B2F"/>
+          <a:srgbClr val="F5F7FB"/>
         </a:solidFill>
         <a:effectLst/>
       </p:bgPr>
@@ -4612,7 +4614,7 @@
             <a:avLst/>
           </a:prstGeom>
           <a:solidFill>
-            <a:srgbClr val="4E8CFF"/>
+            <a:srgbClr val="2D5BE3"/>
           </a:solidFill>
           <a:ln>
             <a:noFill/>
@@ -4665,7 +4667,7 @@
             <a:pPr algn="l">
               <a:defRPr sz="2000" b="1">
                 <a:solidFill>
-                  <a:srgbClr val="4E8CFF"/>
+                  <a:srgbClr val="2D5BE3"/>
                 </a:solidFill>
                 <a:latin typeface="Arial"/>
               </a:defRPr>
@@ -4701,7 +4703,7 @@
             <a:pPr algn="l">
               <a:defRPr sz="4400" b="1">
                 <a:solidFill>
-                  <a:srgbClr val="F0F0F5"/>
+                  <a:srgbClr val="1A1A2E"/>
                 </a:solidFill>
                 <a:latin typeface="Arial"/>
               </a:defRPr>
@@ -4737,7 +4739,7 @@
             <a:pPr algn="l">
               <a:defRPr sz="1800" b="0">
                 <a:solidFill>
-                  <a:srgbClr val="B0B0C5"/>
+                  <a:srgbClr val="3D3D56"/>
                 </a:solidFill>
                 <a:latin typeface="Arial"/>
               </a:defRPr>
@@ -4763,7 +4765,7 @@
             <a:avLst/>
           </a:prstGeom>
           <a:solidFill>
-            <a:srgbClr val="4E8CFF"/>
+            <a:srgbClr val="2D5BE3"/>
           </a:solidFill>
           <a:ln>
             <a:noFill/>
@@ -4816,7 +4818,7 @@
             <a:pPr algn="r">
               <a:defRPr sz="1000" b="0">
                 <a:solidFill>
-                  <a:srgbClr val="80809A"/>
+                  <a:srgbClr val="787896"/>
                 </a:solidFill>
                 <a:latin typeface="Arial"/>
               </a:defRPr>
@@ -4841,7 +4843,7 @@
     <p:bg>
       <p:bgPr>
         <a:solidFill>
-          <a:srgbClr val="1B1B2F"/>
+          <a:srgbClr val="FAFAFC"/>
         </a:solidFill>
         <a:effectLst/>
       </p:bgPr>
@@ -4868,7 +4870,7 @@
             <a:avLst/>
           </a:prstGeom>
           <a:solidFill>
-            <a:srgbClr val="25253D"/>
+            <a:srgbClr val="FFFFFF"/>
           </a:solidFill>
           <a:ln>
             <a:noFill/>
@@ -4911,7 +4913,7 @@
             <a:avLst/>
           </a:prstGeom>
           <a:solidFill>
-            <a:srgbClr val="4E8CFF"/>
+            <a:srgbClr val="2D5BE3"/>
           </a:solidFill>
           <a:ln>
             <a:noFill/>
@@ -4964,7 +4966,7 @@
             <a:pPr algn="l">
               <a:defRPr sz="2200" b="1">
                 <a:solidFill>
-                  <a:srgbClr val="F0F0F5"/>
+                  <a:srgbClr val="1A1A2E"/>
                 </a:solidFill>
                 <a:latin typeface="Arial"/>
               </a:defRPr>
@@ -5000,7 +5002,7 @@
             <a:pPr algn="r">
               <a:defRPr sz="1200" b="0">
                 <a:solidFill>
-                  <a:srgbClr val="80809A"/>
+                  <a:srgbClr val="787896"/>
                 </a:solidFill>
                 <a:latin typeface="Arial"/>
               </a:defRPr>
@@ -5045,7 +5047,7 @@
                       <a:pPr>
                         <a:defRPr sz="1200" b="1">
                           <a:solidFill>
-                            <a:srgbClr val="F0F0F5"/>
+                            <a:srgbClr val="FFFFFF"/>
                           </a:solidFill>
                           <a:latin typeface="Arial"/>
                         </a:defRPr>
@@ -5057,7 +5059,7 @@
                   </a:txBody>
                   <a:tcPr>
                     <a:solidFill>
-                      <a:srgbClr val="2D3A6D"/>
+                      <a:srgbClr val="2D5BE3"/>
                     </a:solidFill>
                   </a:tcPr>
                 </a:tc>
@@ -5069,7 +5071,7 @@
                       <a:pPr>
                         <a:defRPr sz="1200" b="1">
                           <a:solidFill>
-                            <a:srgbClr val="F0F0F5"/>
+                            <a:srgbClr val="FFFFFF"/>
                           </a:solidFill>
                           <a:latin typeface="Arial"/>
                         </a:defRPr>
@@ -5081,7 +5083,7 @@
                   </a:txBody>
                   <a:tcPr>
                     <a:solidFill>
-                      <a:srgbClr val="2D3A6D"/>
+                      <a:srgbClr val="2D5BE3"/>
                     </a:solidFill>
                   </a:tcPr>
                 </a:tc>
@@ -5093,7 +5095,7 @@
                       <a:pPr>
                         <a:defRPr sz="1200" b="1">
                           <a:solidFill>
-                            <a:srgbClr val="F0F0F5"/>
+                            <a:srgbClr val="FFFFFF"/>
                           </a:solidFill>
                           <a:latin typeface="Arial"/>
                         </a:defRPr>
@@ -5105,7 +5107,7 @@
                   </a:txBody>
                   <a:tcPr>
                     <a:solidFill>
-                      <a:srgbClr val="2D3A6D"/>
+                      <a:srgbClr val="2D5BE3"/>
                     </a:solidFill>
                   </a:tcPr>
                 </a:tc>
@@ -5117,7 +5119,7 @@
                       <a:pPr>
                         <a:defRPr sz="1200" b="1">
                           <a:solidFill>
-                            <a:srgbClr val="F0F0F5"/>
+                            <a:srgbClr val="FFFFFF"/>
                           </a:solidFill>
                           <a:latin typeface="Arial"/>
                         </a:defRPr>
@@ -5129,7 +5131,7 @@
                   </a:txBody>
                   <a:tcPr>
                     <a:solidFill>
-                      <a:srgbClr val="2D3A6D"/>
+                      <a:srgbClr val="2D5BE3"/>
                     </a:solidFill>
                   </a:tcPr>
                 </a:tc>
@@ -5141,7 +5143,7 @@
                       <a:pPr>
                         <a:defRPr sz="1200" b="1">
                           <a:solidFill>
-                            <a:srgbClr val="F0F0F5"/>
+                            <a:srgbClr val="FFFFFF"/>
                           </a:solidFill>
                           <a:latin typeface="Arial"/>
                         </a:defRPr>
@@ -5153,7 +5155,7 @@
                   </a:txBody>
                   <a:tcPr>
                     <a:solidFill>
-                      <a:srgbClr val="2D3A6D"/>
+                      <a:srgbClr val="2D5BE3"/>
                     </a:solidFill>
                   </a:tcPr>
                 </a:tc>
@@ -5167,7 +5169,7 @@
                       <a:pPr>
                         <a:defRPr sz="1100" b="0">
                           <a:solidFill>
-                            <a:srgbClr val="B0B0C5"/>
+                            <a:srgbClr val="3D3D56"/>
                           </a:solidFill>
                           <a:latin typeface="Arial"/>
                         </a:defRPr>
@@ -5179,7 +5181,7 @@
                   </a:txBody>
                   <a:tcPr>
                     <a:solidFill>
-                      <a:srgbClr val="25253D"/>
+                      <a:srgbClr val="FFFFFF"/>
                     </a:solidFill>
                   </a:tcPr>
                 </a:tc>
@@ -5191,7 +5193,7 @@
                       <a:pPr>
                         <a:defRPr sz="1100" b="0">
                           <a:solidFill>
-                            <a:srgbClr val="B0B0C5"/>
+                            <a:srgbClr val="3D3D56"/>
                           </a:solidFill>
                           <a:latin typeface="Arial"/>
                         </a:defRPr>
@@ -5203,7 +5205,7 @@
                   </a:txBody>
                   <a:tcPr>
                     <a:solidFill>
-                      <a:srgbClr val="25253D"/>
+                      <a:srgbClr val="FFFFFF"/>
                     </a:solidFill>
                   </a:tcPr>
                 </a:tc>
@@ -5215,7 +5217,7 @@
                       <a:pPr>
                         <a:defRPr sz="1100" b="0">
                           <a:solidFill>
-                            <a:srgbClr val="B0B0C5"/>
+                            <a:srgbClr val="3D3D56"/>
                           </a:solidFill>
                           <a:latin typeface="Arial"/>
                         </a:defRPr>
@@ -5227,7 +5229,7 @@
                   </a:txBody>
                   <a:tcPr>
                     <a:solidFill>
-                      <a:srgbClr val="25253D"/>
+                      <a:srgbClr val="FFFFFF"/>
                     </a:solidFill>
                   </a:tcPr>
                 </a:tc>
@@ -5239,7 +5241,7 @@
                       <a:pPr>
                         <a:defRPr sz="1100" b="0">
                           <a:solidFill>
-                            <a:srgbClr val="B0B0C5"/>
+                            <a:srgbClr val="3D3D56"/>
                           </a:solidFill>
                           <a:latin typeface="Arial"/>
                         </a:defRPr>
@@ -5251,7 +5253,7 @@
                   </a:txBody>
                   <a:tcPr>
                     <a:solidFill>
-                      <a:srgbClr val="25253D"/>
+                      <a:srgbClr val="FFFFFF"/>
                     </a:solidFill>
                   </a:tcPr>
                 </a:tc>
@@ -5263,7 +5265,7 @@
                       <a:pPr>
                         <a:defRPr sz="1100" b="0">
                           <a:solidFill>
-                            <a:srgbClr val="B0B0C5"/>
+                            <a:srgbClr val="3D3D56"/>
                           </a:solidFill>
                           <a:latin typeface="Arial"/>
                         </a:defRPr>
@@ -5275,7 +5277,7 @@
                   </a:txBody>
                   <a:tcPr>
                     <a:solidFill>
-                      <a:srgbClr val="25253D"/>
+                      <a:srgbClr val="FFFFFF"/>
                     </a:solidFill>
                   </a:tcPr>
                 </a:tc>
@@ -5289,7 +5291,7 @@
                       <a:pPr>
                         <a:defRPr sz="1100" b="0">
                           <a:solidFill>
-                            <a:srgbClr val="B0B0C5"/>
+                            <a:srgbClr val="3D3D56"/>
                           </a:solidFill>
                           <a:latin typeface="Arial"/>
                         </a:defRPr>
@@ -5301,7 +5303,7 @@
                   </a:txBody>
                   <a:tcPr>
                     <a:solidFill>
-                      <a:srgbClr val="202036"/>
+                      <a:srgbClr val="F0F2F7"/>
                     </a:solidFill>
                   </a:tcPr>
                 </a:tc>
@@ -5313,7 +5315,7 @@
                       <a:pPr>
                         <a:defRPr sz="1100" b="0">
                           <a:solidFill>
-                            <a:srgbClr val="B0B0C5"/>
+                            <a:srgbClr val="3D3D56"/>
                           </a:solidFill>
                           <a:latin typeface="Arial"/>
                         </a:defRPr>
@@ -5325,7 +5327,7 @@
                   </a:txBody>
                   <a:tcPr>
                     <a:solidFill>
-                      <a:srgbClr val="202036"/>
+                      <a:srgbClr val="F0F2F7"/>
                     </a:solidFill>
                   </a:tcPr>
                 </a:tc>
@@ -5337,7 +5339,7 @@
                       <a:pPr>
                         <a:defRPr sz="1100" b="0">
                           <a:solidFill>
-                            <a:srgbClr val="B0B0C5"/>
+                            <a:srgbClr val="3D3D56"/>
                           </a:solidFill>
                           <a:latin typeface="Arial"/>
                         </a:defRPr>
@@ -5349,7 +5351,7 @@
                   </a:txBody>
                   <a:tcPr>
                     <a:solidFill>
-                      <a:srgbClr val="202036"/>
+                      <a:srgbClr val="F0F2F7"/>
                     </a:solidFill>
                   </a:tcPr>
                 </a:tc>
@@ -5361,7 +5363,7 @@
                       <a:pPr>
                         <a:defRPr sz="1100" b="0">
                           <a:solidFill>
-                            <a:srgbClr val="B0B0C5"/>
+                            <a:srgbClr val="3D3D56"/>
                           </a:solidFill>
                           <a:latin typeface="Arial"/>
                         </a:defRPr>
@@ -5373,7 +5375,7 @@
                   </a:txBody>
                   <a:tcPr>
                     <a:solidFill>
-                      <a:srgbClr val="202036"/>
+                      <a:srgbClr val="F0F2F7"/>
                     </a:solidFill>
                   </a:tcPr>
                 </a:tc>
@@ -5385,7 +5387,7 @@
                       <a:pPr>
                         <a:defRPr sz="1100" b="0">
                           <a:solidFill>
-                            <a:srgbClr val="B0B0C5"/>
+                            <a:srgbClr val="3D3D56"/>
                           </a:solidFill>
                           <a:latin typeface="Arial"/>
                         </a:defRPr>
@@ -5397,7 +5399,7 @@
                   </a:txBody>
                   <a:tcPr>
                     <a:solidFill>
-                      <a:srgbClr val="202036"/>
+                      <a:srgbClr val="F0F2F7"/>
                     </a:solidFill>
                   </a:tcPr>
                 </a:tc>
@@ -5411,7 +5413,7 @@
                       <a:pPr>
                         <a:defRPr sz="1100" b="0">
                           <a:solidFill>
-                            <a:srgbClr val="B0B0C5"/>
+                            <a:srgbClr val="3D3D56"/>
                           </a:solidFill>
                           <a:latin typeface="Arial"/>
                         </a:defRPr>
@@ -5423,7 +5425,7 @@
                   </a:txBody>
                   <a:tcPr>
                     <a:solidFill>
-                      <a:srgbClr val="25253D"/>
+                      <a:srgbClr val="FFFFFF"/>
                     </a:solidFill>
                   </a:tcPr>
                 </a:tc>
@@ -5435,7 +5437,7 @@
                       <a:pPr>
                         <a:defRPr sz="1100" b="0">
                           <a:solidFill>
-                            <a:srgbClr val="B0B0C5"/>
+                            <a:srgbClr val="3D3D56"/>
                           </a:solidFill>
                           <a:latin typeface="Arial"/>
                         </a:defRPr>
@@ -5447,7 +5449,7 @@
                   </a:txBody>
                   <a:tcPr>
                     <a:solidFill>
-                      <a:srgbClr val="25253D"/>
+                      <a:srgbClr val="FFFFFF"/>
                     </a:solidFill>
                   </a:tcPr>
                 </a:tc>
@@ -5459,7 +5461,7 @@
                       <a:pPr>
                         <a:defRPr sz="1100" b="0">
                           <a:solidFill>
-                            <a:srgbClr val="B0B0C5"/>
+                            <a:srgbClr val="3D3D56"/>
                           </a:solidFill>
                           <a:latin typeface="Arial"/>
                         </a:defRPr>
@@ -5471,7 +5473,7 @@
                   </a:txBody>
                   <a:tcPr>
                     <a:solidFill>
-                      <a:srgbClr val="25253D"/>
+                      <a:srgbClr val="FFFFFF"/>
                     </a:solidFill>
                   </a:tcPr>
                 </a:tc>
@@ -5483,7 +5485,7 @@
                       <a:pPr>
                         <a:defRPr sz="1100" b="0">
                           <a:solidFill>
-                            <a:srgbClr val="B0B0C5"/>
+                            <a:srgbClr val="3D3D56"/>
                           </a:solidFill>
                           <a:latin typeface="Arial"/>
                         </a:defRPr>
@@ -5495,7 +5497,7 @@
                   </a:txBody>
                   <a:tcPr>
                     <a:solidFill>
-                      <a:srgbClr val="25253D"/>
+                      <a:srgbClr val="FFFFFF"/>
                     </a:solidFill>
                   </a:tcPr>
                 </a:tc>
@@ -5507,7 +5509,7 @@
                       <a:pPr>
                         <a:defRPr sz="1100" b="0">
                           <a:solidFill>
-                            <a:srgbClr val="B0B0C5"/>
+                            <a:srgbClr val="3D3D56"/>
                           </a:solidFill>
                           <a:latin typeface="Arial"/>
                         </a:defRPr>
@@ -5519,7 +5521,7 @@
                   </a:txBody>
                   <a:tcPr>
                     <a:solidFill>
-                      <a:srgbClr val="25253D"/>
+                      <a:srgbClr val="FFFFFF"/>
                     </a:solidFill>
                   </a:tcPr>
                 </a:tc>
@@ -5533,7 +5535,7 @@
                       <a:pPr>
                         <a:defRPr sz="1100" b="0">
                           <a:solidFill>
-                            <a:srgbClr val="B0B0C5"/>
+                            <a:srgbClr val="3D3D56"/>
                           </a:solidFill>
                           <a:latin typeface="Arial"/>
                         </a:defRPr>
@@ -5545,7 +5547,7 @@
                   </a:txBody>
                   <a:tcPr>
                     <a:solidFill>
-                      <a:srgbClr val="202036"/>
+                      <a:srgbClr val="F0F2F7"/>
                     </a:solidFill>
                   </a:tcPr>
                 </a:tc>
@@ -5557,7 +5559,7 @@
                       <a:pPr>
                         <a:defRPr sz="1100" b="0">
                           <a:solidFill>
-                            <a:srgbClr val="B0B0C5"/>
+                            <a:srgbClr val="3D3D56"/>
                           </a:solidFill>
                           <a:latin typeface="Arial"/>
                         </a:defRPr>
@@ -5569,7 +5571,7 @@
                   </a:txBody>
                   <a:tcPr>
                     <a:solidFill>
-                      <a:srgbClr val="202036"/>
+                      <a:srgbClr val="F0F2F7"/>
                     </a:solidFill>
                   </a:tcPr>
                 </a:tc>
@@ -5581,7 +5583,7 @@
                       <a:pPr>
                         <a:defRPr sz="1100" b="0">
                           <a:solidFill>
-                            <a:srgbClr val="B0B0C5"/>
+                            <a:srgbClr val="3D3D56"/>
                           </a:solidFill>
                           <a:latin typeface="Arial"/>
                         </a:defRPr>
@@ -5593,7 +5595,7 @@
                   </a:txBody>
                   <a:tcPr>
                     <a:solidFill>
-                      <a:srgbClr val="202036"/>
+                      <a:srgbClr val="F0F2F7"/>
                     </a:solidFill>
                   </a:tcPr>
                 </a:tc>
@@ -5605,7 +5607,7 @@
                       <a:pPr>
                         <a:defRPr sz="1100" b="0">
                           <a:solidFill>
-                            <a:srgbClr val="B0B0C5"/>
+                            <a:srgbClr val="3D3D56"/>
                           </a:solidFill>
                           <a:latin typeface="Arial"/>
                         </a:defRPr>
@@ -5617,7 +5619,7 @@
                   </a:txBody>
                   <a:tcPr>
                     <a:solidFill>
-                      <a:srgbClr val="202036"/>
+                      <a:srgbClr val="F0F2F7"/>
                     </a:solidFill>
                   </a:tcPr>
                 </a:tc>
@@ -5629,7 +5631,7 @@
                       <a:pPr>
                         <a:defRPr sz="1100" b="0">
                           <a:solidFill>
-                            <a:srgbClr val="B0B0C5"/>
+                            <a:srgbClr val="3D3D56"/>
                           </a:solidFill>
                           <a:latin typeface="Arial"/>
                         </a:defRPr>
@@ -5641,7 +5643,7 @@
                   </a:txBody>
                   <a:tcPr>
                     <a:solidFill>
-                      <a:srgbClr val="202036"/>
+                      <a:srgbClr val="F0F2F7"/>
                     </a:solidFill>
                   </a:tcPr>
                 </a:tc>
@@ -5655,7 +5657,7 @@
                       <a:pPr>
                         <a:defRPr sz="1100" b="0">
                           <a:solidFill>
-                            <a:srgbClr val="B0B0C5"/>
+                            <a:srgbClr val="3D3D56"/>
                           </a:solidFill>
                           <a:latin typeface="Arial"/>
                         </a:defRPr>
@@ -5667,7 +5669,7 @@
                   </a:txBody>
                   <a:tcPr>
                     <a:solidFill>
-                      <a:srgbClr val="25253D"/>
+                      <a:srgbClr val="FFFFFF"/>
                     </a:solidFill>
                   </a:tcPr>
                 </a:tc>
@@ -5679,7 +5681,7 @@
                       <a:pPr>
                         <a:defRPr sz="1100" b="0">
                           <a:solidFill>
-                            <a:srgbClr val="B0B0C5"/>
+                            <a:srgbClr val="3D3D56"/>
                           </a:solidFill>
                           <a:latin typeface="Arial"/>
                         </a:defRPr>
@@ -5691,7 +5693,7 @@
                   </a:txBody>
                   <a:tcPr>
                     <a:solidFill>
-                      <a:srgbClr val="25253D"/>
+                      <a:srgbClr val="FFFFFF"/>
                     </a:solidFill>
                   </a:tcPr>
                 </a:tc>
@@ -5703,7 +5705,7 @@
                       <a:pPr>
                         <a:defRPr sz="1100" b="0">
                           <a:solidFill>
-                            <a:srgbClr val="B0B0C5"/>
+                            <a:srgbClr val="3D3D56"/>
                           </a:solidFill>
                           <a:latin typeface="Arial"/>
                         </a:defRPr>
@@ -5715,7 +5717,7 @@
                   </a:txBody>
                   <a:tcPr>
                     <a:solidFill>
-                      <a:srgbClr val="25253D"/>
+                      <a:srgbClr val="FFFFFF"/>
                     </a:solidFill>
                   </a:tcPr>
                 </a:tc>
@@ -5727,7 +5729,7 @@
                       <a:pPr>
                         <a:defRPr sz="1100" b="0">
                           <a:solidFill>
-                            <a:srgbClr val="B0B0C5"/>
+                            <a:srgbClr val="3D3D56"/>
                           </a:solidFill>
                           <a:latin typeface="Arial"/>
                         </a:defRPr>
@@ -5739,7 +5741,7 @@
                   </a:txBody>
                   <a:tcPr>
                     <a:solidFill>
-                      <a:srgbClr val="25253D"/>
+                      <a:srgbClr val="FFFFFF"/>
                     </a:solidFill>
                   </a:tcPr>
                 </a:tc>
@@ -5751,7 +5753,7 @@
                       <a:pPr>
                         <a:defRPr sz="1100" b="0">
                           <a:solidFill>
-                            <a:srgbClr val="B0B0C5"/>
+                            <a:srgbClr val="3D3D56"/>
                           </a:solidFill>
                           <a:latin typeface="Arial"/>
                         </a:defRPr>
@@ -5763,7 +5765,7 @@
                   </a:txBody>
                   <a:tcPr>
                     <a:solidFill>
-                      <a:srgbClr val="25253D"/>
+                      <a:srgbClr val="FFFFFF"/>
                     </a:solidFill>
                   </a:tcPr>
                 </a:tc>
@@ -5777,7 +5779,7 @@
                       <a:pPr>
                         <a:defRPr sz="1100" b="0">
                           <a:solidFill>
-                            <a:srgbClr val="B0B0C5"/>
+                            <a:srgbClr val="3D3D56"/>
                           </a:solidFill>
                           <a:latin typeface="Arial"/>
                         </a:defRPr>
@@ -5789,7 +5791,7 @@
                   </a:txBody>
                   <a:tcPr>
                     <a:solidFill>
-                      <a:srgbClr val="202036"/>
+                      <a:srgbClr val="F0F2F7"/>
                     </a:solidFill>
                   </a:tcPr>
                 </a:tc>
@@ -5801,7 +5803,7 @@
                       <a:pPr>
                         <a:defRPr sz="1100" b="0">
                           <a:solidFill>
-                            <a:srgbClr val="B0B0C5"/>
+                            <a:srgbClr val="3D3D56"/>
                           </a:solidFill>
                           <a:latin typeface="Arial"/>
                         </a:defRPr>
@@ -5813,7 +5815,7 @@
                   </a:txBody>
                   <a:tcPr>
                     <a:solidFill>
-                      <a:srgbClr val="202036"/>
+                      <a:srgbClr val="F0F2F7"/>
                     </a:solidFill>
                   </a:tcPr>
                 </a:tc>
@@ -5825,7 +5827,7 @@
                       <a:pPr>
                         <a:defRPr sz="1100" b="0">
                           <a:solidFill>
-                            <a:srgbClr val="B0B0C5"/>
+                            <a:srgbClr val="3D3D56"/>
                           </a:solidFill>
                           <a:latin typeface="Arial"/>
                         </a:defRPr>
@@ -5837,7 +5839,7 @@
                   </a:txBody>
                   <a:tcPr>
                     <a:solidFill>
-                      <a:srgbClr val="202036"/>
+                      <a:srgbClr val="F0F2F7"/>
                     </a:solidFill>
                   </a:tcPr>
                 </a:tc>
@@ -5849,7 +5851,7 @@
                       <a:pPr>
                         <a:defRPr sz="1100" b="0">
                           <a:solidFill>
-                            <a:srgbClr val="B0B0C5"/>
+                            <a:srgbClr val="3D3D56"/>
                           </a:solidFill>
                           <a:latin typeface="Arial"/>
                         </a:defRPr>
@@ -5861,7 +5863,7 @@
                   </a:txBody>
                   <a:tcPr>
                     <a:solidFill>
-                      <a:srgbClr val="202036"/>
+                      <a:srgbClr val="F0F2F7"/>
                     </a:solidFill>
                   </a:tcPr>
                 </a:tc>
@@ -5873,7 +5875,7 @@
                       <a:pPr>
                         <a:defRPr sz="1100" b="0">
                           <a:solidFill>
-                            <a:srgbClr val="B0B0C5"/>
+                            <a:srgbClr val="3D3D56"/>
                           </a:solidFill>
                           <a:latin typeface="Arial"/>
                         </a:defRPr>
@@ -5885,7 +5887,7 @@
                   </a:txBody>
                   <a:tcPr>
                     <a:solidFill>
-                      <a:srgbClr val="202036"/>
+                      <a:srgbClr val="F0F2F7"/>
                     </a:solidFill>
                   </a:tcPr>
                 </a:tc>
@@ -5899,7 +5901,7 @@
                       <a:pPr>
                         <a:defRPr sz="1100" b="0">
                           <a:solidFill>
-                            <a:srgbClr val="B0B0C5"/>
+                            <a:srgbClr val="3D3D56"/>
                           </a:solidFill>
                           <a:latin typeface="Arial"/>
                         </a:defRPr>
@@ -5911,7 +5913,7 @@
                   </a:txBody>
                   <a:tcPr>
                     <a:solidFill>
-                      <a:srgbClr val="25253D"/>
+                      <a:srgbClr val="FFFFFF"/>
                     </a:solidFill>
                   </a:tcPr>
                 </a:tc>
@@ -5923,7 +5925,7 @@
                       <a:pPr>
                         <a:defRPr sz="1100" b="0">
                           <a:solidFill>
-                            <a:srgbClr val="B0B0C5"/>
+                            <a:srgbClr val="3D3D56"/>
                           </a:solidFill>
                           <a:latin typeface="Arial"/>
                         </a:defRPr>
@@ -5935,7 +5937,7 @@
                   </a:txBody>
                   <a:tcPr>
                     <a:solidFill>
-                      <a:srgbClr val="25253D"/>
+                      <a:srgbClr val="FFFFFF"/>
                     </a:solidFill>
                   </a:tcPr>
                 </a:tc>
@@ -5947,7 +5949,7 @@
                       <a:pPr>
                         <a:defRPr sz="1100" b="0">
                           <a:solidFill>
-                            <a:srgbClr val="B0B0C5"/>
+                            <a:srgbClr val="3D3D56"/>
                           </a:solidFill>
                           <a:latin typeface="Arial"/>
                         </a:defRPr>
@@ -5959,7 +5961,7 @@
                   </a:txBody>
                   <a:tcPr>
                     <a:solidFill>
-                      <a:srgbClr val="25253D"/>
+                      <a:srgbClr val="FFFFFF"/>
                     </a:solidFill>
                   </a:tcPr>
                 </a:tc>
@@ -5971,7 +5973,7 @@
                       <a:pPr>
                         <a:defRPr sz="1100" b="0">
                           <a:solidFill>
-                            <a:srgbClr val="B0B0C5"/>
+                            <a:srgbClr val="3D3D56"/>
                           </a:solidFill>
                           <a:latin typeface="Arial"/>
                         </a:defRPr>
@@ -5983,7 +5985,7 @@
                   </a:txBody>
                   <a:tcPr>
                     <a:solidFill>
-                      <a:srgbClr val="25253D"/>
+                      <a:srgbClr val="FFFFFF"/>
                     </a:solidFill>
                   </a:tcPr>
                 </a:tc>
@@ -5995,7 +5997,7 @@
                       <a:pPr>
                         <a:defRPr sz="1100" b="0">
                           <a:solidFill>
-                            <a:srgbClr val="B0B0C5"/>
+                            <a:srgbClr val="3D3D56"/>
                           </a:solidFill>
                           <a:latin typeface="Arial"/>
                         </a:defRPr>
@@ -6007,7 +6009,7 @@
                   </a:txBody>
                   <a:tcPr>
                     <a:solidFill>
-                      <a:srgbClr val="25253D"/>
+                      <a:srgbClr val="FFFFFF"/>
                     </a:solidFill>
                   </a:tcPr>
                 </a:tc>
@@ -6031,10 +6033,12 @@
             <a:avLst/>
           </a:prstGeom>
           <a:solidFill>
-            <a:srgbClr val="25253D"/>
+            <a:srgbClr val="F0F2F7"/>
           </a:solidFill>
-          <a:ln>
-            <a:noFill/>
+          <a:ln w="12700">
+            <a:solidFill>
+              <a:srgbClr val="DEE1EB"/>
+            </a:solidFill>
           </a:ln>
         </p:spPr>
         <p:style>
@@ -6087,7 +6091,7 @@
               </a:spcAft>
               <a:defRPr sz="1600" b="1">
                 <a:solidFill>
-                  <a:srgbClr val="4E8CFF"/>
+                  <a:srgbClr val="2D5BE3"/>
                 </a:solidFill>
                 <a:latin typeface="Arial"/>
               </a:defRPr>
@@ -6103,7 +6107,7 @@
               </a:spcAft>
               <a:defRPr sz="1400" b="0">
                 <a:solidFill>
-                  <a:srgbClr val="00D4AA"/>
+                  <a:srgbClr val="009B8D"/>
                 </a:solidFill>
                 <a:latin typeface="Arial"/>
               </a:defRPr>
@@ -6119,7 +6123,7 @@
               </a:spcAft>
               <a:defRPr sz="1200" b="0">
                 <a:solidFill>
-                  <a:srgbClr val="B0B0C5"/>
+                  <a:srgbClr val="3D3D56"/>
                 </a:solidFill>
                 <a:latin typeface="Arial"/>
               </a:defRPr>
@@ -6155,7 +6159,7 @@
             <a:pPr algn="r">
               <a:defRPr sz="1000" b="0">
                 <a:solidFill>
-                  <a:srgbClr val="80809A"/>
+                  <a:srgbClr val="787896"/>
                 </a:solidFill>
                 <a:latin typeface="Arial"/>
               </a:defRPr>
@@ -6180,7 +6184,7 @@
     <p:bg>
       <p:bgPr>
         <a:solidFill>
-          <a:srgbClr val="1B1B2F"/>
+          <a:srgbClr val="FAFAFC"/>
         </a:solidFill>
         <a:effectLst/>
       </p:bgPr>
@@ -6207,7 +6211,7 @@
             <a:avLst/>
           </a:prstGeom>
           <a:solidFill>
-            <a:srgbClr val="25253D"/>
+            <a:srgbClr val="FFFFFF"/>
           </a:solidFill>
           <a:ln>
             <a:noFill/>
@@ -6250,7 +6254,7 @@
             <a:avLst/>
           </a:prstGeom>
           <a:solidFill>
-            <a:srgbClr val="4E8CFF"/>
+            <a:srgbClr val="2D5BE3"/>
           </a:solidFill>
           <a:ln>
             <a:noFill/>
@@ -6303,7 +6307,7 @@
             <a:pPr algn="l">
               <a:defRPr sz="2200" b="1">
                 <a:solidFill>
-                  <a:srgbClr val="F0F0F5"/>
+                  <a:srgbClr val="1A1A2E"/>
                 </a:solidFill>
                 <a:latin typeface="Arial"/>
               </a:defRPr>
@@ -6339,7 +6343,7 @@
             <a:pPr algn="r">
               <a:defRPr sz="1200" b="0">
                 <a:solidFill>
-                  <a:srgbClr val="80809A"/>
+                  <a:srgbClr val="787896"/>
                 </a:solidFill>
                 <a:latin typeface="Arial"/>
               </a:defRPr>
@@ -6383,7 +6387,7 @@
                       <a:pPr>
                         <a:defRPr sz="1200" b="1">
                           <a:solidFill>
-                            <a:srgbClr val="F0F0F5"/>
+                            <a:srgbClr val="FFFFFF"/>
                           </a:solidFill>
                           <a:latin typeface="Arial"/>
                         </a:defRPr>
@@ -6395,7 +6399,7 @@
                   </a:txBody>
                   <a:tcPr>
                     <a:solidFill>
-                      <a:srgbClr val="2D3A6D"/>
+                      <a:srgbClr val="2D5BE3"/>
                     </a:solidFill>
                   </a:tcPr>
                 </a:tc>
@@ -6407,7 +6411,7 @@
                       <a:pPr>
                         <a:defRPr sz="1200" b="1">
                           <a:solidFill>
-                            <a:srgbClr val="F0F0F5"/>
+                            <a:srgbClr val="FFFFFF"/>
                           </a:solidFill>
                           <a:latin typeface="Arial"/>
                         </a:defRPr>
@@ -6419,7 +6423,7 @@
                   </a:txBody>
                   <a:tcPr>
                     <a:solidFill>
-                      <a:srgbClr val="2D3A6D"/>
+                      <a:srgbClr val="2D5BE3"/>
                     </a:solidFill>
                   </a:tcPr>
                 </a:tc>
@@ -6431,7 +6435,7 @@
                       <a:pPr>
                         <a:defRPr sz="1200" b="1">
                           <a:solidFill>
-                            <a:srgbClr val="F0F0F5"/>
+                            <a:srgbClr val="FFFFFF"/>
                           </a:solidFill>
                           <a:latin typeface="Arial"/>
                         </a:defRPr>
@@ -6443,7 +6447,7 @@
                   </a:txBody>
                   <a:tcPr>
                     <a:solidFill>
-                      <a:srgbClr val="2D3A6D"/>
+                      <a:srgbClr val="2D5BE3"/>
                     </a:solidFill>
                   </a:tcPr>
                 </a:tc>
@@ -6455,7 +6459,7 @@
                       <a:pPr>
                         <a:defRPr sz="1200" b="1">
                           <a:solidFill>
-                            <a:srgbClr val="F0F0F5"/>
+                            <a:srgbClr val="FFFFFF"/>
                           </a:solidFill>
                           <a:latin typeface="Arial"/>
                         </a:defRPr>
@@ -6467,7 +6471,7 @@
                   </a:txBody>
                   <a:tcPr>
                     <a:solidFill>
-                      <a:srgbClr val="2D3A6D"/>
+                      <a:srgbClr val="2D5BE3"/>
                     </a:solidFill>
                   </a:tcPr>
                 </a:tc>
@@ -6481,7 +6485,7 @@
                       <a:pPr>
                         <a:defRPr sz="1100" b="0">
                           <a:solidFill>
-                            <a:srgbClr val="B0B0C5"/>
+                            <a:srgbClr val="3D3D56"/>
                           </a:solidFill>
                           <a:latin typeface="Arial"/>
                         </a:defRPr>
@@ -6493,7 +6497,7 @@
                   </a:txBody>
                   <a:tcPr>
                     <a:solidFill>
-                      <a:srgbClr val="25253D"/>
+                      <a:srgbClr val="FFFFFF"/>
                     </a:solidFill>
                   </a:tcPr>
                 </a:tc>
@@ -6505,7 +6509,7 @@
                       <a:pPr>
                         <a:defRPr sz="1100" b="0">
                           <a:solidFill>
-                            <a:srgbClr val="B0B0C5"/>
+                            <a:srgbClr val="3D3D56"/>
                           </a:solidFill>
                           <a:latin typeface="Arial"/>
                         </a:defRPr>
@@ -6517,7 +6521,7 @@
                   </a:txBody>
                   <a:tcPr>
                     <a:solidFill>
-                      <a:srgbClr val="25253D"/>
+                      <a:srgbClr val="FFFFFF"/>
                     </a:solidFill>
                   </a:tcPr>
                 </a:tc>
@@ -6529,7 +6533,7 @@
                       <a:pPr>
                         <a:defRPr sz="1100" b="0">
                           <a:solidFill>
-                            <a:srgbClr val="B0B0C5"/>
+                            <a:srgbClr val="3D3D56"/>
                           </a:solidFill>
                           <a:latin typeface="Arial"/>
                         </a:defRPr>
@@ -6541,7 +6545,7 @@
                   </a:txBody>
                   <a:tcPr>
                     <a:solidFill>
-                      <a:srgbClr val="25253D"/>
+                      <a:srgbClr val="FFFFFF"/>
                     </a:solidFill>
                   </a:tcPr>
                 </a:tc>
@@ -6553,7 +6557,7 @@
                       <a:pPr>
                         <a:defRPr sz="1100" b="0">
                           <a:solidFill>
-                            <a:srgbClr val="B0B0C5"/>
+                            <a:srgbClr val="3D3D56"/>
                           </a:solidFill>
                           <a:latin typeface="Arial"/>
                         </a:defRPr>
@@ -6565,7 +6569,7 @@
                   </a:txBody>
                   <a:tcPr>
                     <a:solidFill>
-                      <a:srgbClr val="25253D"/>
+                      <a:srgbClr val="FFFFFF"/>
                     </a:solidFill>
                   </a:tcPr>
                 </a:tc>
@@ -6579,7 +6583,7 @@
                       <a:pPr>
                         <a:defRPr sz="1100" b="0">
                           <a:solidFill>
-                            <a:srgbClr val="B0B0C5"/>
+                            <a:srgbClr val="3D3D56"/>
                           </a:solidFill>
                           <a:latin typeface="Arial"/>
                         </a:defRPr>
@@ -6591,7 +6595,7 @@
                   </a:txBody>
                   <a:tcPr>
                     <a:solidFill>
-                      <a:srgbClr val="202036"/>
+                      <a:srgbClr val="F0F2F7"/>
                     </a:solidFill>
                   </a:tcPr>
                 </a:tc>
@@ -6603,7 +6607,7 @@
                       <a:pPr>
                         <a:defRPr sz="1100" b="0">
                           <a:solidFill>
-                            <a:srgbClr val="B0B0C5"/>
+                            <a:srgbClr val="3D3D56"/>
                           </a:solidFill>
                           <a:latin typeface="Arial"/>
                         </a:defRPr>
@@ -6615,7 +6619,7 @@
                   </a:txBody>
                   <a:tcPr>
                     <a:solidFill>
-                      <a:srgbClr val="202036"/>
+                      <a:srgbClr val="F0F2F7"/>
                     </a:solidFill>
                   </a:tcPr>
                 </a:tc>
@@ -6627,7 +6631,7 @@
                       <a:pPr>
                         <a:defRPr sz="1100" b="0">
                           <a:solidFill>
-                            <a:srgbClr val="B0B0C5"/>
+                            <a:srgbClr val="3D3D56"/>
                           </a:solidFill>
                           <a:latin typeface="Arial"/>
                         </a:defRPr>
@@ -6639,7 +6643,7 @@
                   </a:txBody>
                   <a:tcPr>
                     <a:solidFill>
-                      <a:srgbClr val="202036"/>
+                      <a:srgbClr val="F0F2F7"/>
                     </a:solidFill>
                   </a:tcPr>
                 </a:tc>
@@ -6651,7 +6655,7 @@
                       <a:pPr>
                         <a:defRPr sz="1100" b="0">
                           <a:solidFill>
-                            <a:srgbClr val="B0B0C5"/>
+                            <a:srgbClr val="3D3D56"/>
                           </a:solidFill>
                           <a:latin typeface="Arial"/>
                         </a:defRPr>
@@ -6663,7 +6667,7 @@
                   </a:txBody>
                   <a:tcPr>
                     <a:solidFill>
-                      <a:srgbClr val="202036"/>
+                      <a:srgbClr val="F0F2F7"/>
                     </a:solidFill>
                   </a:tcPr>
                 </a:tc>
@@ -6677,7 +6681,7 @@
                       <a:pPr>
                         <a:defRPr sz="1100" b="0">
                           <a:solidFill>
-                            <a:srgbClr val="B0B0C5"/>
+                            <a:srgbClr val="3D3D56"/>
                           </a:solidFill>
                           <a:latin typeface="Arial"/>
                         </a:defRPr>
@@ -6689,7 +6693,7 @@
                   </a:txBody>
                   <a:tcPr>
                     <a:solidFill>
-                      <a:srgbClr val="25253D"/>
+                      <a:srgbClr val="FFFFFF"/>
                     </a:solidFill>
                   </a:tcPr>
                 </a:tc>
@@ -6701,7 +6705,7 @@
                       <a:pPr>
                         <a:defRPr sz="1100" b="0">
                           <a:solidFill>
-                            <a:srgbClr val="B0B0C5"/>
+                            <a:srgbClr val="3D3D56"/>
                           </a:solidFill>
                           <a:latin typeface="Arial"/>
                         </a:defRPr>
@@ -6713,7 +6717,7 @@
                   </a:txBody>
                   <a:tcPr>
                     <a:solidFill>
-                      <a:srgbClr val="25253D"/>
+                      <a:srgbClr val="FFFFFF"/>
                     </a:solidFill>
                   </a:tcPr>
                 </a:tc>
@@ -6725,7 +6729,7 @@
                       <a:pPr>
                         <a:defRPr sz="1100" b="0">
                           <a:solidFill>
-                            <a:srgbClr val="B0B0C5"/>
+                            <a:srgbClr val="3D3D56"/>
                           </a:solidFill>
                           <a:latin typeface="Arial"/>
                         </a:defRPr>
@@ -6737,7 +6741,7 @@
                   </a:txBody>
                   <a:tcPr>
                     <a:solidFill>
-                      <a:srgbClr val="25253D"/>
+                      <a:srgbClr val="FFFFFF"/>
                     </a:solidFill>
                   </a:tcPr>
                 </a:tc>
@@ -6749,7 +6753,7 @@
                       <a:pPr>
                         <a:defRPr sz="1100" b="0">
                           <a:solidFill>
-                            <a:srgbClr val="B0B0C5"/>
+                            <a:srgbClr val="3D3D56"/>
                           </a:solidFill>
                           <a:latin typeface="Arial"/>
                         </a:defRPr>
@@ -6761,7 +6765,7 @@
                   </a:txBody>
                   <a:tcPr>
                     <a:solidFill>
-                      <a:srgbClr val="25253D"/>
+                      <a:srgbClr val="FFFFFF"/>
                     </a:solidFill>
                   </a:tcPr>
                 </a:tc>
@@ -6775,7 +6779,7 @@
                       <a:pPr>
                         <a:defRPr sz="1100" b="0">
                           <a:solidFill>
-                            <a:srgbClr val="B0B0C5"/>
+                            <a:srgbClr val="3D3D56"/>
                           </a:solidFill>
                           <a:latin typeface="Arial"/>
                         </a:defRPr>
@@ -6787,7 +6791,7 @@
                   </a:txBody>
                   <a:tcPr>
                     <a:solidFill>
-                      <a:srgbClr val="202036"/>
+                      <a:srgbClr val="F0F2F7"/>
                     </a:solidFill>
                   </a:tcPr>
                 </a:tc>
@@ -6799,7 +6803,7 @@
                       <a:pPr>
                         <a:defRPr sz="1100" b="0">
                           <a:solidFill>
-                            <a:srgbClr val="B0B0C5"/>
+                            <a:srgbClr val="3D3D56"/>
                           </a:solidFill>
                           <a:latin typeface="Arial"/>
                         </a:defRPr>
@@ -6811,7 +6815,7 @@
                   </a:txBody>
                   <a:tcPr>
                     <a:solidFill>
-                      <a:srgbClr val="202036"/>
+                      <a:srgbClr val="F0F2F7"/>
                     </a:solidFill>
                   </a:tcPr>
                 </a:tc>
@@ -6823,7 +6827,7 @@
                       <a:pPr>
                         <a:defRPr sz="1100" b="0">
                           <a:solidFill>
-                            <a:srgbClr val="B0B0C5"/>
+                            <a:srgbClr val="3D3D56"/>
                           </a:solidFill>
                           <a:latin typeface="Arial"/>
                         </a:defRPr>
@@ -6835,7 +6839,7 @@
                   </a:txBody>
                   <a:tcPr>
                     <a:solidFill>
-                      <a:srgbClr val="202036"/>
+                      <a:srgbClr val="F0F2F7"/>
                     </a:solidFill>
                   </a:tcPr>
                 </a:tc>
@@ -6847,7 +6851,7 @@
                       <a:pPr>
                         <a:defRPr sz="1100" b="0">
                           <a:solidFill>
-                            <a:srgbClr val="B0B0C5"/>
+                            <a:srgbClr val="3D3D56"/>
                           </a:solidFill>
                           <a:latin typeface="Arial"/>
                         </a:defRPr>
@@ -6859,7 +6863,7 @@
                   </a:txBody>
                   <a:tcPr>
                     <a:solidFill>
-                      <a:srgbClr val="202036"/>
+                      <a:srgbClr val="F0F2F7"/>
                     </a:solidFill>
                   </a:tcPr>
                 </a:tc>
@@ -6873,7 +6877,7 @@
                       <a:pPr>
                         <a:defRPr sz="1100" b="0">
                           <a:solidFill>
-                            <a:srgbClr val="B0B0C5"/>
+                            <a:srgbClr val="3D3D56"/>
                           </a:solidFill>
                           <a:latin typeface="Arial"/>
                         </a:defRPr>
@@ -6885,7 +6889,7 @@
                   </a:txBody>
                   <a:tcPr>
                     <a:solidFill>
-                      <a:srgbClr val="25253D"/>
+                      <a:srgbClr val="FFFFFF"/>
                     </a:solidFill>
                   </a:tcPr>
                 </a:tc>
@@ -6897,7 +6901,7 @@
                       <a:pPr>
                         <a:defRPr sz="1100" b="0">
                           <a:solidFill>
-                            <a:srgbClr val="B0B0C5"/>
+                            <a:srgbClr val="3D3D56"/>
                           </a:solidFill>
                           <a:latin typeface="Arial"/>
                         </a:defRPr>
@@ -6909,7 +6913,7 @@
                   </a:txBody>
                   <a:tcPr>
                     <a:solidFill>
-                      <a:srgbClr val="25253D"/>
+                      <a:srgbClr val="FFFFFF"/>
                     </a:solidFill>
                   </a:tcPr>
                 </a:tc>
@@ -6921,7 +6925,7 @@
                       <a:pPr>
                         <a:defRPr sz="1100" b="0">
                           <a:solidFill>
-                            <a:srgbClr val="B0B0C5"/>
+                            <a:srgbClr val="3D3D56"/>
                           </a:solidFill>
                           <a:latin typeface="Arial"/>
                         </a:defRPr>
@@ -6933,7 +6937,7 @@
                   </a:txBody>
                   <a:tcPr>
                     <a:solidFill>
-                      <a:srgbClr val="25253D"/>
+                      <a:srgbClr val="FFFFFF"/>
                     </a:solidFill>
                   </a:tcPr>
                 </a:tc>
@@ -6945,7 +6949,7 @@
                       <a:pPr>
                         <a:defRPr sz="1100" b="0">
                           <a:solidFill>
-                            <a:srgbClr val="B0B0C5"/>
+                            <a:srgbClr val="3D3D56"/>
                           </a:solidFill>
                           <a:latin typeface="Arial"/>
                         </a:defRPr>
@@ -6957,7 +6961,7 @@
                   </a:txBody>
                   <a:tcPr>
                     <a:solidFill>
-                      <a:srgbClr val="25253D"/>
+                      <a:srgbClr val="FFFFFF"/>
                     </a:solidFill>
                   </a:tcPr>
                 </a:tc>
@@ -6971,7 +6975,7 @@
                       <a:pPr>
                         <a:defRPr sz="1100" b="0">
                           <a:solidFill>
-                            <a:srgbClr val="B0B0C5"/>
+                            <a:srgbClr val="3D3D56"/>
                           </a:solidFill>
                           <a:latin typeface="Arial"/>
                         </a:defRPr>
@@ -6983,7 +6987,7 @@
                   </a:txBody>
                   <a:tcPr>
                     <a:solidFill>
-                      <a:srgbClr val="202036"/>
+                      <a:srgbClr val="F0F2F7"/>
                     </a:solidFill>
                   </a:tcPr>
                 </a:tc>
@@ -6995,7 +6999,7 @@
                       <a:pPr>
                         <a:defRPr sz="1100" b="0">
                           <a:solidFill>
-                            <a:srgbClr val="B0B0C5"/>
+                            <a:srgbClr val="3D3D56"/>
                           </a:solidFill>
                           <a:latin typeface="Arial"/>
                         </a:defRPr>
@@ -7007,7 +7011,7 @@
                   </a:txBody>
                   <a:tcPr>
                     <a:solidFill>
-                      <a:srgbClr val="202036"/>
+                      <a:srgbClr val="F0F2F7"/>
                     </a:solidFill>
                   </a:tcPr>
                 </a:tc>
@@ -7019,7 +7023,7 @@
                       <a:pPr>
                         <a:defRPr sz="1100" b="0">
                           <a:solidFill>
-                            <a:srgbClr val="B0B0C5"/>
+                            <a:srgbClr val="3D3D56"/>
                           </a:solidFill>
                           <a:latin typeface="Arial"/>
                         </a:defRPr>
@@ -7031,7 +7035,7 @@
                   </a:txBody>
                   <a:tcPr>
                     <a:solidFill>
-                      <a:srgbClr val="202036"/>
+                      <a:srgbClr val="F0F2F7"/>
                     </a:solidFill>
                   </a:tcPr>
                 </a:tc>
@@ -7043,7 +7047,7 @@
                       <a:pPr>
                         <a:defRPr sz="1100" b="0">
                           <a:solidFill>
-                            <a:srgbClr val="B0B0C5"/>
+                            <a:srgbClr val="3D3D56"/>
                           </a:solidFill>
                           <a:latin typeface="Arial"/>
                         </a:defRPr>
@@ -7055,7 +7059,7 @@
                   </a:txBody>
                   <a:tcPr>
                     <a:solidFill>
-                      <a:srgbClr val="202036"/>
+                      <a:srgbClr val="F0F2F7"/>
                     </a:solidFill>
                   </a:tcPr>
                 </a:tc>
@@ -7069,7 +7073,7 @@
                       <a:pPr>
                         <a:defRPr sz="1100" b="0">
                           <a:solidFill>
-                            <a:srgbClr val="B0B0C5"/>
+                            <a:srgbClr val="3D3D56"/>
                           </a:solidFill>
                           <a:latin typeface="Arial"/>
                         </a:defRPr>
@@ -7081,7 +7085,7 @@
                   </a:txBody>
                   <a:tcPr>
                     <a:solidFill>
-                      <a:srgbClr val="25253D"/>
+                      <a:srgbClr val="FFFFFF"/>
                     </a:solidFill>
                   </a:tcPr>
                 </a:tc>
@@ -7093,7 +7097,7 @@
                       <a:pPr>
                         <a:defRPr sz="1100" b="0">
                           <a:solidFill>
-                            <a:srgbClr val="B0B0C5"/>
+                            <a:srgbClr val="3D3D56"/>
                           </a:solidFill>
                           <a:latin typeface="Arial"/>
                         </a:defRPr>
@@ -7105,7 +7109,7 @@
                   </a:txBody>
                   <a:tcPr>
                     <a:solidFill>
-                      <a:srgbClr val="25253D"/>
+                      <a:srgbClr val="FFFFFF"/>
                     </a:solidFill>
                   </a:tcPr>
                 </a:tc>
@@ -7117,7 +7121,7 @@
                       <a:pPr>
                         <a:defRPr sz="1100" b="0">
                           <a:solidFill>
-                            <a:srgbClr val="B0B0C5"/>
+                            <a:srgbClr val="3D3D56"/>
                           </a:solidFill>
                           <a:latin typeface="Arial"/>
                         </a:defRPr>
@@ -7129,7 +7133,7 @@
                   </a:txBody>
                   <a:tcPr>
                     <a:solidFill>
-                      <a:srgbClr val="25253D"/>
+                      <a:srgbClr val="FFFFFF"/>
                     </a:solidFill>
                   </a:tcPr>
                 </a:tc>
@@ -7141,7 +7145,7 @@
                       <a:pPr>
                         <a:defRPr sz="1100" b="0">
                           <a:solidFill>
-                            <a:srgbClr val="B0B0C5"/>
+                            <a:srgbClr val="3D3D56"/>
                           </a:solidFill>
                           <a:latin typeface="Arial"/>
                         </a:defRPr>
@@ -7153,7 +7157,7 @@
                   </a:txBody>
                   <a:tcPr>
                     <a:solidFill>
-                      <a:srgbClr val="25253D"/>
+                      <a:srgbClr val="FFFFFF"/>
                     </a:solidFill>
                   </a:tcPr>
                 </a:tc>
@@ -7187,7 +7191,7 @@
             <a:pPr algn="r">
               <a:defRPr sz="1000" b="0">
                 <a:solidFill>
-                  <a:srgbClr val="80809A"/>
+                  <a:srgbClr val="787896"/>
                 </a:solidFill>
                 <a:latin typeface="Arial"/>
               </a:defRPr>
@@ -7212,7 +7216,7 @@
     <p:bg>
       <p:bgPr>
         <a:solidFill>
-          <a:srgbClr val="1B1B2F"/>
+          <a:srgbClr val="FAFAFC"/>
         </a:solidFill>
         <a:effectLst/>
       </p:bgPr>
@@ -7239,7 +7243,7 @@
             <a:avLst/>
           </a:prstGeom>
           <a:solidFill>
-            <a:srgbClr val="25253D"/>
+            <a:srgbClr val="FFFFFF"/>
           </a:solidFill>
           <a:ln>
             <a:noFill/>
@@ -7282,7 +7286,7 @@
             <a:avLst/>
           </a:prstGeom>
           <a:solidFill>
-            <a:srgbClr val="4E8CFF"/>
+            <a:srgbClr val="2D5BE3"/>
           </a:solidFill>
           <a:ln>
             <a:noFill/>
@@ -7335,7 +7339,7 @@
             <a:pPr algn="l">
               <a:defRPr sz="2200" b="1">
                 <a:solidFill>
-                  <a:srgbClr val="F0F0F5"/>
+                  <a:srgbClr val="1A1A2E"/>
                 </a:solidFill>
                 <a:latin typeface="Arial"/>
               </a:defRPr>
@@ -7371,7 +7375,7 @@
             <a:pPr algn="r">
               <a:defRPr sz="1200" b="0">
                 <a:solidFill>
-                  <a:srgbClr val="80809A"/>
+                  <a:srgbClr val="787896"/>
                 </a:solidFill>
                 <a:latin typeface="Arial"/>
               </a:defRPr>
@@ -7397,10 +7401,12 @@
             <a:avLst/>
           </a:prstGeom>
           <a:solidFill>
-            <a:srgbClr val="25253D"/>
+            <a:srgbClr val="F0F2F7"/>
           </a:solidFill>
-          <a:ln>
-            <a:noFill/>
+          <a:ln w="12700">
+            <a:solidFill>
+              <a:srgbClr val="DEE1EB"/>
+            </a:solidFill>
           </a:ln>
         </p:spPr>
         <p:style>
@@ -7453,7 +7459,7 @@
               </a:spcAft>
               <a:defRPr sz="1600" b="1">
                 <a:solidFill>
-                  <a:srgbClr val="4E8CFF"/>
+                  <a:srgbClr val="2D5BE3"/>
                 </a:solidFill>
                 <a:latin typeface="Arial"/>
               </a:defRPr>
@@ -7469,7 +7475,7 @@
               </a:spcAft>
               <a:defRPr sz="1300" b="1">
                 <a:solidFill>
-                  <a:srgbClr val="4E8CFF"/>
+                  <a:srgbClr val="2D5BE3"/>
                 </a:solidFill>
                 <a:latin typeface="Arial"/>
               </a:defRPr>
@@ -7485,7 +7491,7 @@
               </a:spcAft>
               <a:defRPr sz="1200" b="0">
                 <a:solidFill>
-                  <a:srgbClr val="B0B0C5"/>
+                  <a:srgbClr val="3D3D56"/>
                 </a:solidFill>
                 <a:latin typeface="Arial"/>
               </a:defRPr>
@@ -7501,7 +7507,7 @@
               </a:spcAft>
               <a:defRPr sz="1300" b="1">
                 <a:solidFill>
-                  <a:srgbClr val="4E8CFF"/>
+                  <a:srgbClr val="2D5BE3"/>
                 </a:solidFill>
                 <a:latin typeface="Arial"/>
               </a:defRPr>
@@ -7517,7 +7523,7 @@
               </a:spcAft>
               <a:defRPr sz="1200" b="0">
                 <a:solidFill>
-                  <a:srgbClr val="B0B0C5"/>
+                  <a:srgbClr val="3D3D56"/>
                 </a:solidFill>
                 <a:latin typeface="Arial"/>
               </a:defRPr>
@@ -7533,7 +7539,7 @@
               </a:spcAft>
               <a:defRPr sz="1300" b="1">
                 <a:solidFill>
-                  <a:srgbClr val="4E8CFF"/>
+                  <a:srgbClr val="2D5BE3"/>
                 </a:solidFill>
                 <a:latin typeface="Arial"/>
               </a:defRPr>
@@ -7549,7 +7555,7 @@
               </a:spcAft>
               <a:defRPr sz="1200" b="0">
                 <a:solidFill>
-                  <a:srgbClr val="B0B0C5"/>
+                  <a:srgbClr val="3D3D56"/>
                 </a:solidFill>
                 <a:latin typeface="Arial"/>
               </a:defRPr>
@@ -7565,7 +7571,7 @@
               </a:spcAft>
               <a:defRPr sz="1300" b="1">
                 <a:solidFill>
-                  <a:srgbClr val="4E8CFF"/>
+                  <a:srgbClr val="2D5BE3"/>
                 </a:solidFill>
                 <a:latin typeface="Arial"/>
               </a:defRPr>
@@ -7581,7 +7587,7 @@
               </a:spcAft>
               <a:defRPr sz="1200" b="0">
                 <a:solidFill>
-                  <a:srgbClr val="B0B0C5"/>
+                  <a:srgbClr val="3D3D56"/>
                 </a:solidFill>
                 <a:latin typeface="Arial"/>
               </a:defRPr>
@@ -7597,7 +7603,7 @@
               </a:spcAft>
               <a:defRPr sz="1300" b="1">
                 <a:solidFill>
-                  <a:srgbClr val="4E8CFF"/>
+                  <a:srgbClr val="2D5BE3"/>
                 </a:solidFill>
                 <a:latin typeface="Arial"/>
               </a:defRPr>
@@ -7613,7 +7619,7 @@
               </a:spcAft>
               <a:defRPr sz="1200" b="0">
                 <a:solidFill>
-                  <a:srgbClr val="B0B0C5"/>
+                  <a:srgbClr val="3D3D56"/>
                 </a:solidFill>
                 <a:latin typeface="Arial"/>
               </a:defRPr>
@@ -7629,7 +7635,7 @@
               </a:spcAft>
               <a:defRPr sz="1200" b="0">
                 <a:solidFill>
-                  <a:srgbClr val="B0B0C5"/>
+                  <a:srgbClr val="3D3D56"/>
                 </a:solidFill>
                 <a:latin typeface="Arial"/>
               </a:defRPr>
@@ -7645,7 +7651,7 @@
               </a:spcAft>
               <a:defRPr sz="1200" b="0">
                 <a:solidFill>
-                  <a:srgbClr val="FF8C42"/>
+                  <a:srgbClr val="E86A17"/>
                 </a:solidFill>
                 <a:latin typeface="Arial"/>
               </a:defRPr>
@@ -7671,10 +7677,12 @@
             <a:avLst/>
           </a:prstGeom>
           <a:solidFill>
-            <a:srgbClr val="25253D"/>
+            <a:srgbClr val="F0F2F7"/>
           </a:solidFill>
-          <a:ln>
-            <a:noFill/>
+          <a:ln w="12700">
+            <a:solidFill>
+              <a:srgbClr val="DEE1EB"/>
+            </a:solidFill>
           </a:ln>
         </p:spPr>
         <p:style>
@@ -7727,7 +7735,7 @@
               </a:spcAft>
               <a:defRPr sz="1600" b="1">
                 <a:solidFill>
-                  <a:srgbClr val="A878FF"/>
+                  <a:srgbClr val="7C4DFF"/>
                 </a:solidFill>
                 <a:latin typeface="Arial"/>
               </a:defRPr>
@@ -7743,7 +7751,7 @@
               </a:spcAft>
               <a:defRPr sz="1300" b="1">
                 <a:solidFill>
-                  <a:srgbClr val="A878FF"/>
+                  <a:srgbClr val="7C4DFF"/>
                 </a:solidFill>
                 <a:latin typeface="Arial"/>
               </a:defRPr>
@@ -7759,7 +7767,7 @@
               </a:spcAft>
               <a:defRPr sz="1200" b="0">
                 <a:solidFill>
-                  <a:srgbClr val="B0B0C5"/>
+                  <a:srgbClr val="3D3D56"/>
                 </a:solidFill>
                 <a:latin typeface="Arial"/>
               </a:defRPr>
@@ -7775,7 +7783,7 @@
               </a:spcAft>
               <a:defRPr sz="1300" b="1">
                 <a:solidFill>
-                  <a:srgbClr val="A878FF"/>
+                  <a:srgbClr val="7C4DFF"/>
                 </a:solidFill>
                 <a:latin typeface="Arial"/>
               </a:defRPr>
@@ -7791,7 +7799,7 @@
               </a:spcAft>
               <a:defRPr sz="1200" b="0">
                 <a:solidFill>
-                  <a:srgbClr val="B0B0C5"/>
+                  <a:srgbClr val="3D3D56"/>
                 </a:solidFill>
                 <a:latin typeface="Arial"/>
               </a:defRPr>
@@ -7807,7 +7815,7 @@
               </a:spcAft>
               <a:defRPr sz="1300" b="1">
                 <a:solidFill>
-                  <a:srgbClr val="4ECB71"/>
+                  <a:srgbClr val="1B9E4B"/>
                 </a:solidFill>
                 <a:latin typeface="Arial"/>
               </a:defRPr>
@@ -7823,7 +7831,7 @@
               </a:spcAft>
               <a:defRPr sz="1200" b="0">
                 <a:solidFill>
-                  <a:srgbClr val="B0B0C5"/>
+                  <a:srgbClr val="3D3D56"/>
                 </a:solidFill>
                 <a:latin typeface="Arial"/>
               </a:defRPr>
@@ -7839,7 +7847,7 @@
               </a:spcAft>
               <a:defRPr sz="1100" b="0">
                 <a:solidFill>
-                  <a:srgbClr val="80809A"/>
+                  <a:srgbClr val="787896"/>
                 </a:solidFill>
                 <a:latin typeface="Arial"/>
               </a:defRPr>
@@ -7855,7 +7863,7 @@
               </a:spcAft>
               <a:defRPr sz="1300" b="1">
                 <a:solidFill>
-                  <a:srgbClr val="4ECB71"/>
+                  <a:srgbClr val="1B9E4B"/>
                 </a:solidFill>
                 <a:latin typeface="Arial"/>
               </a:defRPr>
@@ -7871,7 +7879,7 @@
               </a:spcAft>
               <a:defRPr sz="1200" b="0">
                 <a:solidFill>
-                  <a:srgbClr val="B0B0C5"/>
+                  <a:srgbClr val="3D3D56"/>
                 </a:solidFill>
                 <a:latin typeface="Arial"/>
               </a:defRPr>
@@ -7887,7 +7895,7 @@
               </a:spcAft>
               <a:defRPr sz="1300" b="1">
                 <a:solidFill>
-                  <a:srgbClr val="FF8C42"/>
+                  <a:srgbClr val="E86A17"/>
                 </a:solidFill>
                 <a:latin typeface="Arial"/>
               </a:defRPr>
@@ -7903,7 +7911,7 @@
               </a:spcAft>
               <a:defRPr sz="1200" b="0">
                 <a:solidFill>
-                  <a:srgbClr val="B0B0C5"/>
+                  <a:srgbClr val="3D3D56"/>
                 </a:solidFill>
                 <a:latin typeface="Arial"/>
               </a:defRPr>
@@ -7919,7 +7927,7 @@
               </a:spcAft>
               <a:defRPr sz="1300" b="1">
                 <a:solidFill>
-                  <a:srgbClr val="FF8C42"/>
+                  <a:srgbClr val="E86A17"/>
                 </a:solidFill>
                 <a:latin typeface="Arial"/>
               </a:defRPr>
@@ -7935,7 +7943,7 @@
               </a:spcAft>
               <a:defRPr sz="1200" b="0">
                 <a:solidFill>
-                  <a:srgbClr val="B0B0C5"/>
+                  <a:srgbClr val="3D3D56"/>
                 </a:solidFill>
                 <a:latin typeface="Arial"/>
               </a:defRPr>
@@ -7951,7 +7959,7 @@
               </a:spcAft>
               <a:defRPr sz="1200" b="1">
                 <a:solidFill>
-                  <a:srgbClr val="FF8C42"/>
+                  <a:srgbClr val="E86A17"/>
                 </a:solidFill>
                 <a:latin typeface="Arial"/>
               </a:defRPr>
@@ -7977,10 +7985,12 @@
             <a:avLst/>
           </a:prstGeom>
           <a:solidFill>
-            <a:srgbClr val="25253D"/>
+            <a:srgbClr val="F0F2F7"/>
           </a:solidFill>
-          <a:ln>
-            <a:noFill/>
+          <a:ln w="12700">
+            <a:solidFill>
+              <a:srgbClr val="DEE1EB"/>
+            </a:solidFill>
           </a:ln>
         </p:spPr>
         <p:style>
@@ -8033,7 +8043,7 @@
               </a:spcAft>
               <a:defRPr sz="1600" b="1">
                 <a:solidFill>
-                  <a:srgbClr val="00D4AA"/>
+                  <a:srgbClr val="009B8D"/>
                 </a:solidFill>
                 <a:latin typeface="Arial"/>
               </a:defRPr>
@@ -8049,7 +8059,7 @@
               </a:spcAft>
               <a:defRPr sz="1300" b="1">
                 <a:solidFill>
-                  <a:srgbClr val="00D4AA"/>
+                  <a:srgbClr val="009B8D"/>
                 </a:solidFill>
                 <a:latin typeface="Arial"/>
               </a:defRPr>
@@ -8065,7 +8075,7 @@
               </a:spcAft>
               <a:defRPr sz="1200" b="0">
                 <a:solidFill>
-                  <a:srgbClr val="B0B0C5"/>
+                  <a:srgbClr val="3D3D56"/>
                 </a:solidFill>
                 <a:latin typeface="Arial"/>
               </a:defRPr>
@@ -8081,7 +8091,7 @@
               </a:spcAft>
               <a:defRPr sz="1200" b="0">
                 <a:solidFill>
-                  <a:srgbClr val="B0B0C5"/>
+                  <a:srgbClr val="3D3D56"/>
                 </a:solidFill>
                 <a:latin typeface="Arial"/>
               </a:defRPr>
@@ -8097,7 +8107,7 @@
               </a:spcAft>
               <a:defRPr sz="1300" b="1">
                 <a:solidFill>
-                  <a:srgbClr val="4ECB71"/>
+                  <a:srgbClr val="1B9E4B"/>
                 </a:solidFill>
                 <a:latin typeface="Arial"/>
               </a:defRPr>
@@ -8113,7 +8123,7 @@
               </a:spcAft>
               <a:defRPr sz="1200" b="0">
                 <a:solidFill>
-                  <a:srgbClr val="B0B0C5"/>
+                  <a:srgbClr val="3D3D56"/>
                 </a:solidFill>
                 <a:latin typeface="Arial"/>
               </a:defRPr>
@@ -8129,7 +8139,7 @@
               </a:spcAft>
               <a:defRPr sz="1200" b="0">
                 <a:solidFill>
-                  <a:srgbClr val="B0B0C5"/>
+                  <a:srgbClr val="3D3D56"/>
                 </a:solidFill>
                 <a:latin typeface="Arial"/>
               </a:defRPr>
@@ -8145,7 +8155,7 @@
               </a:spcAft>
               <a:defRPr sz="1200" b="0">
                 <a:solidFill>
-                  <a:srgbClr val="B0B0C5"/>
+                  <a:srgbClr val="3D3D56"/>
                 </a:solidFill>
                 <a:latin typeface="Arial"/>
               </a:defRPr>
@@ -8161,7 +8171,7 @@
               </a:spcAft>
               <a:defRPr sz="1200" b="0">
                 <a:solidFill>
-                  <a:srgbClr val="80809A"/>
+                  <a:srgbClr val="787896"/>
                 </a:solidFill>
                 <a:latin typeface="Arial"/>
               </a:defRPr>
@@ -8177,7 +8187,7 @@
               </a:spcAft>
               <a:defRPr sz="1200" b="0">
                 <a:solidFill>
-                  <a:srgbClr val="B0B0C5"/>
+                  <a:srgbClr val="3D3D56"/>
                 </a:solidFill>
                 <a:latin typeface="Arial"/>
               </a:defRPr>
@@ -8193,7 +8203,7 @@
               </a:spcAft>
               <a:defRPr sz="1300" b="1">
                 <a:solidFill>
-                  <a:srgbClr val="4ECB71"/>
+                  <a:srgbClr val="1B9E4B"/>
                 </a:solidFill>
                 <a:latin typeface="Arial"/>
               </a:defRPr>
@@ -8209,7 +8219,7 @@
               </a:spcAft>
               <a:defRPr sz="1200" b="0">
                 <a:solidFill>
-                  <a:srgbClr val="B0B0C5"/>
+                  <a:srgbClr val="3D3D56"/>
                 </a:solidFill>
                 <a:latin typeface="Arial"/>
               </a:defRPr>
@@ -8225,7 +8235,7 @@
               </a:spcAft>
               <a:defRPr sz="1200" b="1">
                 <a:solidFill>
-                  <a:srgbClr val="FF8C42"/>
+                  <a:srgbClr val="E86A17"/>
                 </a:solidFill>
                 <a:latin typeface="Arial"/>
               </a:defRPr>
@@ -8261,7 +8271,7 @@
             <a:pPr algn="r">
               <a:defRPr sz="1000" b="0">
                 <a:solidFill>
-                  <a:srgbClr val="80809A"/>
+                  <a:srgbClr val="787896"/>
                 </a:solidFill>
                 <a:latin typeface="Arial"/>
               </a:defRPr>
@@ -8286,7 +8296,7 @@
     <p:bg>
       <p:bgPr>
         <a:solidFill>
-          <a:srgbClr val="1B1B2F"/>
+          <a:srgbClr val="F5F7FB"/>
         </a:solidFill>
         <a:effectLst/>
       </p:bgPr>
@@ -8313,7 +8323,7 @@
             <a:avLst/>
           </a:prstGeom>
           <a:solidFill>
-            <a:srgbClr val="4E8CFF"/>
+            <a:srgbClr val="2D5BE3"/>
           </a:solidFill>
           <a:ln>
             <a:noFill/>
@@ -8366,7 +8376,7 @@
             <a:pPr algn="l">
               <a:defRPr sz="2000" b="1">
                 <a:solidFill>
-                  <a:srgbClr val="4E8CFF"/>
+                  <a:srgbClr val="2D5BE3"/>
                 </a:solidFill>
                 <a:latin typeface="Arial"/>
               </a:defRPr>
@@ -8402,7 +8412,7 @@
             <a:pPr algn="l">
               <a:defRPr sz="4400" b="1">
                 <a:solidFill>
-                  <a:srgbClr val="F0F0F5"/>
+                  <a:srgbClr val="1A1A2E"/>
                 </a:solidFill>
                 <a:latin typeface="Arial"/>
               </a:defRPr>
@@ -8438,7 +8448,7 @@
             <a:pPr algn="l">
               <a:defRPr sz="1800" b="0">
                 <a:solidFill>
-                  <a:srgbClr val="B0B0C5"/>
+                  <a:srgbClr val="3D3D56"/>
                 </a:solidFill>
                 <a:latin typeface="Arial"/>
               </a:defRPr>
@@ -8464,7 +8474,7 @@
             <a:avLst/>
           </a:prstGeom>
           <a:solidFill>
-            <a:srgbClr val="4E8CFF"/>
+            <a:srgbClr val="2D5BE3"/>
           </a:solidFill>
           <a:ln>
             <a:noFill/>
@@ -8517,7 +8527,7 @@
             <a:pPr algn="r">
               <a:defRPr sz="1000" b="0">
                 <a:solidFill>
-                  <a:srgbClr val="80809A"/>
+                  <a:srgbClr val="787896"/>
                 </a:solidFill>
                 <a:latin typeface="Arial"/>
               </a:defRPr>
@@ -8542,7 +8552,7 @@
     <p:bg>
       <p:bgPr>
         <a:solidFill>
-          <a:srgbClr val="1B1B2F"/>
+          <a:srgbClr val="FAFAFC"/>
         </a:solidFill>
         <a:effectLst/>
       </p:bgPr>
@@ -8569,7 +8579,7 @@
             <a:avLst/>
           </a:prstGeom>
           <a:solidFill>
-            <a:srgbClr val="25253D"/>
+            <a:srgbClr val="FFFFFF"/>
           </a:solidFill>
           <a:ln>
             <a:noFill/>
@@ -8612,7 +8622,7 @@
             <a:avLst/>
           </a:prstGeom>
           <a:solidFill>
-            <a:srgbClr val="4E8CFF"/>
+            <a:srgbClr val="2D5BE3"/>
           </a:solidFill>
           <a:ln>
             <a:noFill/>
@@ -8665,7 +8675,7 @@
             <a:pPr algn="l">
               <a:defRPr sz="2200" b="1">
                 <a:solidFill>
-                  <a:srgbClr val="F0F0F5"/>
+                  <a:srgbClr val="1A1A2E"/>
                 </a:solidFill>
                 <a:latin typeface="Arial"/>
               </a:defRPr>
@@ -8701,7 +8711,7 @@
             <a:pPr algn="r">
               <a:defRPr sz="1200" b="0">
                 <a:solidFill>
-                  <a:srgbClr val="80809A"/>
+                  <a:srgbClr val="787896"/>
                 </a:solidFill>
                 <a:latin typeface="Arial"/>
               </a:defRPr>
@@ -8745,7 +8755,7 @@
                       <a:pPr>
                         <a:defRPr sz="1200" b="1">
                           <a:solidFill>
-                            <a:srgbClr val="F0F0F5"/>
+                            <a:srgbClr val="FFFFFF"/>
                           </a:solidFill>
                           <a:latin typeface="Arial"/>
                         </a:defRPr>
@@ -8757,7 +8767,7 @@
                   </a:txBody>
                   <a:tcPr>
                     <a:solidFill>
-                      <a:srgbClr val="2D3A6D"/>
+                      <a:srgbClr val="2D5BE3"/>
                     </a:solidFill>
                   </a:tcPr>
                 </a:tc>
@@ -8769,7 +8779,7 @@
                       <a:pPr>
                         <a:defRPr sz="1200" b="1">
                           <a:solidFill>
-                            <a:srgbClr val="F0F0F5"/>
+                            <a:srgbClr val="FFFFFF"/>
                           </a:solidFill>
                           <a:latin typeface="Arial"/>
                         </a:defRPr>
@@ -8781,7 +8791,7 @@
                   </a:txBody>
                   <a:tcPr>
                     <a:solidFill>
-                      <a:srgbClr val="2D3A6D"/>
+                      <a:srgbClr val="2D5BE3"/>
                     </a:solidFill>
                   </a:tcPr>
                 </a:tc>
@@ -8793,7 +8803,7 @@
                       <a:pPr>
                         <a:defRPr sz="1200" b="1">
                           <a:solidFill>
-                            <a:srgbClr val="F0F0F5"/>
+                            <a:srgbClr val="FFFFFF"/>
                           </a:solidFill>
                           <a:latin typeface="Arial"/>
                         </a:defRPr>
@@ -8805,7 +8815,7 @@
                   </a:txBody>
                   <a:tcPr>
                     <a:solidFill>
-                      <a:srgbClr val="2D3A6D"/>
+                      <a:srgbClr val="2D5BE3"/>
                     </a:solidFill>
                   </a:tcPr>
                 </a:tc>
@@ -8817,7 +8827,7 @@
                       <a:pPr>
                         <a:defRPr sz="1200" b="1">
                           <a:solidFill>
-                            <a:srgbClr val="F0F0F5"/>
+                            <a:srgbClr val="FFFFFF"/>
                           </a:solidFill>
                           <a:latin typeface="Arial"/>
                         </a:defRPr>
@@ -8829,7 +8839,7 @@
                   </a:txBody>
                   <a:tcPr>
                     <a:solidFill>
-                      <a:srgbClr val="2D3A6D"/>
+                      <a:srgbClr val="2D5BE3"/>
                     </a:solidFill>
                   </a:tcPr>
                 </a:tc>
@@ -8843,7 +8853,7 @@
                       <a:pPr>
                         <a:defRPr sz="1100" b="0">
                           <a:solidFill>
-                            <a:srgbClr val="B0B0C5"/>
+                            <a:srgbClr val="3D3D56"/>
                           </a:solidFill>
                           <a:latin typeface="Arial"/>
                         </a:defRPr>
@@ -8855,7 +8865,7 @@
                   </a:txBody>
                   <a:tcPr>
                     <a:solidFill>
-                      <a:srgbClr val="25253D"/>
+                      <a:srgbClr val="FFFFFF"/>
                     </a:solidFill>
                   </a:tcPr>
                 </a:tc>
@@ -8867,7 +8877,7 @@
                       <a:pPr>
                         <a:defRPr sz="1100" b="0">
                           <a:solidFill>
-                            <a:srgbClr val="B0B0C5"/>
+                            <a:srgbClr val="3D3D56"/>
                           </a:solidFill>
                           <a:latin typeface="Arial"/>
                         </a:defRPr>
@@ -8880,7 +8890,7 @@
                       <a:pPr>
                         <a:defRPr sz="1100" b="0">
                           <a:solidFill>
-                            <a:srgbClr val="B0B0C5"/>
+                            <a:srgbClr val="3D3D56"/>
                           </a:solidFill>
                           <a:latin typeface="Arial"/>
                         </a:defRPr>
@@ -8892,7 +8902,7 @@
                   </a:txBody>
                   <a:tcPr>
                     <a:solidFill>
-                      <a:srgbClr val="25253D"/>
+                      <a:srgbClr val="FFFFFF"/>
                     </a:solidFill>
                   </a:tcPr>
                 </a:tc>
@@ -8904,7 +8914,7 @@
                       <a:pPr>
                         <a:defRPr sz="1100" b="0">
                           <a:solidFill>
-                            <a:srgbClr val="B0B0C5"/>
+                            <a:srgbClr val="3D3D56"/>
                           </a:solidFill>
                           <a:latin typeface="Arial"/>
                         </a:defRPr>
@@ -8917,7 +8927,7 @@
                       <a:pPr>
                         <a:defRPr sz="1100" b="0">
                           <a:solidFill>
-                            <a:srgbClr val="B0B0C5"/>
+                            <a:srgbClr val="3D3D56"/>
                           </a:solidFill>
                           <a:latin typeface="Arial"/>
                         </a:defRPr>
@@ -8929,7 +8939,7 @@
                   </a:txBody>
                   <a:tcPr>
                     <a:solidFill>
-                      <a:srgbClr val="25253D"/>
+                      <a:srgbClr val="FFFFFF"/>
                     </a:solidFill>
                   </a:tcPr>
                 </a:tc>
@@ -8941,7 +8951,7 @@
                       <a:pPr>
                         <a:defRPr sz="1100" b="0">
                           <a:solidFill>
-                            <a:srgbClr val="B0B0C5"/>
+                            <a:srgbClr val="3D3D56"/>
                           </a:solidFill>
                           <a:latin typeface="Arial"/>
                         </a:defRPr>
@@ -8953,7 +8963,7 @@
                   </a:txBody>
                   <a:tcPr>
                     <a:solidFill>
-                      <a:srgbClr val="25253D"/>
+                      <a:srgbClr val="FFFFFF"/>
                     </a:solidFill>
                   </a:tcPr>
                 </a:tc>
@@ -8967,7 +8977,7 @@
                       <a:pPr>
                         <a:defRPr sz="1100" b="0">
                           <a:solidFill>
-                            <a:srgbClr val="B0B0C5"/>
+                            <a:srgbClr val="3D3D56"/>
                           </a:solidFill>
                           <a:latin typeface="Arial"/>
                         </a:defRPr>
@@ -8979,7 +8989,7 @@
                   </a:txBody>
                   <a:tcPr>
                     <a:solidFill>
-                      <a:srgbClr val="202036"/>
+                      <a:srgbClr val="F0F2F7"/>
                     </a:solidFill>
                   </a:tcPr>
                 </a:tc>
@@ -8991,7 +9001,7 @@
                       <a:pPr>
                         <a:defRPr sz="1100" b="0">
                           <a:solidFill>
-                            <a:srgbClr val="B0B0C5"/>
+                            <a:srgbClr val="3D3D56"/>
                           </a:solidFill>
                           <a:latin typeface="Arial"/>
                         </a:defRPr>
@@ -9003,7 +9013,7 @@
                   </a:txBody>
                   <a:tcPr>
                     <a:solidFill>
-                      <a:srgbClr val="202036"/>
+                      <a:srgbClr val="F0F2F7"/>
                     </a:solidFill>
                   </a:tcPr>
                 </a:tc>
@@ -9015,7 +9025,7 @@
                       <a:pPr>
                         <a:defRPr sz="1100" b="0">
                           <a:solidFill>
-                            <a:srgbClr val="B0B0C5"/>
+                            <a:srgbClr val="3D3D56"/>
                           </a:solidFill>
                           <a:latin typeface="Arial"/>
                         </a:defRPr>
@@ -9028,7 +9038,7 @@
                       <a:pPr>
                         <a:defRPr sz="1100" b="0">
                           <a:solidFill>
-                            <a:srgbClr val="B0B0C5"/>
+                            <a:srgbClr val="3D3D56"/>
                           </a:solidFill>
                           <a:latin typeface="Arial"/>
                         </a:defRPr>
@@ -9040,7 +9050,7 @@
                   </a:txBody>
                   <a:tcPr>
                     <a:solidFill>
-                      <a:srgbClr val="202036"/>
+                      <a:srgbClr val="F0F2F7"/>
                     </a:solidFill>
                   </a:tcPr>
                 </a:tc>
@@ -9052,7 +9062,7 @@
                       <a:pPr>
                         <a:defRPr sz="1100" b="0">
                           <a:solidFill>
-                            <a:srgbClr val="B0B0C5"/>
+                            <a:srgbClr val="3D3D56"/>
                           </a:solidFill>
                           <a:latin typeface="Arial"/>
                         </a:defRPr>
@@ -9064,7 +9074,7 @@
                   </a:txBody>
                   <a:tcPr>
                     <a:solidFill>
-                      <a:srgbClr val="202036"/>
+                      <a:srgbClr val="F0F2F7"/>
                     </a:solidFill>
                   </a:tcPr>
                 </a:tc>
@@ -9078,7 +9088,7 @@
                       <a:pPr>
                         <a:defRPr sz="1100" b="0">
                           <a:solidFill>
-                            <a:srgbClr val="B0B0C5"/>
+                            <a:srgbClr val="3D3D56"/>
                           </a:solidFill>
                           <a:latin typeface="Arial"/>
                         </a:defRPr>
@@ -9090,7 +9100,7 @@
                   </a:txBody>
                   <a:tcPr>
                     <a:solidFill>
-                      <a:srgbClr val="25253D"/>
+                      <a:srgbClr val="FFFFFF"/>
                     </a:solidFill>
                   </a:tcPr>
                 </a:tc>
@@ -9102,7 +9112,7 @@
                       <a:pPr>
                         <a:defRPr sz="1100" b="0">
                           <a:solidFill>
-                            <a:srgbClr val="B0B0C5"/>
+                            <a:srgbClr val="3D3D56"/>
                           </a:solidFill>
                           <a:latin typeface="Arial"/>
                         </a:defRPr>
@@ -9114,7 +9124,7 @@
                   </a:txBody>
                   <a:tcPr>
                     <a:solidFill>
-                      <a:srgbClr val="25253D"/>
+                      <a:srgbClr val="FFFFFF"/>
                     </a:solidFill>
                   </a:tcPr>
                 </a:tc>
@@ -9126,7 +9136,7 @@
                       <a:pPr>
                         <a:defRPr sz="1100" b="0">
                           <a:solidFill>
-                            <a:srgbClr val="B0B0C5"/>
+                            <a:srgbClr val="3D3D56"/>
                           </a:solidFill>
                           <a:latin typeface="Arial"/>
                         </a:defRPr>
@@ -9139,7 +9149,7 @@
                       <a:pPr>
                         <a:defRPr sz="1100" b="0">
                           <a:solidFill>
-                            <a:srgbClr val="B0B0C5"/>
+                            <a:srgbClr val="3D3D56"/>
                           </a:solidFill>
                           <a:latin typeface="Arial"/>
                         </a:defRPr>
@@ -9151,7 +9161,7 @@
                   </a:txBody>
                   <a:tcPr>
                     <a:solidFill>
-                      <a:srgbClr val="25253D"/>
+                      <a:srgbClr val="FFFFFF"/>
                     </a:solidFill>
                   </a:tcPr>
                 </a:tc>
@@ -9163,7 +9173,7 @@
                       <a:pPr>
                         <a:defRPr sz="1100" b="0">
                           <a:solidFill>
-                            <a:srgbClr val="B0B0C5"/>
+                            <a:srgbClr val="3D3D56"/>
                           </a:solidFill>
                           <a:latin typeface="Arial"/>
                         </a:defRPr>
@@ -9175,7 +9185,7 @@
                   </a:txBody>
                   <a:tcPr>
                     <a:solidFill>
-                      <a:srgbClr val="25253D"/>
+                      <a:srgbClr val="FFFFFF"/>
                     </a:solidFill>
                   </a:tcPr>
                 </a:tc>
@@ -9189,7 +9199,7 @@
                       <a:pPr>
                         <a:defRPr sz="1100" b="0">
                           <a:solidFill>
-                            <a:srgbClr val="B0B0C5"/>
+                            <a:srgbClr val="3D3D56"/>
                           </a:solidFill>
                           <a:latin typeface="Arial"/>
                         </a:defRPr>
@@ -9201,7 +9211,7 @@
                   </a:txBody>
                   <a:tcPr>
                     <a:solidFill>
-                      <a:srgbClr val="202036"/>
+                      <a:srgbClr val="F0F2F7"/>
                     </a:solidFill>
                   </a:tcPr>
                 </a:tc>
@@ -9213,7 +9223,7 @@
                       <a:pPr>
                         <a:defRPr sz="1100" b="0">
                           <a:solidFill>
-                            <a:srgbClr val="B0B0C5"/>
+                            <a:srgbClr val="3D3D56"/>
                           </a:solidFill>
                           <a:latin typeface="Arial"/>
                         </a:defRPr>
@@ -9225,7 +9235,7 @@
                   </a:txBody>
                   <a:tcPr>
                     <a:solidFill>
-                      <a:srgbClr val="202036"/>
+                      <a:srgbClr val="F0F2F7"/>
                     </a:solidFill>
                   </a:tcPr>
                 </a:tc>
@@ -9237,7 +9247,7 @@
                       <a:pPr>
                         <a:defRPr sz="1100" b="0">
                           <a:solidFill>
-                            <a:srgbClr val="B0B0C5"/>
+                            <a:srgbClr val="3D3D56"/>
                           </a:solidFill>
                           <a:latin typeface="Arial"/>
                         </a:defRPr>
@@ -9250,7 +9260,7 @@
                       <a:pPr>
                         <a:defRPr sz="1100" b="0">
                           <a:solidFill>
-                            <a:srgbClr val="B0B0C5"/>
+                            <a:srgbClr val="3D3D56"/>
                           </a:solidFill>
                           <a:latin typeface="Arial"/>
                         </a:defRPr>
@@ -9262,7 +9272,7 @@
                   </a:txBody>
                   <a:tcPr>
                     <a:solidFill>
-                      <a:srgbClr val="202036"/>
+                      <a:srgbClr val="F0F2F7"/>
                     </a:solidFill>
                   </a:tcPr>
                 </a:tc>
@@ -9274,7 +9284,7 @@
                       <a:pPr>
                         <a:defRPr sz="1100" b="0">
                           <a:solidFill>
-                            <a:srgbClr val="B0B0C5"/>
+                            <a:srgbClr val="3D3D56"/>
                           </a:solidFill>
                           <a:latin typeface="Arial"/>
                         </a:defRPr>
@@ -9286,7 +9296,7 @@
                   </a:txBody>
                   <a:tcPr>
                     <a:solidFill>
-                      <a:srgbClr val="202036"/>
+                      <a:srgbClr val="F0F2F7"/>
                     </a:solidFill>
                   </a:tcPr>
                 </a:tc>
@@ -9300,7 +9310,7 @@
                       <a:pPr>
                         <a:defRPr sz="1100" b="0">
                           <a:solidFill>
-                            <a:srgbClr val="B0B0C5"/>
+                            <a:srgbClr val="3D3D56"/>
                           </a:solidFill>
                           <a:latin typeface="Arial"/>
                         </a:defRPr>
@@ -9312,7 +9322,7 @@
                   </a:txBody>
                   <a:tcPr>
                     <a:solidFill>
-                      <a:srgbClr val="25253D"/>
+                      <a:srgbClr val="FFFFFF"/>
                     </a:solidFill>
                   </a:tcPr>
                 </a:tc>
@@ -9324,7 +9334,7 @@
                       <a:pPr>
                         <a:defRPr sz="1100" b="0">
                           <a:solidFill>
-                            <a:srgbClr val="B0B0C5"/>
+                            <a:srgbClr val="3D3D56"/>
                           </a:solidFill>
                           <a:latin typeface="Arial"/>
                         </a:defRPr>
@@ -9336,7 +9346,7 @@
                   </a:txBody>
                   <a:tcPr>
                     <a:solidFill>
-                      <a:srgbClr val="25253D"/>
+                      <a:srgbClr val="FFFFFF"/>
                     </a:solidFill>
                   </a:tcPr>
                 </a:tc>
@@ -9348,7 +9358,7 @@
                       <a:pPr>
                         <a:defRPr sz="1100" b="0">
                           <a:solidFill>
-                            <a:srgbClr val="B0B0C5"/>
+                            <a:srgbClr val="3D3D56"/>
                           </a:solidFill>
                           <a:latin typeface="Arial"/>
                         </a:defRPr>
@@ -9361,7 +9371,7 @@
                       <a:pPr>
                         <a:defRPr sz="1100" b="0">
                           <a:solidFill>
-                            <a:srgbClr val="B0B0C5"/>
+                            <a:srgbClr val="3D3D56"/>
                           </a:solidFill>
                           <a:latin typeface="Arial"/>
                         </a:defRPr>
@@ -9373,7 +9383,7 @@
                   </a:txBody>
                   <a:tcPr>
                     <a:solidFill>
-                      <a:srgbClr val="25253D"/>
+                      <a:srgbClr val="FFFFFF"/>
                     </a:solidFill>
                   </a:tcPr>
                 </a:tc>
@@ -9385,7 +9395,7 @@
                       <a:pPr>
                         <a:defRPr sz="1100" b="0">
                           <a:solidFill>
-                            <a:srgbClr val="B0B0C5"/>
+                            <a:srgbClr val="3D3D56"/>
                           </a:solidFill>
                           <a:latin typeface="Arial"/>
                         </a:defRPr>
@@ -9397,7 +9407,7 @@
                   </a:txBody>
                   <a:tcPr>
                     <a:solidFill>
-                      <a:srgbClr val="25253D"/>
+                      <a:srgbClr val="FFFFFF"/>
                     </a:solidFill>
                   </a:tcPr>
                 </a:tc>
@@ -9421,10 +9431,12 @@
             <a:avLst/>
           </a:prstGeom>
           <a:solidFill>
-            <a:srgbClr val="25253D"/>
+            <a:srgbClr val="F0F2F7"/>
           </a:solidFill>
-          <a:ln>
-            <a:noFill/>
+          <a:ln w="12700">
+            <a:solidFill>
+              <a:srgbClr val="DEE1EB"/>
+            </a:solidFill>
           </a:ln>
         </p:spPr>
         <p:style>
@@ -9477,7 +9489,7 @@
               </a:spcAft>
               <a:defRPr sz="1600" b="1">
                 <a:solidFill>
-                  <a:srgbClr val="4E8CFF"/>
+                  <a:srgbClr val="2D5BE3"/>
                 </a:solidFill>
                 <a:latin typeface="Arial"/>
               </a:defRPr>
@@ -9493,7 +9505,7 @@
               </a:spcAft>
               <a:defRPr sz="1400" b="1">
                 <a:solidFill>
-                  <a:srgbClr val="00D4AA"/>
+                  <a:srgbClr val="009B8D"/>
                 </a:solidFill>
                 <a:latin typeface="Arial"/>
               </a:defRPr>
@@ -9509,7 +9521,7 @@
               </a:spcAft>
               <a:defRPr sz="1200" b="0">
                 <a:solidFill>
-                  <a:srgbClr val="B0B0C5"/>
+                  <a:srgbClr val="3D3D56"/>
                 </a:solidFill>
                 <a:latin typeface="Arial"/>
               </a:defRPr>
@@ -9545,7 +9557,7 @@
             <a:pPr algn="r">
               <a:defRPr sz="1000" b="0">
                 <a:solidFill>
-                  <a:srgbClr val="80809A"/>
+                  <a:srgbClr val="787896"/>
                 </a:solidFill>
                 <a:latin typeface="Arial"/>
               </a:defRPr>
@@ -9570,7 +9582,7 @@
     <p:bg>
       <p:bgPr>
         <a:solidFill>
-          <a:srgbClr val="1B1B2F"/>
+          <a:srgbClr val="FAFAFC"/>
         </a:solidFill>
         <a:effectLst/>
       </p:bgPr>
@@ -9597,7 +9609,7 @@
             <a:avLst/>
           </a:prstGeom>
           <a:solidFill>
-            <a:srgbClr val="25253D"/>
+            <a:srgbClr val="FFFFFF"/>
           </a:solidFill>
           <a:ln>
             <a:noFill/>
@@ -9640,7 +9652,7 @@
             <a:avLst/>
           </a:prstGeom>
           <a:solidFill>
-            <a:srgbClr val="4E8CFF"/>
+            <a:srgbClr val="2D5BE3"/>
           </a:solidFill>
           <a:ln>
             <a:noFill/>
@@ -9693,7 +9705,7 @@
             <a:pPr algn="l">
               <a:defRPr sz="2200" b="1">
                 <a:solidFill>
-                  <a:srgbClr val="F0F0F5"/>
+                  <a:srgbClr val="1A1A2E"/>
                 </a:solidFill>
                 <a:latin typeface="Arial"/>
               </a:defRPr>
@@ -9729,7 +9741,7 @@
             <a:pPr algn="r">
               <a:defRPr sz="1200" b="0">
                 <a:solidFill>
-                  <a:srgbClr val="80809A"/>
+                  <a:srgbClr val="787896"/>
                 </a:solidFill>
                 <a:latin typeface="Arial"/>
               </a:defRPr>
@@ -9755,10 +9767,12 @@
             <a:avLst/>
           </a:prstGeom>
           <a:solidFill>
-            <a:srgbClr val="25253D"/>
+            <a:srgbClr val="F0F2F7"/>
           </a:solidFill>
-          <a:ln>
-            <a:noFill/>
+          <a:ln w="12700">
+            <a:solidFill>
+              <a:srgbClr val="DEE1EB"/>
+            </a:solidFill>
           </a:ln>
         </p:spPr>
         <p:style>
@@ -9798,7 +9812,7 @@
             <a:avLst/>
           </a:prstGeom>
           <a:solidFill>
-            <a:srgbClr val="4E8CFF"/>
+            <a:srgbClr val="2D5BE3"/>
           </a:solidFill>
           <a:ln>
             <a:noFill/>
@@ -9854,7 +9868,7 @@
               </a:spcAft>
               <a:defRPr sz="1400" b="1">
                 <a:solidFill>
-                  <a:srgbClr val="4E8CFF"/>
+                  <a:srgbClr val="2D5BE3"/>
                 </a:solidFill>
                 <a:latin typeface="Arial"/>
               </a:defRPr>
@@ -9870,7 +9884,7 @@
               </a:spcAft>
               <a:defRPr sz="1100" b="0">
                 <a:solidFill>
-                  <a:srgbClr val="80809A"/>
+                  <a:srgbClr val="787896"/>
                 </a:solidFill>
                 <a:latin typeface="Arial"/>
               </a:defRPr>
@@ -9886,7 +9900,7 @@
               </a:spcAft>
               <a:defRPr sz="1100" b="0">
                 <a:solidFill>
-                  <a:srgbClr val="B0B0C5"/>
+                  <a:srgbClr val="3D3D56"/>
                 </a:solidFill>
                 <a:latin typeface="Arial"/>
               </a:defRPr>
@@ -9902,7 +9916,7 @@
               </a:spcAft>
               <a:defRPr sz="1100" b="0">
                 <a:solidFill>
-                  <a:srgbClr val="B0B0C5"/>
+                  <a:srgbClr val="3D3D56"/>
                 </a:solidFill>
                 <a:latin typeface="Arial"/>
               </a:defRPr>
@@ -9918,7 +9932,7 @@
               </a:spcAft>
               <a:defRPr sz="1100" b="0">
                 <a:solidFill>
-                  <a:srgbClr val="B0B0C5"/>
+                  <a:srgbClr val="3D3D56"/>
                 </a:solidFill>
                 <a:latin typeface="Arial"/>
               </a:defRPr>
@@ -9934,7 +9948,7 @@
               </a:spcAft>
               <a:defRPr sz="1100" b="0">
                 <a:solidFill>
-                  <a:srgbClr val="B0B0C5"/>
+                  <a:srgbClr val="3D3D56"/>
                 </a:solidFill>
                 <a:latin typeface="Arial"/>
               </a:defRPr>
@@ -9950,7 +9964,7 @@
               </a:spcAft>
               <a:defRPr sz="1100" b="0">
                 <a:solidFill>
-                  <a:srgbClr val="B0B0C5"/>
+                  <a:srgbClr val="3D3D56"/>
                 </a:solidFill>
                 <a:latin typeface="Arial"/>
               </a:defRPr>
@@ -9976,10 +9990,12 @@
             <a:avLst/>
           </a:prstGeom>
           <a:solidFill>
-            <a:srgbClr val="25253D"/>
+            <a:srgbClr val="F0F2F7"/>
           </a:solidFill>
-          <a:ln>
-            <a:noFill/>
+          <a:ln w="12700">
+            <a:solidFill>
+              <a:srgbClr val="DEE1EB"/>
+            </a:solidFill>
           </a:ln>
         </p:spPr>
         <p:style>
@@ -10019,7 +10035,7 @@
             <a:avLst/>
           </a:prstGeom>
           <a:solidFill>
-            <a:srgbClr val="00D4AA"/>
+            <a:srgbClr val="009B8D"/>
           </a:solidFill>
           <a:ln>
             <a:noFill/>
@@ -10075,7 +10091,7 @@
               </a:spcAft>
               <a:defRPr sz="1400" b="1">
                 <a:solidFill>
-                  <a:srgbClr val="00D4AA"/>
+                  <a:srgbClr val="009B8D"/>
                 </a:solidFill>
                 <a:latin typeface="Arial"/>
               </a:defRPr>
@@ -10091,7 +10107,7 @@
               </a:spcAft>
               <a:defRPr sz="1100" b="0">
                 <a:solidFill>
-                  <a:srgbClr val="80809A"/>
+                  <a:srgbClr val="787896"/>
                 </a:solidFill>
                 <a:latin typeface="Arial"/>
               </a:defRPr>
@@ -10107,7 +10123,7 @@
               </a:spcAft>
               <a:defRPr sz="1100" b="0">
                 <a:solidFill>
-                  <a:srgbClr val="B0B0C5"/>
+                  <a:srgbClr val="3D3D56"/>
                 </a:solidFill>
                 <a:latin typeface="Arial"/>
               </a:defRPr>
@@ -10123,7 +10139,7 @@
               </a:spcAft>
               <a:defRPr sz="1100" b="0">
                 <a:solidFill>
-                  <a:srgbClr val="B0B0C5"/>
+                  <a:srgbClr val="3D3D56"/>
                 </a:solidFill>
                 <a:latin typeface="Arial"/>
               </a:defRPr>
@@ -10139,7 +10155,7 @@
               </a:spcAft>
               <a:defRPr sz="1100" b="0">
                 <a:solidFill>
-                  <a:srgbClr val="B0B0C5"/>
+                  <a:srgbClr val="3D3D56"/>
                 </a:solidFill>
                 <a:latin typeface="Arial"/>
               </a:defRPr>
@@ -10165,10 +10181,12 @@
             <a:avLst/>
           </a:prstGeom>
           <a:solidFill>
-            <a:srgbClr val="25253D"/>
+            <a:srgbClr val="F0F2F7"/>
           </a:solidFill>
-          <a:ln>
-            <a:noFill/>
+          <a:ln w="12700">
+            <a:solidFill>
+              <a:srgbClr val="DEE1EB"/>
+            </a:solidFill>
           </a:ln>
         </p:spPr>
         <p:style>
@@ -10208,7 +10226,7 @@
             <a:avLst/>
           </a:prstGeom>
           <a:solidFill>
-            <a:srgbClr val="FF8C42"/>
+            <a:srgbClr val="E86A17"/>
           </a:solidFill>
           <a:ln>
             <a:noFill/>
@@ -10264,7 +10282,7 @@
               </a:spcAft>
               <a:defRPr sz="1400" b="1">
                 <a:solidFill>
-                  <a:srgbClr val="FF8C42"/>
+                  <a:srgbClr val="E86A17"/>
                 </a:solidFill>
                 <a:latin typeface="Arial"/>
               </a:defRPr>
@@ -10280,7 +10298,7 @@
               </a:spcAft>
               <a:defRPr sz="1100" b="0">
                 <a:solidFill>
-                  <a:srgbClr val="80809A"/>
+                  <a:srgbClr val="787896"/>
                 </a:solidFill>
                 <a:latin typeface="Arial"/>
               </a:defRPr>
@@ -10296,7 +10314,7 @@
               </a:spcAft>
               <a:defRPr sz="1100" b="0">
                 <a:solidFill>
-                  <a:srgbClr val="B0B0C5"/>
+                  <a:srgbClr val="3D3D56"/>
                 </a:solidFill>
                 <a:latin typeface="Arial"/>
               </a:defRPr>
@@ -10312,7 +10330,7 @@
               </a:spcAft>
               <a:defRPr sz="1100" b="0">
                 <a:solidFill>
-                  <a:srgbClr val="B0B0C5"/>
+                  <a:srgbClr val="3D3D56"/>
                 </a:solidFill>
                 <a:latin typeface="Arial"/>
               </a:defRPr>
@@ -10328,7 +10346,7 @@
               </a:spcAft>
               <a:defRPr sz="1100" b="0">
                 <a:solidFill>
-                  <a:srgbClr val="B0B0C5"/>
+                  <a:srgbClr val="3D3D56"/>
                 </a:solidFill>
                 <a:latin typeface="Arial"/>
               </a:defRPr>
@@ -10344,7 +10362,7 @@
               </a:spcAft>
               <a:defRPr sz="1100" b="0">
                 <a:solidFill>
-                  <a:srgbClr val="B0B0C5"/>
+                  <a:srgbClr val="3D3D56"/>
                 </a:solidFill>
                 <a:latin typeface="Arial"/>
               </a:defRPr>
@@ -10370,10 +10388,12 @@
             <a:avLst/>
           </a:prstGeom>
           <a:solidFill>
-            <a:srgbClr val="25253D"/>
+            <a:srgbClr val="F0F2F7"/>
           </a:solidFill>
-          <a:ln>
-            <a:noFill/>
+          <a:ln w="12700">
+            <a:solidFill>
+              <a:srgbClr val="DEE1EB"/>
+            </a:solidFill>
           </a:ln>
         </p:spPr>
         <p:style>
@@ -10413,7 +10433,7 @@
             <a:avLst/>
           </a:prstGeom>
           <a:solidFill>
-            <a:srgbClr val="A878FF"/>
+            <a:srgbClr val="7C4DFF"/>
           </a:solidFill>
           <a:ln>
             <a:noFill/>
@@ -10469,7 +10489,7 @@
               </a:spcAft>
               <a:defRPr sz="1400" b="1">
                 <a:solidFill>
-                  <a:srgbClr val="A878FF"/>
+                  <a:srgbClr val="7C4DFF"/>
                 </a:solidFill>
                 <a:latin typeface="Arial"/>
               </a:defRPr>
@@ -10485,7 +10505,7 @@
               </a:spcAft>
               <a:defRPr sz="1100" b="0">
                 <a:solidFill>
-                  <a:srgbClr val="80809A"/>
+                  <a:srgbClr val="787896"/>
                 </a:solidFill>
                 <a:latin typeface="Arial"/>
               </a:defRPr>
@@ -10501,7 +10521,7 @@
               </a:spcAft>
               <a:defRPr sz="1100" b="0">
                 <a:solidFill>
-                  <a:srgbClr val="B0B0C5"/>
+                  <a:srgbClr val="3D3D56"/>
                 </a:solidFill>
                 <a:latin typeface="Arial"/>
               </a:defRPr>
@@ -10517,7 +10537,7 @@
               </a:spcAft>
               <a:defRPr sz="1100" b="0">
                 <a:solidFill>
-                  <a:srgbClr val="B0B0C5"/>
+                  <a:srgbClr val="3D3D56"/>
                 </a:solidFill>
                 <a:latin typeface="Arial"/>
               </a:defRPr>
@@ -10533,7 +10553,7 @@
               </a:spcAft>
               <a:defRPr sz="1100" b="0">
                 <a:solidFill>
-                  <a:srgbClr val="B0B0C5"/>
+                  <a:srgbClr val="3D3D56"/>
                 </a:solidFill>
                 <a:latin typeface="Arial"/>
               </a:defRPr>
@@ -10549,7 +10569,7 @@
               </a:spcAft>
               <a:defRPr sz="1100" b="0">
                 <a:solidFill>
-                  <a:srgbClr val="B0B0C5"/>
+                  <a:srgbClr val="3D3D56"/>
                 </a:solidFill>
                 <a:latin typeface="Arial"/>
               </a:defRPr>
@@ -10585,7 +10605,7 @@
             <a:pPr algn="l">
               <a:defRPr sz="1200" b="0">
                 <a:solidFill>
-                  <a:srgbClr val="FF8C42"/>
+                  <a:srgbClr val="E86A17"/>
                 </a:solidFill>
                 <a:latin typeface="Arial"/>
               </a:defRPr>
@@ -10621,7 +10641,7 @@
             <a:pPr algn="l">
               <a:defRPr sz="1200" b="1">
                 <a:solidFill>
-                  <a:srgbClr val="00D4AA"/>
+                  <a:srgbClr val="009B8D"/>
                 </a:solidFill>
                 <a:latin typeface="Arial"/>
               </a:defRPr>
@@ -10657,7 +10677,7 @@
             <a:pPr algn="r">
               <a:defRPr sz="1000" b="0">
                 <a:solidFill>
-                  <a:srgbClr val="80809A"/>
+                  <a:srgbClr val="787896"/>
                 </a:solidFill>
                 <a:latin typeface="Arial"/>
               </a:defRPr>
@@ -10682,7 +10702,7 @@
     <p:bg>
       <p:bgPr>
         <a:solidFill>
-          <a:srgbClr val="1B1B2F"/>
+          <a:srgbClr val="FAFAFC"/>
         </a:solidFill>
         <a:effectLst/>
       </p:bgPr>
@@ -10709,7 +10729,7 @@
             <a:avLst/>
           </a:prstGeom>
           <a:solidFill>
-            <a:srgbClr val="25253D"/>
+            <a:srgbClr val="FFFFFF"/>
           </a:solidFill>
           <a:ln>
             <a:noFill/>
@@ -10752,7 +10772,7 @@
             <a:avLst/>
           </a:prstGeom>
           <a:solidFill>
-            <a:srgbClr val="4E8CFF"/>
+            <a:srgbClr val="2D5BE3"/>
           </a:solidFill>
           <a:ln>
             <a:noFill/>
@@ -10805,7 +10825,7 @@
             <a:pPr algn="l">
               <a:defRPr sz="2200" b="1">
                 <a:solidFill>
-                  <a:srgbClr val="F0F0F5"/>
+                  <a:srgbClr val="1A1A2E"/>
                 </a:solidFill>
                 <a:latin typeface="Arial"/>
               </a:defRPr>
@@ -10841,7 +10861,7 @@
             <a:pPr algn="r">
               <a:defRPr sz="1200" b="0">
                 <a:solidFill>
-                  <a:srgbClr val="80809A"/>
+                  <a:srgbClr val="787896"/>
                 </a:solidFill>
                 <a:latin typeface="Arial"/>
               </a:defRPr>
@@ -10867,10 +10887,12 @@
             <a:avLst/>
           </a:prstGeom>
           <a:solidFill>
-            <a:srgbClr val="25253D"/>
+            <a:srgbClr val="F0F2F7"/>
           </a:solidFill>
-          <a:ln>
-            <a:noFill/>
+          <a:ln w="12700">
+            <a:solidFill>
+              <a:srgbClr val="DEE1EB"/>
+            </a:solidFill>
           </a:ln>
         </p:spPr>
         <p:style>
@@ -10923,7 +10945,7 @@
               </a:spcAft>
               <a:defRPr sz="1600" b="1">
                 <a:solidFill>
-                  <a:srgbClr val="FF5A5A"/>
+                  <a:srgbClr val="DC3545"/>
                 </a:solidFill>
                 <a:latin typeface="Arial"/>
               </a:defRPr>
@@ -10939,7 +10961,7 @@
               </a:spcAft>
               <a:defRPr sz="1300" b="0">
                 <a:solidFill>
-                  <a:srgbClr val="B0B0C5"/>
+                  <a:srgbClr val="3D3D56"/>
                 </a:solidFill>
                 <a:latin typeface="Arial"/>
               </a:defRPr>
@@ -10955,7 +10977,7 @@
               </a:spcAft>
               <a:defRPr sz="1300" b="0">
                 <a:solidFill>
-                  <a:srgbClr val="FF5A5A"/>
+                  <a:srgbClr val="DC3545"/>
                 </a:solidFill>
                 <a:latin typeface="Arial"/>
               </a:defRPr>
@@ -10971,7 +10993,7 @@
               </a:spcAft>
               <a:defRPr sz="1300" b="0">
                 <a:solidFill>
-                  <a:srgbClr val="FF5A5A"/>
+                  <a:srgbClr val="DC3545"/>
                 </a:solidFill>
                 <a:latin typeface="Arial"/>
               </a:defRPr>
@@ -10997,10 +11019,12 @@
             <a:avLst/>
           </a:prstGeom>
           <a:solidFill>
-            <a:srgbClr val="25253D"/>
+            <a:srgbClr val="F0F2F7"/>
           </a:solidFill>
-          <a:ln>
-            <a:noFill/>
+          <a:ln w="12700">
+            <a:solidFill>
+              <a:srgbClr val="DEE1EB"/>
+            </a:solidFill>
           </a:ln>
         </p:spPr>
         <p:style>
@@ -11053,7 +11077,7 @@
               </a:spcAft>
               <a:defRPr sz="1600" b="1">
                 <a:solidFill>
-                  <a:srgbClr val="4ECB71"/>
+                  <a:srgbClr val="1B9E4B"/>
                 </a:solidFill>
                 <a:latin typeface="Arial"/>
               </a:defRPr>
@@ -11069,7 +11093,7 @@
               </a:spcAft>
               <a:defRPr sz="1300" b="0">
                 <a:solidFill>
-                  <a:srgbClr val="B0B0C5"/>
+                  <a:srgbClr val="3D3D56"/>
                 </a:solidFill>
                 <a:latin typeface="Arial"/>
               </a:defRPr>
@@ -11085,7 +11109,7 @@
               </a:spcAft>
               <a:defRPr sz="1300" b="0">
                 <a:solidFill>
-                  <a:srgbClr val="4ECB71"/>
+                  <a:srgbClr val="1B9E4B"/>
                 </a:solidFill>
                 <a:latin typeface="Arial"/>
               </a:defRPr>
@@ -11101,7 +11125,7 @@
               </a:spcAft>
               <a:defRPr sz="1300" b="0">
                 <a:solidFill>
-                  <a:srgbClr val="4ECB71"/>
+                  <a:srgbClr val="1B9E4B"/>
                 </a:solidFill>
                 <a:latin typeface="Arial"/>
               </a:defRPr>
@@ -11117,7 +11141,7 @@
               </a:spcAft>
               <a:defRPr sz="1300" b="1">
                 <a:solidFill>
-                  <a:srgbClr val="00D4AA"/>
+                  <a:srgbClr val="009B8D"/>
                 </a:solidFill>
                 <a:latin typeface="Arial"/>
               </a:defRPr>
@@ -11143,10 +11167,12 @@
             <a:avLst/>
           </a:prstGeom>
           <a:solidFill>
-            <a:srgbClr val="25253D"/>
+            <a:srgbClr val="F0F2F7"/>
           </a:solidFill>
-          <a:ln>
-            <a:noFill/>
+          <a:ln w="12700">
+            <a:solidFill>
+              <a:srgbClr val="DEE1EB"/>
+            </a:solidFill>
           </a:ln>
         </p:spPr>
         <p:style>
@@ -11199,7 +11225,7 @@
               </a:spcAft>
               <a:defRPr sz="1600" b="1">
                 <a:solidFill>
-                  <a:srgbClr val="A878FF"/>
+                  <a:srgbClr val="7C4DFF"/>
                 </a:solidFill>
                 <a:latin typeface="Arial"/>
               </a:defRPr>
@@ -11215,7 +11241,7 @@
               </a:spcAft>
               <a:defRPr sz="1200" b="0">
                 <a:solidFill>
-                  <a:srgbClr val="80809A"/>
+                  <a:srgbClr val="787896"/>
                 </a:solidFill>
                 <a:latin typeface="Arial"/>
               </a:defRPr>
@@ -11231,7 +11257,7 @@
               </a:spcAft>
               <a:defRPr sz="1300" b="0">
                 <a:solidFill>
-                  <a:srgbClr val="B0B0C5"/>
+                  <a:srgbClr val="3D3D56"/>
                 </a:solidFill>
                 <a:latin typeface="Arial"/>
               </a:defRPr>
@@ -11247,7 +11273,7 @@
               </a:spcAft>
               <a:defRPr sz="1300" b="0">
                 <a:solidFill>
-                  <a:srgbClr val="B0B0C5"/>
+                  <a:srgbClr val="3D3D56"/>
                 </a:solidFill>
                 <a:latin typeface="Arial"/>
               </a:defRPr>
@@ -11263,7 +11289,7 @@
               </a:spcAft>
               <a:defRPr sz="1300" b="0">
                 <a:solidFill>
-                  <a:srgbClr val="00D4AA"/>
+                  <a:srgbClr val="009B8D"/>
                 </a:solidFill>
                 <a:latin typeface="Arial"/>
               </a:defRPr>
@@ -11279,7 +11305,7 @@
               </a:spcAft>
               <a:defRPr sz="1200" b="0">
                 <a:solidFill>
-                  <a:srgbClr val="B0B0C5"/>
+                  <a:srgbClr val="3D3D56"/>
                 </a:solidFill>
                 <a:latin typeface="Arial"/>
               </a:defRPr>
@@ -11305,10 +11331,12 @@
             <a:avLst/>
           </a:prstGeom>
           <a:solidFill>
-            <a:srgbClr val="25253D"/>
+            <a:srgbClr val="F0F2F7"/>
           </a:solidFill>
-          <a:ln>
-            <a:noFill/>
+          <a:ln w="12700">
+            <a:solidFill>
+              <a:srgbClr val="DEE1EB"/>
+            </a:solidFill>
           </a:ln>
         </p:spPr>
         <p:style>
@@ -11361,7 +11389,7 @@
               </a:spcAft>
               <a:defRPr sz="1600" b="1">
                 <a:solidFill>
-                  <a:srgbClr val="FF8C42"/>
+                  <a:srgbClr val="E86A17"/>
                 </a:solidFill>
                 <a:latin typeface="Arial"/>
               </a:defRPr>
@@ -11377,7 +11405,7 @@
               </a:spcAft>
               <a:defRPr sz="1200" b="0">
                 <a:solidFill>
-                  <a:srgbClr val="80809A"/>
+                  <a:srgbClr val="787896"/>
                 </a:solidFill>
                 <a:latin typeface="Arial"/>
               </a:defRPr>
@@ -11393,7 +11421,7 @@
               </a:spcAft>
               <a:defRPr sz="1300" b="0">
                 <a:solidFill>
-                  <a:srgbClr val="00D4AA"/>
+                  <a:srgbClr val="009B8D"/>
                 </a:solidFill>
                 <a:latin typeface="Arial"/>
               </a:defRPr>
@@ -11409,7 +11437,7 @@
               </a:spcAft>
               <a:defRPr sz="1300" b="0">
                 <a:solidFill>
-                  <a:srgbClr val="00D4AA"/>
+                  <a:srgbClr val="009B8D"/>
                 </a:solidFill>
                 <a:latin typeface="Arial"/>
               </a:defRPr>
@@ -11425,7 +11453,7 @@
               </a:spcAft>
               <a:defRPr sz="1300" b="0">
                 <a:solidFill>
-                  <a:srgbClr val="00D4AA"/>
+                  <a:srgbClr val="009B8D"/>
                 </a:solidFill>
                 <a:latin typeface="Arial"/>
               </a:defRPr>
@@ -11441,7 +11469,7 @@
               </a:spcAft>
               <a:defRPr sz="1200" b="0">
                 <a:solidFill>
-                  <a:srgbClr val="B0B0C5"/>
+                  <a:srgbClr val="3D3D56"/>
                 </a:solidFill>
                 <a:latin typeface="Arial"/>
               </a:defRPr>
@@ -11457,7 +11485,7 @@
               </a:spcAft>
               <a:defRPr sz="1300" b="0">
                 <a:solidFill>
-                  <a:srgbClr val="00D4AA"/>
+                  <a:srgbClr val="009B8D"/>
                 </a:solidFill>
                 <a:latin typeface="Arial"/>
               </a:defRPr>
@@ -11483,10 +11511,12 @@
             <a:avLst/>
           </a:prstGeom>
           <a:solidFill>
-            <a:srgbClr val="25253D"/>
+            <a:srgbClr val="F0F2F7"/>
           </a:solidFill>
-          <a:ln>
-            <a:noFill/>
+          <a:ln w="12700">
+            <a:solidFill>
+              <a:srgbClr val="DEE1EB"/>
+            </a:solidFill>
           </a:ln>
         </p:spPr>
         <p:style>
@@ -11539,7 +11569,7 @@
               </a:spcAft>
               <a:defRPr sz="1600" b="1">
                 <a:solidFill>
-                  <a:srgbClr val="FF6B9D"/>
+                  <a:srgbClr val="D6336C"/>
                 </a:solidFill>
                 <a:latin typeface="Arial"/>
               </a:defRPr>
@@ -11555,7 +11585,7 @@
               </a:spcAft>
               <a:defRPr sz="1200" b="0">
                 <a:solidFill>
-                  <a:srgbClr val="80809A"/>
+                  <a:srgbClr val="787896"/>
                 </a:solidFill>
                 <a:latin typeface="Arial"/>
               </a:defRPr>
@@ -11571,7 +11601,7 @@
               </a:spcAft>
               <a:defRPr sz="1300" b="0">
                 <a:solidFill>
-                  <a:srgbClr val="B0B0C5"/>
+                  <a:srgbClr val="3D3D56"/>
                 </a:solidFill>
                 <a:latin typeface="Arial"/>
               </a:defRPr>
@@ -11587,7 +11617,7 @@
               </a:spcAft>
               <a:defRPr sz="1300" b="0">
                 <a:solidFill>
-                  <a:srgbClr val="B0B0C5"/>
+                  <a:srgbClr val="3D3D56"/>
                 </a:solidFill>
                 <a:latin typeface="Arial"/>
               </a:defRPr>
@@ -11603,7 +11633,7 @@
               </a:spcAft>
               <a:defRPr sz="1300" b="0">
                 <a:solidFill>
-                  <a:srgbClr val="4ECB71"/>
+                  <a:srgbClr val="1B9E4B"/>
                 </a:solidFill>
                 <a:latin typeface="Arial"/>
               </a:defRPr>
@@ -11619,7 +11649,7 @@
               </a:spcAft>
               <a:defRPr sz="1300" b="0">
                 <a:solidFill>
-                  <a:srgbClr val="4ECB71"/>
+                  <a:srgbClr val="1B9E4B"/>
                 </a:solidFill>
                 <a:latin typeface="Arial"/>
               </a:defRPr>
@@ -11655,7 +11685,7 @@
             <a:pPr algn="r">
               <a:defRPr sz="1000" b="0">
                 <a:solidFill>
-                  <a:srgbClr val="80809A"/>
+                  <a:srgbClr val="787896"/>
                 </a:solidFill>
                 <a:latin typeface="Arial"/>
               </a:defRPr>
@@ -11680,7 +11710,7 @@
     <p:bg>
       <p:bgPr>
         <a:solidFill>
-          <a:srgbClr val="1B1B2F"/>
+          <a:srgbClr val="FAFAFC"/>
         </a:solidFill>
         <a:effectLst/>
       </p:bgPr>
@@ -11707,7 +11737,7 @@
             <a:avLst/>
           </a:prstGeom>
           <a:solidFill>
-            <a:srgbClr val="25253D"/>
+            <a:srgbClr val="FFFFFF"/>
           </a:solidFill>
           <a:ln>
             <a:noFill/>
@@ -11750,7 +11780,7 @@
             <a:avLst/>
           </a:prstGeom>
           <a:solidFill>
-            <a:srgbClr val="4E8CFF"/>
+            <a:srgbClr val="2D5BE3"/>
           </a:solidFill>
           <a:ln>
             <a:noFill/>
@@ -11803,7 +11833,7 @@
             <a:pPr algn="l">
               <a:defRPr sz="2200" b="1">
                 <a:solidFill>
-                  <a:srgbClr val="F0F0F5"/>
+                  <a:srgbClr val="1A1A2E"/>
                 </a:solidFill>
                 <a:latin typeface="Arial"/>
               </a:defRPr>
@@ -11839,7 +11869,7 @@
             <a:pPr algn="r">
               <a:defRPr sz="1200" b="0">
                 <a:solidFill>
-                  <a:srgbClr val="80809A"/>
+                  <a:srgbClr val="787896"/>
                 </a:solidFill>
                 <a:latin typeface="Arial"/>
               </a:defRPr>
@@ -11865,10 +11895,12 @@
             <a:avLst/>
           </a:prstGeom>
           <a:solidFill>
-            <a:srgbClr val="25253D"/>
+            <a:srgbClr val="F0F2F7"/>
           </a:solidFill>
-          <a:ln>
-            <a:noFill/>
+          <a:ln w="12700">
+            <a:solidFill>
+              <a:srgbClr val="DEE1EB"/>
+            </a:solidFill>
           </a:ln>
         </p:spPr>
         <p:style>
@@ -11921,7 +11953,7 @@
               </a:spcAft>
               <a:defRPr sz="1600" b="1">
                 <a:solidFill>
-                  <a:srgbClr val="FF5A5A"/>
+                  <a:srgbClr val="DC3545"/>
                 </a:solidFill>
                 <a:latin typeface="Arial"/>
               </a:defRPr>
@@ -11937,7 +11969,7 @@
               </a:spcAft>
               <a:defRPr sz="1300" b="0">
                 <a:solidFill>
-                  <a:srgbClr val="80809A"/>
+                  <a:srgbClr val="787896"/>
                 </a:solidFill>
                 <a:latin typeface="Arial"/>
               </a:defRPr>
@@ -11953,7 +11985,7 @@
               </a:spcAft>
               <a:defRPr sz="1300" b="0">
                 <a:solidFill>
-                  <a:srgbClr val="B0B0C5"/>
+                  <a:srgbClr val="3D3D56"/>
                 </a:solidFill>
                 <a:latin typeface="Arial"/>
               </a:defRPr>
@@ -11969,7 +12001,7 @@
               </a:spcAft>
               <a:defRPr sz="1300" b="0">
                 <a:solidFill>
-                  <a:srgbClr val="B0B0C5"/>
+                  <a:srgbClr val="3D3D56"/>
                 </a:solidFill>
                 <a:latin typeface="Arial"/>
               </a:defRPr>
@@ -11985,7 +12017,7 @@
               </a:spcAft>
               <a:defRPr sz="1300" b="1">
                 <a:solidFill>
-                  <a:srgbClr val="FF5A5A"/>
+                  <a:srgbClr val="DC3545"/>
                 </a:solidFill>
                 <a:latin typeface="Arial"/>
               </a:defRPr>
@@ -12011,10 +12043,12 @@
             <a:avLst/>
           </a:prstGeom>
           <a:solidFill>
-            <a:srgbClr val="25253D"/>
+            <a:srgbClr val="F0F2F7"/>
           </a:solidFill>
-          <a:ln>
-            <a:noFill/>
+          <a:ln w="12700">
+            <a:solidFill>
+              <a:srgbClr val="DEE1EB"/>
+            </a:solidFill>
           </a:ln>
         </p:spPr>
         <p:style>
@@ -12067,7 +12101,7 @@
               </a:spcAft>
               <a:defRPr sz="1600" b="1">
                 <a:solidFill>
-                  <a:srgbClr val="4E8CFF"/>
+                  <a:srgbClr val="2D5BE3"/>
                 </a:solidFill>
                 <a:latin typeface="Arial"/>
               </a:defRPr>
@@ -12083,7 +12117,7 @@
               </a:spcAft>
               <a:defRPr sz="1200" b="0">
                 <a:solidFill>
-                  <a:srgbClr val="80809A"/>
+                  <a:srgbClr val="787896"/>
                 </a:solidFill>
                 <a:latin typeface="Arial"/>
               </a:defRPr>
@@ -12099,7 +12133,7 @@
               </a:spcAft>
               <a:defRPr sz="1400" b="1">
                 <a:solidFill>
-                  <a:srgbClr val="4E8CFF"/>
+                  <a:srgbClr val="2D5BE3"/>
                 </a:solidFill>
                 <a:latin typeface="Arial"/>
               </a:defRPr>
@@ -12115,7 +12149,7 @@
               </a:spcAft>
               <a:defRPr sz="1300" b="0">
                 <a:solidFill>
-                  <a:srgbClr val="B0B0C5"/>
+                  <a:srgbClr val="3D3D56"/>
                 </a:solidFill>
                 <a:latin typeface="Arial"/>
               </a:defRPr>
@@ -12131,7 +12165,7 @@
               </a:spcAft>
               <a:defRPr sz="1300" b="0">
                 <a:solidFill>
-                  <a:srgbClr val="B0B0C5"/>
+                  <a:srgbClr val="3D3D56"/>
                 </a:solidFill>
                 <a:latin typeface="Arial"/>
               </a:defRPr>
@@ -12157,10 +12191,12 @@
             <a:avLst/>
           </a:prstGeom>
           <a:solidFill>
-            <a:srgbClr val="25253D"/>
+            <a:srgbClr val="F0F2F7"/>
           </a:solidFill>
-          <a:ln>
-            <a:noFill/>
+          <a:ln w="12700">
+            <a:solidFill>
+              <a:srgbClr val="DEE1EB"/>
+            </a:solidFill>
           </a:ln>
         </p:spPr>
         <p:style>
@@ -12213,7 +12249,7 @@
               </a:spcAft>
               <a:defRPr sz="1600" b="1">
                 <a:solidFill>
-                  <a:srgbClr val="4ECB71"/>
+                  <a:srgbClr val="1B9E4B"/>
                 </a:solidFill>
                 <a:latin typeface="Arial"/>
               </a:defRPr>
@@ -12229,7 +12265,7 @@
               </a:spcAft>
               <a:defRPr sz="1200" b="0">
                 <a:solidFill>
-                  <a:srgbClr val="80809A"/>
+                  <a:srgbClr val="787896"/>
                 </a:solidFill>
                 <a:latin typeface="Arial"/>
               </a:defRPr>
@@ -12245,7 +12281,7 @@
               </a:spcAft>
               <a:defRPr sz="1300" b="0">
                 <a:solidFill>
-                  <a:srgbClr val="B0B0C5"/>
+                  <a:srgbClr val="3D3D56"/>
                 </a:solidFill>
                 <a:latin typeface="Arial"/>
               </a:defRPr>
@@ -12261,7 +12297,7 @@
               </a:spcAft>
               <a:defRPr sz="1200" b="0">
                 <a:solidFill>
-                  <a:srgbClr val="80809A"/>
+                  <a:srgbClr val="787896"/>
                 </a:solidFill>
                 <a:latin typeface="Arial"/>
               </a:defRPr>
@@ -12277,7 +12313,7 @@
               </a:spcAft>
               <a:defRPr sz="1600" b="1">
                 <a:solidFill>
-                  <a:srgbClr val="00D4AA"/>
+                  <a:srgbClr val="009B8D"/>
                 </a:solidFill>
                 <a:latin typeface="Arial"/>
               </a:defRPr>
@@ -12293,7 +12329,7 @@
               </a:spcAft>
               <a:defRPr sz="1300" b="0">
                 <a:solidFill>
-                  <a:srgbClr val="4ECB71"/>
+                  <a:srgbClr val="1B9E4B"/>
                 </a:solidFill>
                 <a:latin typeface="Arial"/>
               </a:defRPr>
@@ -12319,10 +12355,12 @@
             <a:avLst/>
           </a:prstGeom>
           <a:solidFill>
-            <a:srgbClr val="25253D"/>
+            <a:srgbClr val="F0F2F7"/>
           </a:solidFill>
-          <a:ln>
-            <a:noFill/>
+          <a:ln w="12700">
+            <a:solidFill>
+              <a:srgbClr val="DEE1EB"/>
+            </a:solidFill>
           </a:ln>
         </p:spPr>
         <p:style>
@@ -12375,7 +12413,7 @@
               </a:spcAft>
               <a:defRPr sz="1600" b="1">
                 <a:solidFill>
-                  <a:srgbClr val="FF8C42"/>
+                  <a:srgbClr val="E86A17"/>
                 </a:solidFill>
                 <a:latin typeface="Arial"/>
               </a:defRPr>
@@ -12391,7 +12429,7 @@
               </a:spcAft>
               <a:defRPr sz="1300" b="0">
                 <a:solidFill>
-                  <a:srgbClr val="B0B0C5"/>
+                  <a:srgbClr val="3D3D56"/>
                 </a:solidFill>
                 <a:latin typeface="Arial"/>
               </a:defRPr>
@@ -12407,7 +12445,7 @@
               </a:spcAft>
               <a:defRPr sz="1300" b="0">
                 <a:solidFill>
-                  <a:srgbClr val="00D4AA"/>
+                  <a:srgbClr val="009B8D"/>
                 </a:solidFill>
                 <a:latin typeface="Arial"/>
               </a:defRPr>
@@ -12423,7 +12461,7 @@
               </a:spcAft>
               <a:defRPr sz="1300" b="0">
                 <a:solidFill>
-                  <a:srgbClr val="FF8C42"/>
+                  <a:srgbClr val="E86A17"/>
                 </a:solidFill>
                 <a:latin typeface="Arial"/>
               </a:defRPr>
@@ -12459,7 +12497,7 @@
             <a:pPr algn="r">
               <a:defRPr sz="1000" b="0">
                 <a:solidFill>
-                  <a:srgbClr val="80809A"/>
+                  <a:srgbClr val="787896"/>
                 </a:solidFill>
                 <a:latin typeface="Arial"/>
               </a:defRPr>
@@ -12484,7 +12522,7 @@
     <p:bg>
       <p:bgPr>
         <a:solidFill>
-          <a:srgbClr val="1B1B2F"/>
+          <a:srgbClr val="FAFAFC"/>
         </a:solidFill>
         <a:effectLst/>
       </p:bgPr>
@@ -12511,7 +12549,7 @@
             <a:avLst/>
           </a:prstGeom>
           <a:solidFill>
-            <a:srgbClr val="25253D"/>
+            <a:srgbClr val="FFFFFF"/>
           </a:solidFill>
           <a:ln>
             <a:noFill/>
@@ -12554,7 +12592,7 @@
             <a:avLst/>
           </a:prstGeom>
           <a:solidFill>
-            <a:srgbClr val="4E8CFF"/>
+            <a:srgbClr val="2D5BE3"/>
           </a:solidFill>
           <a:ln>
             <a:noFill/>
@@ -12607,7 +12645,7 @@
             <a:pPr algn="l">
               <a:defRPr sz="2200" b="1">
                 <a:solidFill>
-                  <a:srgbClr val="F0F0F5"/>
+                  <a:srgbClr val="1A1A2E"/>
                 </a:solidFill>
                 <a:latin typeface="Arial"/>
               </a:defRPr>
@@ -12643,7 +12681,7 @@
             <a:pPr algn="r">
               <a:defRPr sz="1200" b="0">
                 <a:solidFill>
-                  <a:srgbClr val="80809A"/>
+                  <a:srgbClr val="787896"/>
                 </a:solidFill>
                 <a:latin typeface="Arial"/>
               </a:defRPr>
@@ -12669,7 +12707,7 @@
             <a:avLst/>
           </a:prstGeom>
           <a:solidFill>
-            <a:srgbClr val="4E8CFF"/>
+            <a:srgbClr val="2D5BE3"/>
           </a:solidFill>
           <a:ln>
             <a:noFill/>
@@ -12722,7 +12760,7 @@
             <a:pPr algn="l">
               <a:defRPr sz="2200" b="1">
                 <a:solidFill>
-                  <a:srgbClr val="4E8CFF"/>
+                  <a:srgbClr val="2D5BE3"/>
                 </a:solidFill>
                 <a:latin typeface="Arial"/>
               </a:defRPr>
@@ -12758,7 +12796,7 @@
             <a:pPr algn="l">
               <a:defRPr sz="1800" b="1">
                 <a:solidFill>
-                  <a:srgbClr val="F0F0F5"/>
+                  <a:srgbClr val="1A1A2E"/>
                 </a:solidFill>
                 <a:latin typeface="Arial"/>
               </a:defRPr>
@@ -12794,7 +12832,7 @@
             <a:pPr algn="l">
               <a:defRPr sz="1300" b="0">
                 <a:solidFill>
-                  <a:srgbClr val="B0B0C5"/>
+                  <a:srgbClr val="3D3D56"/>
                 </a:solidFill>
                 <a:latin typeface="Arial"/>
               </a:defRPr>
@@ -12820,7 +12858,7 @@
             <a:avLst/>
           </a:prstGeom>
           <a:solidFill>
-            <a:srgbClr val="00D4AA"/>
+            <a:srgbClr val="009B8D"/>
           </a:solidFill>
           <a:ln>
             <a:noFill/>
@@ -12873,7 +12911,7 @@
             <a:pPr algn="l">
               <a:defRPr sz="2200" b="1">
                 <a:solidFill>
-                  <a:srgbClr val="00D4AA"/>
+                  <a:srgbClr val="009B8D"/>
                 </a:solidFill>
                 <a:latin typeface="Arial"/>
               </a:defRPr>
@@ -12909,7 +12947,7 @@
             <a:pPr algn="l">
               <a:defRPr sz="1800" b="1">
                 <a:solidFill>
-                  <a:srgbClr val="F0F0F5"/>
+                  <a:srgbClr val="1A1A2E"/>
                 </a:solidFill>
                 <a:latin typeface="Arial"/>
               </a:defRPr>
@@ -12945,7 +12983,7 @@
             <a:pPr algn="l">
               <a:defRPr sz="1300" b="0">
                 <a:solidFill>
-                  <a:srgbClr val="B0B0C5"/>
+                  <a:srgbClr val="3D3D56"/>
                 </a:solidFill>
                 <a:latin typeface="Arial"/>
               </a:defRPr>
@@ -12971,7 +13009,7 @@
             <a:avLst/>
           </a:prstGeom>
           <a:solidFill>
-            <a:srgbClr val="A878FF"/>
+            <a:srgbClr val="7C4DFF"/>
           </a:solidFill>
           <a:ln>
             <a:noFill/>
@@ -13024,7 +13062,7 @@
             <a:pPr algn="l">
               <a:defRPr sz="2200" b="1">
                 <a:solidFill>
-                  <a:srgbClr val="A878FF"/>
+                  <a:srgbClr val="7C4DFF"/>
                 </a:solidFill>
                 <a:latin typeface="Arial"/>
               </a:defRPr>
@@ -13060,7 +13098,7 @@
             <a:pPr algn="l">
               <a:defRPr sz="1800" b="1">
                 <a:solidFill>
-                  <a:srgbClr val="F0F0F5"/>
+                  <a:srgbClr val="1A1A2E"/>
                 </a:solidFill>
                 <a:latin typeface="Arial"/>
               </a:defRPr>
@@ -13096,7 +13134,7 @@
             <a:pPr algn="l">
               <a:defRPr sz="1300" b="0">
                 <a:solidFill>
-                  <a:srgbClr val="B0B0C5"/>
+                  <a:srgbClr val="3D3D56"/>
                 </a:solidFill>
                 <a:latin typeface="Arial"/>
               </a:defRPr>
@@ -13122,7 +13160,7 @@
             <a:avLst/>
           </a:prstGeom>
           <a:solidFill>
-            <a:srgbClr val="FF8C42"/>
+            <a:srgbClr val="E86A17"/>
           </a:solidFill>
           <a:ln>
             <a:noFill/>
@@ -13175,7 +13213,7 @@
             <a:pPr algn="l">
               <a:defRPr sz="2200" b="1">
                 <a:solidFill>
-                  <a:srgbClr val="FF8C42"/>
+                  <a:srgbClr val="E86A17"/>
                 </a:solidFill>
                 <a:latin typeface="Arial"/>
               </a:defRPr>
@@ -13211,7 +13249,7 @@
             <a:pPr algn="l">
               <a:defRPr sz="1800" b="1">
                 <a:solidFill>
-                  <a:srgbClr val="F0F0F5"/>
+                  <a:srgbClr val="1A1A2E"/>
                 </a:solidFill>
                 <a:latin typeface="Arial"/>
               </a:defRPr>
@@ -13247,7 +13285,7 @@
             <a:pPr algn="l">
               <a:defRPr sz="1300" b="0">
                 <a:solidFill>
-                  <a:srgbClr val="B0B0C5"/>
+                  <a:srgbClr val="3D3D56"/>
                 </a:solidFill>
                 <a:latin typeface="Arial"/>
               </a:defRPr>
@@ -13273,7 +13311,7 @@
             <a:avLst/>
           </a:prstGeom>
           <a:solidFill>
-            <a:srgbClr val="FF6B9D"/>
+            <a:srgbClr val="D6336C"/>
           </a:solidFill>
           <a:ln>
             <a:noFill/>
@@ -13326,7 +13364,7 @@
             <a:pPr algn="l">
               <a:defRPr sz="2200" b="1">
                 <a:solidFill>
-                  <a:srgbClr val="FF6B9D"/>
+                  <a:srgbClr val="D6336C"/>
                 </a:solidFill>
                 <a:latin typeface="Arial"/>
               </a:defRPr>
@@ -13362,7 +13400,7 @@
             <a:pPr algn="l">
               <a:defRPr sz="1800" b="1">
                 <a:solidFill>
-                  <a:srgbClr val="F0F0F5"/>
+                  <a:srgbClr val="1A1A2E"/>
                 </a:solidFill>
                 <a:latin typeface="Arial"/>
               </a:defRPr>
@@ -13398,7 +13436,7 @@
             <a:pPr algn="l">
               <a:defRPr sz="1300" b="0">
                 <a:solidFill>
-                  <a:srgbClr val="B0B0C5"/>
+                  <a:srgbClr val="3D3D56"/>
                 </a:solidFill>
                 <a:latin typeface="Arial"/>
               </a:defRPr>
@@ -13424,7 +13462,7 @@
             <a:avLst/>
           </a:prstGeom>
           <a:solidFill>
-            <a:srgbClr val="4ECB71"/>
+            <a:srgbClr val="1B9E4B"/>
           </a:solidFill>
           <a:ln>
             <a:noFill/>
@@ -13477,7 +13515,7 @@
             <a:pPr algn="l">
               <a:defRPr sz="2200" b="1">
                 <a:solidFill>
-                  <a:srgbClr val="4ECB71"/>
+                  <a:srgbClr val="1B9E4B"/>
                 </a:solidFill>
                 <a:latin typeface="Arial"/>
               </a:defRPr>
@@ -13513,7 +13551,7 @@
             <a:pPr algn="l">
               <a:defRPr sz="1800" b="1">
                 <a:solidFill>
-                  <a:srgbClr val="F0F0F5"/>
+                  <a:srgbClr val="1A1A2E"/>
                 </a:solidFill>
                 <a:latin typeface="Arial"/>
               </a:defRPr>
@@ -13549,7 +13587,7 @@
             <a:pPr algn="l">
               <a:defRPr sz="1300" b="0">
                 <a:solidFill>
-                  <a:srgbClr val="B0B0C5"/>
+                  <a:srgbClr val="3D3D56"/>
                 </a:solidFill>
                 <a:latin typeface="Arial"/>
               </a:defRPr>
@@ -13585,7 +13623,7 @@
             <a:pPr algn="r">
               <a:defRPr sz="1000" b="0">
                 <a:solidFill>
-                  <a:srgbClr val="80809A"/>
+                  <a:srgbClr val="787896"/>
                 </a:solidFill>
                 <a:latin typeface="Arial"/>
               </a:defRPr>
@@ -13610,7 +13648,7 @@
     <p:bg>
       <p:bgPr>
         <a:solidFill>
-          <a:srgbClr val="1B1B2F"/>
+          <a:srgbClr val="F5F7FB"/>
         </a:solidFill>
         <a:effectLst/>
       </p:bgPr>
@@ -13637,7 +13675,7 @@
             <a:avLst/>
           </a:prstGeom>
           <a:solidFill>
-            <a:srgbClr val="4E8CFF"/>
+            <a:srgbClr val="2D5BE3"/>
           </a:solidFill>
           <a:ln>
             <a:noFill/>
@@ -13690,7 +13728,7 @@
             <a:pPr algn="l">
               <a:defRPr sz="2000" b="1">
                 <a:solidFill>
-                  <a:srgbClr val="4E8CFF"/>
+                  <a:srgbClr val="2D5BE3"/>
                 </a:solidFill>
                 <a:latin typeface="Arial"/>
               </a:defRPr>
@@ -13726,7 +13764,7 @@
             <a:pPr algn="l">
               <a:defRPr sz="4400" b="1">
                 <a:solidFill>
-                  <a:srgbClr val="F0F0F5"/>
+                  <a:srgbClr val="1A1A2E"/>
                 </a:solidFill>
                 <a:latin typeface="Arial"/>
               </a:defRPr>
@@ -13762,7 +13800,7 @@
             <a:pPr algn="l">
               <a:defRPr sz="1800" b="0">
                 <a:solidFill>
-                  <a:srgbClr val="B0B0C5"/>
+                  <a:srgbClr val="3D3D56"/>
                 </a:solidFill>
                 <a:latin typeface="Arial"/>
               </a:defRPr>
@@ -13788,7 +13826,7 @@
             <a:avLst/>
           </a:prstGeom>
           <a:solidFill>
-            <a:srgbClr val="4E8CFF"/>
+            <a:srgbClr val="2D5BE3"/>
           </a:solidFill>
           <a:ln>
             <a:noFill/>
@@ -13841,7 +13879,7 @@
             <a:pPr algn="r">
               <a:defRPr sz="1000" b="0">
                 <a:solidFill>
-                  <a:srgbClr val="80809A"/>
+                  <a:srgbClr val="787896"/>
                 </a:solidFill>
                 <a:latin typeface="Arial"/>
               </a:defRPr>
@@ -13866,7 +13904,7 @@
     <p:bg>
       <p:bgPr>
         <a:solidFill>
-          <a:srgbClr val="1B1B2F"/>
+          <a:srgbClr val="FAFAFC"/>
         </a:solidFill>
         <a:effectLst/>
       </p:bgPr>
@@ -13893,7 +13931,7 @@
             <a:avLst/>
           </a:prstGeom>
           <a:solidFill>
-            <a:srgbClr val="25253D"/>
+            <a:srgbClr val="FFFFFF"/>
           </a:solidFill>
           <a:ln>
             <a:noFill/>
@@ -13936,7 +13974,7 @@
             <a:avLst/>
           </a:prstGeom>
           <a:solidFill>
-            <a:srgbClr val="4E8CFF"/>
+            <a:srgbClr val="2D5BE3"/>
           </a:solidFill>
           <a:ln>
             <a:noFill/>
@@ -13989,7 +14027,7 @@
             <a:pPr algn="l">
               <a:defRPr sz="2200" b="1">
                 <a:solidFill>
-                  <a:srgbClr val="F0F0F5"/>
+                  <a:srgbClr val="1A1A2E"/>
                 </a:solidFill>
                 <a:latin typeface="Arial"/>
               </a:defRPr>
@@ -14025,7 +14063,7 @@
             <a:pPr algn="r">
               <a:defRPr sz="1200" b="0">
                 <a:solidFill>
-                  <a:srgbClr val="80809A"/>
+                  <a:srgbClr val="787896"/>
                 </a:solidFill>
                 <a:latin typeface="Arial"/>
               </a:defRPr>
@@ -14051,10 +14089,12 @@
             <a:avLst/>
           </a:prstGeom>
           <a:solidFill>
-            <a:srgbClr val="25253D"/>
+            <a:srgbClr val="F0F2F7"/>
           </a:solidFill>
-          <a:ln>
-            <a:noFill/>
+          <a:ln w="12700">
+            <a:solidFill>
+              <a:srgbClr val="DEE1EB"/>
+            </a:solidFill>
           </a:ln>
         </p:spPr>
         <p:style>
@@ -14107,7 +14147,7 @@
               </a:spcAft>
               <a:defRPr sz="1600" b="1">
                 <a:solidFill>
-                  <a:srgbClr val="4E8CFF"/>
+                  <a:srgbClr val="2D5BE3"/>
                 </a:solidFill>
                 <a:latin typeface="Arial"/>
               </a:defRPr>
@@ -14123,7 +14163,7 @@
               </a:spcAft>
               <a:defRPr sz="1400" b="1">
                 <a:solidFill>
-                  <a:srgbClr val="00D4AA"/>
+                  <a:srgbClr val="009B8D"/>
                 </a:solidFill>
                 <a:latin typeface="Arial"/>
               </a:defRPr>
@@ -14139,7 +14179,7 @@
               </a:spcAft>
               <a:defRPr sz="1200" b="0">
                 <a:solidFill>
-                  <a:srgbClr val="B0B0C5"/>
+                  <a:srgbClr val="3D3D56"/>
                 </a:solidFill>
                 <a:latin typeface="Arial"/>
               </a:defRPr>
@@ -14155,7 +14195,7 @@
               </a:spcAft>
               <a:defRPr sz="1200" b="0">
                 <a:solidFill>
-                  <a:srgbClr val="B0B0C5"/>
+                  <a:srgbClr val="3D3D56"/>
                 </a:solidFill>
                 <a:latin typeface="Arial"/>
               </a:defRPr>
@@ -14181,10 +14221,12 @@
             <a:avLst/>
           </a:prstGeom>
           <a:solidFill>
-            <a:srgbClr val="25253D"/>
+            <a:srgbClr val="F0F2F7"/>
           </a:solidFill>
-          <a:ln>
-            <a:noFill/>
+          <a:ln w="12700">
+            <a:solidFill>
+              <a:srgbClr val="DEE1EB"/>
+            </a:solidFill>
           </a:ln>
         </p:spPr>
         <p:style>
@@ -14237,7 +14279,7 @@
               </a:spcAft>
               <a:defRPr sz="1600" b="1">
                 <a:solidFill>
-                  <a:srgbClr val="FF8C42"/>
+                  <a:srgbClr val="E86A17"/>
                 </a:solidFill>
                 <a:latin typeface="Arial"/>
               </a:defRPr>
@@ -14253,7 +14295,7 @@
               </a:spcAft>
               <a:defRPr sz="1400" b="1">
                 <a:solidFill>
-                  <a:srgbClr val="FF8C42"/>
+                  <a:srgbClr val="E86A17"/>
                 </a:solidFill>
                 <a:latin typeface="Arial"/>
               </a:defRPr>
@@ -14269,7 +14311,7 @@
               </a:spcAft>
               <a:defRPr sz="1200" b="0">
                 <a:solidFill>
-                  <a:srgbClr val="B0B0C5"/>
+                  <a:srgbClr val="3D3D56"/>
                 </a:solidFill>
                 <a:latin typeface="Arial"/>
               </a:defRPr>
@@ -14285,7 +14327,7 @@
               </a:spcAft>
               <a:defRPr sz="1200" b="0">
                 <a:solidFill>
-                  <a:srgbClr val="B0B0C5"/>
+                  <a:srgbClr val="3D3D56"/>
                 </a:solidFill>
                 <a:latin typeface="Arial"/>
               </a:defRPr>
@@ -14301,7 +14343,7 @@
               </a:spcAft>
               <a:defRPr sz="1200" b="0">
                 <a:solidFill>
-                  <a:srgbClr val="80809A"/>
+                  <a:srgbClr val="787896"/>
                 </a:solidFill>
                 <a:latin typeface="Arial"/>
               </a:defRPr>
@@ -14327,10 +14369,12 @@
             <a:avLst/>
           </a:prstGeom>
           <a:solidFill>
-            <a:srgbClr val="25253D"/>
+            <a:srgbClr val="F0F2F7"/>
           </a:solidFill>
-          <a:ln>
-            <a:noFill/>
+          <a:ln w="12700">
+            <a:solidFill>
+              <a:srgbClr val="DEE1EB"/>
+            </a:solidFill>
           </a:ln>
         </p:spPr>
         <p:style>
@@ -14383,7 +14427,7 @@
               </a:spcAft>
               <a:defRPr sz="1600" b="1">
                 <a:solidFill>
-                  <a:srgbClr val="4ECB71"/>
+                  <a:srgbClr val="1B9E4B"/>
                 </a:solidFill>
                 <a:latin typeface="Arial"/>
               </a:defRPr>
@@ -14399,7 +14443,7 @@
               </a:spcAft>
               <a:defRPr sz="1400" b="1">
                 <a:solidFill>
-                  <a:srgbClr val="4ECB71"/>
+                  <a:srgbClr val="1B9E4B"/>
                 </a:solidFill>
                 <a:latin typeface="Arial"/>
               </a:defRPr>
@@ -14415,7 +14459,7 @@
               </a:spcAft>
               <a:defRPr sz="1200" b="0">
                 <a:solidFill>
-                  <a:srgbClr val="B0B0C5"/>
+                  <a:srgbClr val="3D3D56"/>
                 </a:solidFill>
                 <a:latin typeface="Arial"/>
               </a:defRPr>
@@ -14431,7 +14475,7 @@
               </a:spcAft>
               <a:defRPr sz="1200" b="0">
                 <a:solidFill>
-                  <a:srgbClr val="B0B0C5"/>
+                  <a:srgbClr val="3D3D56"/>
                 </a:solidFill>
                 <a:latin typeface="Arial"/>
               </a:defRPr>
@@ -14447,7 +14491,7 @@
               </a:spcAft>
               <a:defRPr sz="1200" b="0">
                 <a:solidFill>
-                  <a:srgbClr val="80809A"/>
+                  <a:srgbClr val="787896"/>
                 </a:solidFill>
                 <a:latin typeface="Arial"/>
               </a:defRPr>
@@ -14473,10 +14517,12 @@
             <a:avLst/>
           </a:prstGeom>
           <a:solidFill>
-            <a:srgbClr val="25253D"/>
+            <a:srgbClr val="F0F2F7"/>
           </a:solidFill>
-          <a:ln>
-            <a:noFill/>
+          <a:ln w="12700">
+            <a:solidFill>
+              <a:srgbClr val="DEE1EB"/>
+            </a:solidFill>
           </a:ln>
         </p:spPr>
         <p:style>
@@ -14529,7 +14575,7 @@
               </a:spcAft>
               <a:defRPr sz="1600" b="1">
                 <a:solidFill>
-                  <a:srgbClr val="A878FF"/>
+                  <a:srgbClr val="7C4DFF"/>
                 </a:solidFill>
                 <a:latin typeface="Arial"/>
               </a:defRPr>
@@ -14545,7 +14591,7 @@
               </a:spcAft>
               <a:defRPr sz="1300" b="0">
                 <a:solidFill>
-                  <a:srgbClr val="B0B0C5"/>
+                  <a:srgbClr val="3D3D56"/>
                 </a:solidFill>
                 <a:latin typeface="Arial"/>
               </a:defRPr>
@@ -14561,7 +14607,7 @@
               </a:spcAft>
               <a:defRPr sz="1300" b="0">
                 <a:solidFill>
-                  <a:srgbClr val="B0B0C5"/>
+                  <a:srgbClr val="3D3D56"/>
                 </a:solidFill>
                 <a:latin typeface="Arial"/>
               </a:defRPr>
@@ -14577,7 +14623,7 @@
               </a:spcAft>
               <a:defRPr sz="1300" b="0">
                 <a:solidFill>
-                  <a:srgbClr val="B0B0C5"/>
+                  <a:srgbClr val="3D3D56"/>
                 </a:solidFill>
                 <a:latin typeface="Arial"/>
               </a:defRPr>
@@ -14593,7 +14639,7 @@
               </a:spcAft>
               <a:defRPr sz="1200" b="0">
                 <a:solidFill>
-                  <a:srgbClr val="B0B0C5"/>
+                  <a:srgbClr val="3D3D56"/>
                 </a:solidFill>
                 <a:latin typeface="Arial"/>
               </a:defRPr>
@@ -14609,7 +14655,7 @@
               </a:spcAft>
               <a:defRPr sz="1200" b="0">
                 <a:solidFill>
-                  <a:srgbClr val="00D4AA"/>
+                  <a:srgbClr val="009B8D"/>
                 </a:solidFill>
                 <a:latin typeface="Arial"/>
               </a:defRPr>
@@ -14625,7 +14671,7 @@
               </a:spcAft>
               <a:defRPr sz="1200" b="0">
                 <a:solidFill>
-                  <a:srgbClr val="FF8C42"/>
+                  <a:srgbClr val="E86A17"/>
                 </a:solidFill>
                 <a:latin typeface="Arial"/>
               </a:defRPr>
@@ -14651,10 +14697,12 @@
             <a:avLst/>
           </a:prstGeom>
           <a:solidFill>
-            <a:srgbClr val="25253D"/>
+            <a:srgbClr val="F0F2F7"/>
           </a:solidFill>
-          <a:ln>
-            <a:noFill/>
+          <a:ln w="12700">
+            <a:solidFill>
+              <a:srgbClr val="DEE1EB"/>
+            </a:solidFill>
           </a:ln>
         </p:spPr>
         <p:style>
@@ -14707,7 +14755,7 @@
               </a:spcAft>
               <a:defRPr sz="1600" b="1">
                 <a:solidFill>
-                  <a:srgbClr val="00D4AA"/>
+                  <a:srgbClr val="009B8D"/>
                 </a:solidFill>
                 <a:latin typeface="Arial"/>
               </a:defRPr>
@@ -14723,7 +14771,7 @@
               </a:spcAft>
               <a:defRPr sz="1300" b="0">
                 <a:solidFill>
-                  <a:srgbClr val="00D4AA"/>
+                  <a:srgbClr val="009B8D"/>
                 </a:solidFill>
                 <a:latin typeface="Arial"/>
               </a:defRPr>
@@ -14739,7 +14787,7 @@
               </a:spcAft>
               <a:defRPr sz="1200" b="0">
                 <a:solidFill>
-                  <a:srgbClr val="B0B0C5"/>
+                  <a:srgbClr val="3D3D56"/>
                 </a:solidFill>
                 <a:latin typeface="Arial"/>
               </a:defRPr>
@@ -14755,7 +14803,7 @@
               </a:spcAft>
               <a:defRPr sz="1200" b="0">
                 <a:solidFill>
-                  <a:srgbClr val="B0B0C5"/>
+                  <a:srgbClr val="3D3D56"/>
                 </a:solidFill>
                 <a:latin typeface="Arial"/>
               </a:defRPr>
@@ -14771,7 +14819,7 @@
               </a:spcAft>
               <a:defRPr sz="1200" b="0">
                 <a:solidFill>
-                  <a:srgbClr val="B0B0C5"/>
+                  <a:srgbClr val="3D3D56"/>
                 </a:solidFill>
                 <a:latin typeface="Arial"/>
               </a:defRPr>
@@ -14787,7 +14835,7 @@
               </a:spcAft>
               <a:defRPr sz="1200" b="0">
                 <a:solidFill>
-                  <a:srgbClr val="B0B0C5"/>
+                  <a:srgbClr val="3D3D56"/>
                 </a:solidFill>
                 <a:latin typeface="Arial"/>
               </a:defRPr>
@@ -14803,7 +14851,7 @@
               </a:spcAft>
               <a:defRPr sz="1200" b="0">
                 <a:solidFill>
-                  <a:srgbClr val="FF8C42"/>
+                  <a:srgbClr val="E86A17"/>
                 </a:solidFill>
                 <a:latin typeface="Arial"/>
               </a:defRPr>
@@ -14839,7 +14887,7 @@
             <a:pPr algn="r">
               <a:defRPr sz="1000" b="0">
                 <a:solidFill>
-                  <a:srgbClr val="80809A"/>
+                  <a:srgbClr val="787896"/>
                 </a:solidFill>
                 <a:latin typeface="Arial"/>
               </a:defRPr>
@@ -14864,7 +14912,7 @@
     <p:bg>
       <p:bgPr>
         <a:solidFill>
-          <a:srgbClr val="1B1B2F"/>
+          <a:srgbClr val="FAFAFC"/>
         </a:solidFill>
         <a:effectLst/>
       </p:bgPr>
@@ -14891,7 +14939,7 @@
             <a:avLst/>
           </a:prstGeom>
           <a:solidFill>
-            <a:srgbClr val="25253D"/>
+            <a:srgbClr val="FFFFFF"/>
           </a:solidFill>
           <a:ln>
             <a:noFill/>
@@ -14934,7 +14982,7 @@
             <a:avLst/>
           </a:prstGeom>
           <a:solidFill>
-            <a:srgbClr val="4E8CFF"/>
+            <a:srgbClr val="2D5BE3"/>
           </a:solidFill>
           <a:ln>
             <a:noFill/>
@@ -14987,7 +15035,7 @@
             <a:pPr algn="l">
               <a:defRPr sz="2200" b="1">
                 <a:solidFill>
-                  <a:srgbClr val="F0F0F5"/>
+                  <a:srgbClr val="1A1A2E"/>
                 </a:solidFill>
                 <a:latin typeface="Arial"/>
               </a:defRPr>
@@ -15023,7 +15071,7 @@
             <a:pPr algn="r">
               <a:defRPr sz="1200" b="0">
                 <a:solidFill>
-                  <a:srgbClr val="80809A"/>
+                  <a:srgbClr val="787896"/>
                 </a:solidFill>
                 <a:latin typeface="Arial"/>
               </a:defRPr>
@@ -15067,7 +15115,7 @@
                       <a:pPr>
                         <a:defRPr sz="1200" b="1">
                           <a:solidFill>
-                            <a:srgbClr val="F0F0F5"/>
+                            <a:srgbClr val="FFFFFF"/>
                           </a:solidFill>
                           <a:latin typeface="Arial"/>
                         </a:defRPr>
@@ -15079,7 +15127,7 @@
                   </a:txBody>
                   <a:tcPr>
                     <a:solidFill>
-                      <a:srgbClr val="2D3A6D"/>
+                      <a:srgbClr val="2D5BE3"/>
                     </a:solidFill>
                   </a:tcPr>
                 </a:tc>
@@ -15091,7 +15139,7 @@
                       <a:pPr>
                         <a:defRPr sz="1200" b="1">
                           <a:solidFill>
-                            <a:srgbClr val="F0F0F5"/>
+                            <a:srgbClr val="FFFFFF"/>
                           </a:solidFill>
                           <a:latin typeface="Arial"/>
                         </a:defRPr>
@@ -15103,7 +15151,7 @@
                   </a:txBody>
                   <a:tcPr>
                     <a:solidFill>
-                      <a:srgbClr val="2D3A6D"/>
+                      <a:srgbClr val="2D5BE3"/>
                     </a:solidFill>
                   </a:tcPr>
                 </a:tc>
@@ -15115,7 +15163,7 @@
                       <a:pPr>
                         <a:defRPr sz="1200" b="1">
                           <a:solidFill>
-                            <a:srgbClr val="F0F0F5"/>
+                            <a:srgbClr val="FFFFFF"/>
                           </a:solidFill>
                           <a:latin typeface="Arial"/>
                         </a:defRPr>
@@ -15127,7 +15175,7 @@
                   </a:txBody>
                   <a:tcPr>
                     <a:solidFill>
-                      <a:srgbClr val="2D3A6D"/>
+                      <a:srgbClr val="2D5BE3"/>
                     </a:solidFill>
                   </a:tcPr>
                 </a:tc>
@@ -15139,7 +15187,7 @@
                       <a:pPr>
                         <a:defRPr sz="1200" b="1">
                           <a:solidFill>
-                            <a:srgbClr val="F0F0F5"/>
+                            <a:srgbClr val="FFFFFF"/>
                           </a:solidFill>
                           <a:latin typeface="Arial"/>
                         </a:defRPr>
@@ -15151,7 +15199,7 @@
                   </a:txBody>
                   <a:tcPr>
                     <a:solidFill>
-                      <a:srgbClr val="2D3A6D"/>
+                      <a:srgbClr val="2D5BE3"/>
                     </a:solidFill>
                   </a:tcPr>
                 </a:tc>
@@ -15165,7 +15213,7 @@
                       <a:pPr>
                         <a:defRPr sz="1100" b="0">
                           <a:solidFill>
-                            <a:srgbClr val="B0B0C5"/>
+                            <a:srgbClr val="3D3D56"/>
                           </a:solidFill>
                           <a:latin typeface="Arial"/>
                         </a:defRPr>
@@ -15177,7 +15225,7 @@
                   </a:txBody>
                   <a:tcPr>
                     <a:solidFill>
-                      <a:srgbClr val="25253D"/>
+                      <a:srgbClr val="FFFFFF"/>
                     </a:solidFill>
                   </a:tcPr>
                 </a:tc>
@@ -15189,7 +15237,7 @@
                       <a:pPr>
                         <a:defRPr sz="1100" b="0">
                           <a:solidFill>
-                            <a:srgbClr val="B0B0C5"/>
+                            <a:srgbClr val="3D3D56"/>
                           </a:solidFill>
                           <a:latin typeface="Arial"/>
                         </a:defRPr>
@@ -15201,7 +15249,7 @@
                   </a:txBody>
                   <a:tcPr>
                     <a:solidFill>
-                      <a:srgbClr val="25253D"/>
+                      <a:srgbClr val="FFFFFF"/>
                     </a:solidFill>
                   </a:tcPr>
                 </a:tc>
@@ -15213,7 +15261,7 @@
                       <a:pPr>
                         <a:defRPr sz="1100" b="0">
                           <a:solidFill>
-                            <a:srgbClr val="B0B0C5"/>
+                            <a:srgbClr val="3D3D56"/>
                           </a:solidFill>
                           <a:latin typeface="Arial"/>
                         </a:defRPr>
@@ -15225,7 +15273,7 @@
                   </a:txBody>
                   <a:tcPr>
                     <a:solidFill>
-                      <a:srgbClr val="25253D"/>
+                      <a:srgbClr val="FFFFFF"/>
                     </a:solidFill>
                   </a:tcPr>
                 </a:tc>
@@ -15237,7 +15285,7 @@
                       <a:pPr>
                         <a:defRPr sz="1100" b="0">
                           <a:solidFill>
-                            <a:srgbClr val="B0B0C5"/>
+                            <a:srgbClr val="3D3D56"/>
                           </a:solidFill>
                           <a:latin typeface="Arial"/>
                         </a:defRPr>
@@ -15249,7 +15297,7 @@
                   </a:txBody>
                   <a:tcPr>
                     <a:solidFill>
-                      <a:srgbClr val="25253D"/>
+                      <a:srgbClr val="FFFFFF"/>
                     </a:solidFill>
                   </a:tcPr>
                 </a:tc>
@@ -15263,7 +15311,7 @@
                       <a:pPr>
                         <a:defRPr sz="1100" b="0">
                           <a:solidFill>
-                            <a:srgbClr val="B0B0C5"/>
+                            <a:srgbClr val="3D3D56"/>
                           </a:solidFill>
                           <a:latin typeface="Arial"/>
                         </a:defRPr>
@@ -15275,7 +15323,7 @@
                   </a:txBody>
                   <a:tcPr>
                     <a:solidFill>
-                      <a:srgbClr val="202036"/>
+                      <a:srgbClr val="F0F2F7"/>
                     </a:solidFill>
                   </a:tcPr>
                 </a:tc>
@@ -15287,7 +15335,7 @@
                       <a:pPr>
                         <a:defRPr sz="1100" b="0">
                           <a:solidFill>
-                            <a:srgbClr val="B0B0C5"/>
+                            <a:srgbClr val="3D3D56"/>
                           </a:solidFill>
                           <a:latin typeface="Arial"/>
                         </a:defRPr>
@@ -15299,7 +15347,7 @@
                   </a:txBody>
                   <a:tcPr>
                     <a:solidFill>
-                      <a:srgbClr val="202036"/>
+                      <a:srgbClr val="F0F2F7"/>
                     </a:solidFill>
                   </a:tcPr>
                 </a:tc>
@@ -15311,7 +15359,7 @@
                       <a:pPr>
                         <a:defRPr sz="1100" b="0">
                           <a:solidFill>
-                            <a:srgbClr val="B0B0C5"/>
+                            <a:srgbClr val="3D3D56"/>
                           </a:solidFill>
                           <a:latin typeface="Arial"/>
                         </a:defRPr>
@@ -15323,7 +15371,7 @@
                   </a:txBody>
                   <a:tcPr>
                     <a:solidFill>
-                      <a:srgbClr val="202036"/>
+                      <a:srgbClr val="F0F2F7"/>
                     </a:solidFill>
                   </a:tcPr>
                 </a:tc>
@@ -15335,7 +15383,7 @@
                       <a:pPr>
                         <a:defRPr sz="1100" b="0">
                           <a:solidFill>
-                            <a:srgbClr val="B0B0C5"/>
+                            <a:srgbClr val="3D3D56"/>
                           </a:solidFill>
                           <a:latin typeface="Arial"/>
                         </a:defRPr>
@@ -15347,7 +15395,7 @@
                   </a:txBody>
                   <a:tcPr>
                     <a:solidFill>
-                      <a:srgbClr val="202036"/>
+                      <a:srgbClr val="F0F2F7"/>
                     </a:solidFill>
                   </a:tcPr>
                 </a:tc>
@@ -15361,7 +15409,7 @@
                       <a:pPr>
                         <a:defRPr sz="1100" b="0">
                           <a:solidFill>
-                            <a:srgbClr val="B0B0C5"/>
+                            <a:srgbClr val="3D3D56"/>
                           </a:solidFill>
                           <a:latin typeface="Arial"/>
                         </a:defRPr>
@@ -15373,7 +15421,7 @@
                   </a:txBody>
                   <a:tcPr>
                     <a:solidFill>
-                      <a:srgbClr val="25253D"/>
+                      <a:srgbClr val="FFFFFF"/>
                     </a:solidFill>
                   </a:tcPr>
                 </a:tc>
@@ -15385,7 +15433,7 @@
                       <a:pPr>
                         <a:defRPr sz="1100" b="0">
                           <a:solidFill>
-                            <a:srgbClr val="B0B0C5"/>
+                            <a:srgbClr val="3D3D56"/>
                           </a:solidFill>
                           <a:latin typeface="Arial"/>
                         </a:defRPr>
@@ -15397,7 +15445,7 @@
                   </a:txBody>
                   <a:tcPr>
                     <a:solidFill>
-                      <a:srgbClr val="25253D"/>
+                      <a:srgbClr val="FFFFFF"/>
                     </a:solidFill>
                   </a:tcPr>
                 </a:tc>
@@ -15409,7 +15457,7 @@
                       <a:pPr>
                         <a:defRPr sz="1100" b="0">
                           <a:solidFill>
-                            <a:srgbClr val="B0B0C5"/>
+                            <a:srgbClr val="3D3D56"/>
                           </a:solidFill>
                           <a:latin typeface="Arial"/>
                         </a:defRPr>
@@ -15421,7 +15469,7 @@
                   </a:txBody>
                   <a:tcPr>
                     <a:solidFill>
-                      <a:srgbClr val="25253D"/>
+                      <a:srgbClr val="FFFFFF"/>
                     </a:solidFill>
                   </a:tcPr>
                 </a:tc>
@@ -15433,7 +15481,7 @@
                       <a:pPr>
                         <a:defRPr sz="1100" b="0">
                           <a:solidFill>
-                            <a:srgbClr val="B0B0C5"/>
+                            <a:srgbClr val="3D3D56"/>
                           </a:solidFill>
                           <a:latin typeface="Arial"/>
                         </a:defRPr>
@@ -15445,7 +15493,7 @@
                   </a:txBody>
                   <a:tcPr>
                     <a:solidFill>
-                      <a:srgbClr val="25253D"/>
+                      <a:srgbClr val="FFFFFF"/>
                     </a:solidFill>
                   </a:tcPr>
                 </a:tc>
@@ -15459,7 +15507,7 @@
                       <a:pPr>
                         <a:defRPr sz="1100" b="0">
                           <a:solidFill>
-                            <a:srgbClr val="B0B0C5"/>
+                            <a:srgbClr val="3D3D56"/>
                           </a:solidFill>
                           <a:latin typeface="Arial"/>
                         </a:defRPr>
@@ -15471,7 +15519,7 @@
                   </a:txBody>
                   <a:tcPr>
                     <a:solidFill>
-                      <a:srgbClr val="202036"/>
+                      <a:srgbClr val="F0F2F7"/>
                     </a:solidFill>
                   </a:tcPr>
                 </a:tc>
@@ -15483,7 +15531,7 @@
                       <a:pPr>
                         <a:defRPr sz="1100" b="0">
                           <a:solidFill>
-                            <a:srgbClr val="B0B0C5"/>
+                            <a:srgbClr val="3D3D56"/>
                           </a:solidFill>
                           <a:latin typeface="Arial"/>
                         </a:defRPr>
@@ -15495,7 +15543,7 @@
                   </a:txBody>
                   <a:tcPr>
                     <a:solidFill>
-                      <a:srgbClr val="202036"/>
+                      <a:srgbClr val="F0F2F7"/>
                     </a:solidFill>
                   </a:tcPr>
                 </a:tc>
@@ -15507,7 +15555,7 @@
                       <a:pPr>
                         <a:defRPr sz="1100" b="0">
                           <a:solidFill>
-                            <a:srgbClr val="B0B0C5"/>
+                            <a:srgbClr val="3D3D56"/>
                           </a:solidFill>
                           <a:latin typeface="Arial"/>
                         </a:defRPr>
@@ -15519,7 +15567,7 @@
                   </a:txBody>
                   <a:tcPr>
                     <a:solidFill>
-                      <a:srgbClr val="202036"/>
+                      <a:srgbClr val="F0F2F7"/>
                     </a:solidFill>
                   </a:tcPr>
                 </a:tc>
@@ -15531,7 +15579,7 @@
                       <a:pPr>
                         <a:defRPr sz="1100" b="0">
                           <a:solidFill>
-                            <a:srgbClr val="B0B0C5"/>
+                            <a:srgbClr val="3D3D56"/>
                           </a:solidFill>
                           <a:latin typeface="Arial"/>
                         </a:defRPr>
@@ -15543,7 +15591,7 @@
                   </a:txBody>
                   <a:tcPr>
                     <a:solidFill>
-                      <a:srgbClr val="202036"/>
+                      <a:srgbClr val="F0F2F7"/>
                     </a:solidFill>
                   </a:tcPr>
                 </a:tc>
@@ -15557,7 +15605,7 @@
                       <a:pPr>
                         <a:defRPr sz="1100" b="0">
                           <a:solidFill>
-                            <a:srgbClr val="B0B0C5"/>
+                            <a:srgbClr val="3D3D56"/>
                           </a:solidFill>
                           <a:latin typeface="Arial"/>
                         </a:defRPr>
@@ -15569,7 +15617,7 @@
                   </a:txBody>
                   <a:tcPr>
                     <a:solidFill>
-                      <a:srgbClr val="25253D"/>
+                      <a:srgbClr val="FFFFFF"/>
                     </a:solidFill>
                   </a:tcPr>
                 </a:tc>
@@ -15581,7 +15629,7 @@
                       <a:pPr>
                         <a:defRPr sz="1100" b="0">
                           <a:solidFill>
-                            <a:srgbClr val="B0B0C5"/>
+                            <a:srgbClr val="3D3D56"/>
                           </a:solidFill>
                           <a:latin typeface="Arial"/>
                         </a:defRPr>
@@ -15593,7 +15641,7 @@
                   </a:txBody>
                   <a:tcPr>
                     <a:solidFill>
-                      <a:srgbClr val="25253D"/>
+                      <a:srgbClr val="FFFFFF"/>
                     </a:solidFill>
                   </a:tcPr>
                 </a:tc>
@@ -15605,7 +15653,7 @@
                       <a:pPr>
                         <a:defRPr sz="1100" b="0">
                           <a:solidFill>
-                            <a:srgbClr val="B0B0C5"/>
+                            <a:srgbClr val="3D3D56"/>
                           </a:solidFill>
                           <a:latin typeface="Arial"/>
                         </a:defRPr>
@@ -15617,7 +15665,7 @@
                   </a:txBody>
                   <a:tcPr>
                     <a:solidFill>
-                      <a:srgbClr val="25253D"/>
+                      <a:srgbClr val="FFFFFF"/>
                     </a:solidFill>
                   </a:tcPr>
                 </a:tc>
@@ -15629,7 +15677,7 @@
                       <a:pPr>
                         <a:defRPr sz="1100" b="0">
                           <a:solidFill>
-                            <a:srgbClr val="B0B0C5"/>
+                            <a:srgbClr val="3D3D56"/>
                           </a:solidFill>
                           <a:latin typeface="Arial"/>
                         </a:defRPr>
@@ -15641,7 +15689,7 @@
                   </a:txBody>
                   <a:tcPr>
                     <a:solidFill>
-                      <a:srgbClr val="25253D"/>
+                      <a:srgbClr val="FFFFFF"/>
                     </a:solidFill>
                   </a:tcPr>
                 </a:tc>
@@ -15655,7 +15703,7 @@
                       <a:pPr>
                         <a:defRPr sz="1100" b="0">
                           <a:solidFill>
-                            <a:srgbClr val="B0B0C5"/>
+                            <a:srgbClr val="3D3D56"/>
                           </a:solidFill>
                           <a:latin typeface="Arial"/>
                         </a:defRPr>
@@ -15667,7 +15715,7 @@
                   </a:txBody>
                   <a:tcPr>
                     <a:solidFill>
-                      <a:srgbClr val="202036"/>
+                      <a:srgbClr val="F0F2F7"/>
                     </a:solidFill>
                   </a:tcPr>
                 </a:tc>
@@ -15679,7 +15727,7 @@
                       <a:pPr>
                         <a:defRPr sz="1100" b="0">
                           <a:solidFill>
-                            <a:srgbClr val="B0B0C5"/>
+                            <a:srgbClr val="3D3D56"/>
                           </a:solidFill>
                           <a:latin typeface="Arial"/>
                         </a:defRPr>
@@ -15691,7 +15739,7 @@
                   </a:txBody>
                   <a:tcPr>
                     <a:solidFill>
-                      <a:srgbClr val="202036"/>
+                      <a:srgbClr val="F0F2F7"/>
                     </a:solidFill>
                   </a:tcPr>
                 </a:tc>
@@ -15703,7 +15751,7 @@
                       <a:pPr>
                         <a:defRPr sz="1100" b="0">
                           <a:solidFill>
-                            <a:srgbClr val="B0B0C5"/>
+                            <a:srgbClr val="3D3D56"/>
                           </a:solidFill>
                           <a:latin typeface="Arial"/>
                         </a:defRPr>
@@ -15715,7 +15763,7 @@
                   </a:txBody>
                   <a:tcPr>
                     <a:solidFill>
-                      <a:srgbClr val="202036"/>
+                      <a:srgbClr val="F0F2F7"/>
                     </a:solidFill>
                   </a:tcPr>
                 </a:tc>
@@ -15727,7 +15775,7 @@
                       <a:pPr>
                         <a:defRPr sz="1100" b="0">
                           <a:solidFill>
-                            <a:srgbClr val="B0B0C5"/>
+                            <a:srgbClr val="3D3D56"/>
                           </a:solidFill>
                           <a:latin typeface="Arial"/>
                         </a:defRPr>
@@ -15739,7 +15787,7 @@
                   </a:txBody>
                   <a:tcPr>
                     <a:solidFill>
-                      <a:srgbClr val="202036"/>
+                      <a:srgbClr val="F0F2F7"/>
                     </a:solidFill>
                   </a:tcPr>
                 </a:tc>
@@ -15763,10 +15811,12 @@
             <a:avLst/>
           </a:prstGeom>
           <a:solidFill>
-            <a:srgbClr val="25253D"/>
+            <a:srgbClr val="F0F2F7"/>
           </a:solidFill>
-          <a:ln>
-            <a:noFill/>
+          <a:ln w="12700">
+            <a:solidFill>
+              <a:srgbClr val="DEE1EB"/>
+            </a:solidFill>
           </a:ln>
         </p:spPr>
         <p:style>
@@ -15819,7 +15869,7 @@
               </a:spcAft>
               <a:defRPr sz="1600" b="1">
                 <a:solidFill>
-                  <a:srgbClr val="FF5A5A"/>
+                  <a:srgbClr val="DC3545"/>
                 </a:solidFill>
                 <a:latin typeface="Arial"/>
               </a:defRPr>
@@ -15835,7 +15885,7 @@
               </a:spcAft>
               <a:defRPr sz="1200" b="0">
                 <a:solidFill>
-                  <a:srgbClr val="80809A"/>
+                  <a:srgbClr val="787896"/>
                 </a:solidFill>
                 <a:latin typeface="Arial"/>
               </a:defRPr>
@@ -15851,7 +15901,7 @@
               </a:spcAft>
               <a:defRPr sz="1200" b="0">
                 <a:solidFill>
-                  <a:srgbClr val="B0B0C5"/>
+                  <a:srgbClr val="3D3D56"/>
                 </a:solidFill>
                 <a:latin typeface="Arial"/>
               </a:defRPr>
@@ -15867,7 +15917,7 @@
               </a:spcAft>
               <a:defRPr sz="1200" b="0">
                 <a:solidFill>
-                  <a:srgbClr val="B0B0C5"/>
+                  <a:srgbClr val="3D3D56"/>
                 </a:solidFill>
                 <a:latin typeface="Arial"/>
               </a:defRPr>
@@ -15883,7 +15933,7 @@
               </a:spcAft>
               <a:defRPr sz="1200" b="0">
                 <a:solidFill>
-                  <a:srgbClr val="FF8C42"/>
+                  <a:srgbClr val="E86A17"/>
                 </a:solidFill>
                 <a:latin typeface="Arial"/>
               </a:defRPr>
@@ -15899,7 +15949,7 @@
               </a:spcAft>
               <a:defRPr sz="1200" b="0">
                 <a:solidFill>
-                  <a:srgbClr val="FF5A5A"/>
+                  <a:srgbClr val="DC3545"/>
                 </a:solidFill>
                 <a:latin typeface="Arial"/>
               </a:defRPr>
@@ -15915,7 +15965,7 @@
               </a:spcAft>
               <a:defRPr sz="1200" b="1">
                 <a:solidFill>
-                  <a:srgbClr val="00D4AA"/>
+                  <a:srgbClr val="009B8D"/>
                 </a:solidFill>
                 <a:latin typeface="Arial"/>
               </a:defRPr>
@@ -15951,7 +16001,7 @@
             <a:pPr algn="r">
               <a:defRPr sz="1000" b="0">
                 <a:solidFill>
-                  <a:srgbClr val="80809A"/>
+                  <a:srgbClr val="787896"/>
                 </a:solidFill>
                 <a:latin typeface="Arial"/>
               </a:defRPr>
@@ -15976,7 +16026,7 @@
     <p:bg>
       <p:bgPr>
         <a:solidFill>
-          <a:srgbClr val="1B1B2F"/>
+          <a:srgbClr val="F5F7FB"/>
         </a:solidFill>
         <a:effectLst/>
       </p:bgPr>
@@ -16003,7 +16053,7 @@
             <a:avLst/>
           </a:prstGeom>
           <a:solidFill>
-            <a:srgbClr val="4E8CFF"/>
+            <a:srgbClr val="2D5BE3"/>
           </a:solidFill>
           <a:ln>
             <a:noFill/>
@@ -16056,7 +16106,7 @@
             <a:pPr algn="l">
               <a:defRPr sz="2000" b="1">
                 <a:solidFill>
-                  <a:srgbClr val="4E8CFF"/>
+                  <a:srgbClr val="2D5BE3"/>
                 </a:solidFill>
                 <a:latin typeface="Arial"/>
               </a:defRPr>
@@ -16092,7 +16142,7 @@
             <a:pPr algn="l">
               <a:defRPr sz="4400" b="1">
                 <a:solidFill>
-                  <a:srgbClr val="F0F0F5"/>
+                  <a:srgbClr val="1A1A2E"/>
                 </a:solidFill>
                 <a:latin typeface="Arial"/>
               </a:defRPr>
@@ -16128,7 +16178,7 @@
             <a:pPr algn="l">
               <a:defRPr sz="1800" b="0">
                 <a:solidFill>
-                  <a:srgbClr val="B0B0C5"/>
+                  <a:srgbClr val="3D3D56"/>
                 </a:solidFill>
                 <a:latin typeface="Arial"/>
               </a:defRPr>
@@ -16154,7 +16204,7 @@
             <a:avLst/>
           </a:prstGeom>
           <a:solidFill>
-            <a:srgbClr val="4E8CFF"/>
+            <a:srgbClr val="2D5BE3"/>
           </a:solidFill>
           <a:ln>
             <a:noFill/>
@@ -16207,7 +16257,7 @@
             <a:pPr algn="r">
               <a:defRPr sz="1000" b="0">
                 <a:solidFill>
-                  <a:srgbClr val="80809A"/>
+                  <a:srgbClr val="787896"/>
                 </a:solidFill>
                 <a:latin typeface="Arial"/>
               </a:defRPr>
@@ -16232,7 +16282,7 @@
     <p:bg>
       <p:bgPr>
         <a:solidFill>
-          <a:srgbClr val="1B1B2F"/>
+          <a:srgbClr val="FAFAFC"/>
         </a:solidFill>
         <a:effectLst/>
       </p:bgPr>
@@ -16259,7 +16309,7 @@
             <a:avLst/>
           </a:prstGeom>
           <a:solidFill>
-            <a:srgbClr val="25253D"/>
+            <a:srgbClr val="FFFFFF"/>
           </a:solidFill>
           <a:ln>
             <a:noFill/>
@@ -16302,7 +16352,7 @@
             <a:avLst/>
           </a:prstGeom>
           <a:solidFill>
-            <a:srgbClr val="4E8CFF"/>
+            <a:srgbClr val="2D5BE3"/>
           </a:solidFill>
           <a:ln>
             <a:noFill/>
@@ -16355,7 +16405,7 @@
             <a:pPr algn="l">
               <a:defRPr sz="2200" b="1">
                 <a:solidFill>
-                  <a:srgbClr val="F0F0F5"/>
+                  <a:srgbClr val="1A1A2E"/>
                 </a:solidFill>
                 <a:latin typeface="Arial"/>
               </a:defRPr>
@@ -16391,7 +16441,7 @@
             <a:pPr algn="r">
               <a:defRPr sz="1200" b="0">
                 <a:solidFill>
-                  <a:srgbClr val="80809A"/>
+                  <a:srgbClr val="787896"/>
                 </a:solidFill>
                 <a:latin typeface="Arial"/>
               </a:defRPr>
@@ -16417,10 +16467,12 @@
             <a:avLst/>
           </a:prstGeom>
           <a:solidFill>
-            <a:srgbClr val="25253D"/>
+            <a:srgbClr val="F0F2F7"/>
           </a:solidFill>
-          <a:ln>
-            <a:noFill/>
+          <a:ln w="12700">
+            <a:solidFill>
+              <a:srgbClr val="DEE1EB"/>
+            </a:solidFill>
           </a:ln>
         </p:spPr>
         <p:style>
@@ -16460,7 +16512,7 @@
             <a:avLst/>
           </a:prstGeom>
           <a:solidFill>
-            <a:srgbClr val="4E8CFF"/>
+            <a:srgbClr val="2D5BE3"/>
           </a:solidFill>
           <a:ln>
             <a:noFill/>
@@ -16513,7 +16565,7 @@
             <a:pPr algn="l">
               <a:defRPr sz="2000" b="1">
                 <a:solidFill>
-                  <a:srgbClr val="4E8CFF"/>
+                  <a:srgbClr val="2D5BE3"/>
                 </a:solidFill>
                 <a:latin typeface="Arial"/>
               </a:defRPr>
@@ -16549,7 +16601,7 @@
             <a:pPr algn="l">
               <a:defRPr sz="1600" b="1">
                 <a:solidFill>
-                  <a:srgbClr val="F0F0F5"/>
+                  <a:srgbClr val="1A1A2E"/>
                 </a:solidFill>
                 <a:latin typeface="Arial"/>
               </a:defRPr>
@@ -16585,7 +16637,7 @@
             <a:pPr algn="l">
               <a:defRPr sz="1100" b="0">
                 <a:solidFill>
-                  <a:srgbClr val="B0B0C5"/>
+                  <a:srgbClr val="3D3D56"/>
                 </a:solidFill>
                 <a:latin typeface="Arial"/>
               </a:defRPr>
@@ -16615,10 +16667,12 @@
             <a:avLst/>
           </a:prstGeom>
           <a:solidFill>
-            <a:srgbClr val="25253D"/>
+            <a:srgbClr val="F0F2F7"/>
           </a:solidFill>
-          <a:ln>
-            <a:noFill/>
+          <a:ln w="12700">
+            <a:solidFill>
+              <a:srgbClr val="DEE1EB"/>
+            </a:solidFill>
           </a:ln>
         </p:spPr>
         <p:style>
@@ -16658,7 +16712,7 @@
             <a:avLst/>
           </a:prstGeom>
           <a:solidFill>
-            <a:srgbClr val="00D4AA"/>
+            <a:srgbClr val="009B8D"/>
           </a:solidFill>
           <a:ln>
             <a:noFill/>
@@ -16711,7 +16765,7 @@
             <a:pPr algn="l">
               <a:defRPr sz="2000" b="1">
                 <a:solidFill>
-                  <a:srgbClr val="00D4AA"/>
+                  <a:srgbClr val="009B8D"/>
                 </a:solidFill>
                 <a:latin typeface="Arial"/>
               </a:defRPr>
@@ -16747,7 +16801,7 @@
             <a:pPr algn="l">
               <a:defRPr sz="1600" b="1">
                 <a:solidFill>
-                  <a:srgbClr val="F0F0F5"/>
+                  <a:srgbClr val="1A1A2E"/>
                 </a:solidFill>
                 <a:latin typeface="Arial"/>
               </a:defRPr>
@@ -16783,7 +16837,7 @@
             <a:pPr algn="l">
               <a:defRPr sz="1100" b="0">
                 <a:solidFill>
-                  <a:srgbClr val="B0B0C5"/>
+                  <a:srgbClr val="3D3D56"/>
                 </a:solidFill>
                 <a:latin typeface="Arial"/>
               </a:defRPr>
@@ -16813,10 +16867,12 @@
             <a:avLst/>
           </a:prstGeom>
           <a:solidFill>
-            <a:srgbClr val="25253D"/>
+            <a:srgbClr val="F0F2F7"/>
           </a:solidFill>
-          <a:ln>
-            <a:noFill/>
+          <a:ln w="12700">
+            <a:solidFill>
+              <a:srgbClr val="DEE1EB"/>
+            </a:solidFill>
           </a:ln>
         </p:spPr>
         <p:style>
@@ -16856,7 +16912,7 @@
             <a:avLst/>
           </a:prstGeom>
           <a:solidFill>
-            <a:srgbClr val="FF8C42"/>
+            <a:srgbClr val="E86A17"/>
           </a:solidFill>
           <a:ln>
             <a:noFill/>
@@ -16909,7 +16965,7 @@
             <a:pPr algn="l">
               <a:defRPr sz="2000" b="1">
                 <a:solidFill>
-                  <a:srgbClr val="FF8C42"/>
+                  <a:srgbClr val="E86A17"/>
                 </a:solidFill>
                 <a:latin typeface="Arial"/>
               </a:defRPr>
@@ -16945,7 +17001,7 @@
             <a:pPr algn="l">
               <a:defRPr sz="1600" b="1">
                 <a:solidFill>
-                  <a:srgbClr val="F0F0F5"/>
+                  <a:srgbClr val="1A1A2E"/>
                 </a:solidFill>
                 <a:latin typeface="Arial"/>
               </a:defRPr>
@@ -16981,7 +17037,7 @@
             <a:pPr algn="l">
               <a:defRPr sz="1100" b="0">
                 <a:solidFill>
-                  <a:srgbClr val="B0B0C5"/>
+                  <a:srgbClr val="3D3D56"/>
                 </a:solidFill>
                 <a:latin typeface="Arial"/>
               </a:defRPr>
@@ -17011,10 +17067,12 @@
             <a:avLst/>
           </a:prstGeom>
           <a:solidFill>
-            <a:srgbClr val="25253D"/>
+            <a:srgbClr val="F0F2F7"/>
           </a:solidFill>
-          <a:ln>
-            <a:noFill/>
+          <a:ln w="12700">
+            <a:solidFill>
+              <a:srgbClr val="DEE1EB"/>
+            </a:solidFill>
           </a:ln>
         </p:spPr>
         <p:style>
@@ -17054,7 +17112,7 @@
             <a:avLst/>
           </a:prstGeom>
           <a:solidFill>
-            <a:srgbClr val="A878FF"/>
+            <a:srgbClr val="7C4DFF"/>
           </a:solidFill>
           <a:ln>
             <a:noFill/>
@@ -17107,7 +17165,7 @@
             <a:pPr algn="l">
               <a:defRPr sz="2000" b="1">
                 <a:solidFill>
-                  <a:srgbClr val="A878FF"/>
+                  <a:srgbClr val="7C4DFF"/>
                 </a:solidFill>
                 <a:latin typeface="Arial"/>
               </a:defRPr>
@@ -17143,7 +17201,7 @@
             <a:pPr algn="l">
               <a:defRPr sz="1600" b="1">
                 <a:solidFill>
-                  <a:srgbClr val="F0F0F5"/>
+                  <a:srgbClr val="1A1A2E"/>
                 </a:solidFill>
                 <a:latin typeface="Arial"/>
               </a:defRPr>
@@ -17179,7 +17237,7 @@
             <a:pPr algn="l">
               <a:defRPr sz="1100" b="0">
                 <a:solidFill>
-                  <a:srgbClr val="B0B0C5"/>
+                  <a:srgbClr val="3D3D56"/>
                 </a:solidFill>
                 <a:latin typeface="Arial"/>
               </a:defRPr>
@@ -17209,10 +17267,12 @@
             <a:avLst/>
           </a:prstGeom>
           <a:solidFill>
-            <a:srgbClr val="25253D"/>
+            <a:srgbClr val="F0F2F7"/>
           </a:solidFill>
-          <a:ln>
-            <a:noFill/>
+          <a:ln w="12700">
+            <a:solidFill>
+              <a:srgbClr val="DEE1EB"/>
+            </a:solidFill>
           </a:ln>
         </p:spPr>
         <p:style>
@@ -17252,7 +17312,7 @@
             <a:avLst/>
           </a:prstGeom>
           <a:solidFill>
-            <a:srgbClr val="FF6B9D"/>
+            <a:srgbClr val="D6336C"/>
           </a:solidFill>
           <a:ln>
             <a:noFill/>
@@ -17305,7 +17365,7 @@
             <a:pPr algn="l">
               <a:defRPr sz="2000" b="1">
                 <a:solidFill>
-                  <a:srgbClr val="FF6B9D"/>
+                  <a:srgbClr val="D6336C"/>
                 </a:solidFill>
                 <a:latin typeface="Arial"/>
               </a:defRPr>
@@ -17341,7 +17401,7 @@
             <a:pPr algn="l">
               <a:defRPr sz="1600" b="1">
                 <a:solidFill>
-                  <a:srgbClr val="F0F0F5"/>
+                  <a:srgbClr val="1A1A2E"/>
                 </a:solidFill>
                 <a:latin typeface="Arial"/>
               </a:defRPr>
@@ -17377,7 +17437,7 @@
             <a:pPr algn="l">
               <a:defRPr sz="1100" b="0">
                 <a:solidFill>
-                  <a:srgbClr val="B0B0C5"/>
+                  <a:srgbClr val="3D3D56"/>
                 </a:solidFill>
                 <a:latin typeface="Arial"/>
               </a:defRPr>
@@ -17417,7 +17477,7 @@
             <a:pPr algn="r">
               <a:defRPr sz="1000" b="0">
                 <a:solidFill>
-                  <a:srgbClr val="80809A"/>
+                  <a:srgbClr val="787896"/>
                 </a:solidFill>
                 <a:latin typeface="Arial"/>
               </a:defRPr>
@@ -17442,7 +17502,7 @@
     <p:bg>
       <p:bgPr>
         <a:solidFill>
-          <a:srgbClr val="1B1B2F"/>
+          <a:srgbClr val="FAFAFC"/>
         </a:solidFill>
         <a:effectLst/>
       </p:bgPr>
@@ -17469,7 +17529,7 @@
             <a:avLst/>
           </a:prstGeom>
           <a:solidFill>
-            <a:srgbClr val="25253D"/>
+            <a:srgbClr val="FFFFFF"/>
           </a:solidFill>
           <a:ln>
             <a:noFill/>
@@ -17512,7 +17572,7 @@
             <a:avLst/>
           </a:prstGeom>
           <a:solidFill>
-            <a:srgbClr val="4E8CFF"/>
+            <a:srgbClr val="2D5BE3"/>
           </a:solidFill>
           <a:ln>
             <a:noFill/>
@@ -17565,7 +17625,7 @@
             <a:pPr algn="l">
               <a:defRPr sz="2200" b="1">
                 <a:solidFill>
-                  <a:srgbClr val="F0F0F5"/>
+                  <a:srgbClr val="1A1A2E"/>
                 </a:solidFill>
                 <a:latin typeface="Arial"/>
               </a:defRPr>
@@ -17601,7 +17661,7 @@
             <a:pPr algn="r">
               <a:defRPr sz="1200" b="0">
                 <a:solidFill>
-                  <a:srgbClr val="80809A"/>
+                  <a:srgbClr val="787896"/>
                 </a:solidFill>
                 <a:latin typeface="Arial"/>
               </a:defRPr>
@@ -17627,10 +17687,12 @@
             <a:avLst/>
           </a:prstGeom>
           <a:solidFill>
-            <a:srgbClr val="25253D"/>
+            <a:srgbClr val="F0F2F7"/>
           </a:solidFill>
-          <a:ln>
-            <a:noFill/>
+          <a:ln w="12700">
+            <a:solidFill>
+              <a:srgbClr val="DEE1EB"/>
+            </a:solidFill>
           </a:ln>
         </p:spPr>
         <p:style>
@@ -17670,7 +17732,7 @@
             <a:avLst/>
           </a:prstGeom>
           <a:solidFill>
-            <a:srgbClr val="4E8CFF"/>
+            <a:srgbClr val="2D5BE3"/>
           </a:solidFill>
           <a:ln>
             <a:noFill/>
@@ -17726,7 +17788,7 @@
               </a:spcAft>
               <a:defRPr sz="1500" b="1">
                 <a:solidFill>
-                  <a:srgbClr val="4E8CFF"/>
+                  <a:srgbClr val="2D5BE3"/>
                 </a:solidFill>
                 <a:latin typeface="Arial"/>
               </a:defRPr>
@@ -17746,7 +17808,7 @@
               </a:spcAft>
               <a:defRPr sz="1100" b="0">
                 <a:solidFill>
-                  <a:srgbClr val="B0B0C5"/>
+                  <a:srgbClr val="3D3D56"/>
                 </a:solidFill>
                 <a:latin typeface="Arial"/>
               </a:defRPr>
@@ -17780,10 +17842,12 @@
             <a:avLst/>
           </a:prstGeom>
           <a:solidFill>
-            <a:srgbClr val="25253D"/>
+            <a:srgbClr val="F0F2F7"/>
           </a:solidFill>
-          <a:ln>
-            <a:noFill/>
+          <a:ln w="12700">
+            <a:solidFill>
+              <a:srgbClr val="DEE1EB"/>
+            </a:solidFill>
           </a:ln>
         </p:spPr>
         <p:style>
@@ -17823,7 +17887,7 @@
             <a:avLst/>
           </a:prstGeom>
           <a:solidFill>
-            <a:srgbClr val="00D4AA"/>
+            <a:srgbClr val="009B8D"/>
           </a:solidFill>
           <a:ln>
             <a:noFill/>
@@ -17879,7 +17943,7 @@
               </a:spcAft>
               <a:defRPr sz="1500" b="1">
                 <a:solidFill>
-                  <a:srgbClr val="00D4AA"/>
+                  <a:srgbClr val="009B8D"/>
                 </a:solidFill>
                 <a:latin typeface="Arial"/>
               </a:defRPr>
@@ -17899,7 +17963,7 @@
               </a:spcAft>
               <a:defRPr sz="1100" b="0">
                 <a:solidFill>
-                  <a:srgbClr val="B0B0C5"/>
+                  <a:srgbClr val="3D3D56"/>
                 </a:solidFill>
                 <a:latin typeface="Arial"/>
               </a:defRPr>
@@ -17937,10 +18001,12 @@
             <a:avLst/>
           </a:prstGeom>
           <a:solidFill>
-            <a:srgbClr val="25253D"/>
+            <a:srgbClr val="F0F2F7"/>
           </a:solidFill>
-          <a:ln>
-            <a:noFill/>
+          <a:ln w="12700">
+            <a:solidFill>
+              <a:srgbClr val="DEE1EB"/>
+            </a:solidFill>
           </a:ln>
         </p:spPr>
         <p:style>
@@ -17980,7 +18046,7 @@
             <a:avLst/>
           </a:prstGeom>
           <a:solidFill>
-            <a:srgbClr val="A878FF"/>
+            <a:srgbClr val="7C4DFF"/>
           </a:solidFill>
           <a:ln>
             <a:noFill/>
@@ -18036,7 +18102,7 @@
               </a:spcAft>
               <a:defRPr sz="1500" b="1">
                 <a:solidFill>
-                  <a:srgbClr val="A878FF"/>
+                  <a:srgbClr val="7C4DFF"/>
                 </a:solidFill>
                 <a:latin typeface="Arial"/>
               </a:defRPr>
@@ -18056,7 +18122,7 @@
               </a:spcAft>
               <a:defRPr sz="1100" b="0">
                 <a:solidFill>
-                  <a:srgbClr val="B0B0C5"/>
+                  <a:srgbClr val="3D3D56"/>
                 </a:solidFill>
                 <a:latin typeface="Arial"/>
               </a:defRPr>
@@ -18094,10 +18160,12 @@
             <a:avLst/>
           </a:prstGeom>
           <a:solidFill>
-            <a:srgbClr val="25253D"/>
+            <a:srgbClr val="F0F2F7"/>
           </a:solidFill>
-          <a:ln>
-            <a:noFill/>
+          <a:ln w="12700">
+            <a:solidFill>
+              <a:srgbClr val="DEE1EB"/>
+            </a:solidFill>
           </a:ln>
         </p:spPr>
         <p:style>
@@ -18137,7 +18205,7 @@
             <a:avLst/>
           </a:prstGeom>
           <a:solidFill>
-            <a:srgbClr val="FF8C42"/>
+            <a:srgbClr val="E86A17"/>
           </a:solidFill>
           <a:ln>
             <a:noFill/>
@@ -18193,7 +18261,7 @@
               </a:spcAft>
               <a:defRPr sz="1500" b="1">
                 <a:solidFill>
-                  <a:srgbClr val="FF8C42"/>
+                  <a:srgbClr val="E86A17"/>
                 </a:solidFill>
                 <a:latin typeface="Arial"/>
               </a:defRPr>
@@ -18213,7 +18281,7 @@
               </a:spcAft>
               <a:defRPr sz="1100" b="0">
                 <a:solidFill>
-                  <a:srgbClr val="B0B0C5"/>
+                  <a:srgbClr val="3D3D56"/>
                 </a:solidFill>
                 <a:latin typeface="Arial"/>
               </a:defRPr>
@@ -18251,10 +18319,12 @@
             <a:avLst/>
           </a:prstGeom>
           <a:solidFill>
-            <a:srgbClr val="25253D"/>
+            <a:srgbClr val="F0F2F7"/>
           </a:solidFill>
-          <a:ln>
-            <a:noFill/>
+          <a:ln w="12700">
+            <a:solidFill>
+              <a:srgbClr val="DEE1EB"/>
+            </a:solidFill>
           </a:ln>
         </p:spPr>
         <p:style>
@@ -18294,7 +18364,7 @@
             <a:avLst/>
           </a:prstGeom>
           <a:solidFill>
-            <a:srgbClr val="FF6B9D"/>
+            <a:srgbClr val="D6336C"/>
           </a:solidFill>
           <a:ln>
             <a:noFill/>
@@ -18350,7 +18420,7 @@
               </a:spcAft>
               <a:defRPr sz="1500" b="1">
                 <a:solidFill>
-                  <a:srgbClr val="FF6B9D"/>
+                  <a:srgbClr val="D6336C"/>
                 </a:solidFill>
                 <a:latin typeface="Arial"/>
               </a:defRPr>
@@ -18370,7 +18440,7 @@
               </a:spcAft>
               <a:defRPr sz="1100" b="0">
                 <a:solidFill>
-                  <a:srgbClr val="B0B0C5"/>
+                  <a:srgbClr val="3D3D56"/>
                 </a:solidFill>
                 <a:latin typeface="Arial"/>
               </a:defRPr>
@@ -18418,7 +18488,7 @@
             <a:pPr algn="l">
               <a:defRPr sz="2000" b="1">
                 <a:solidFill>
-                  <a:srgbClr val="80809A"/>
+                  <a:srgbClr val="2D5BE3"/>
                 </a:solidFill>
                 <a:latin typeface="Arial"/>
               </a:defRPr>
@@ -18454,7 +18524,7 @@
             <a:pPr algn="l">
               <a:defRPr sz="2000" b="1">
                 <a:solidFill>
-                  <a:srgbClr val="80809A"/>
+                  <a:srgbClr val="2D5BE3"/>
                 </a:solidFill>
                 <a:latin typeface="Arial"/>
               </a:defRPr>
@@ -18490,7 +18560,7 @@
             <a:pPr algn="l">
               <a:defRPr sz="2000" b="1">
                 <a:solidFill>
-                  <a:srgbClr val="80809A"/>
+                  <a:srgbClr val="2D5BE3"/>
                 </a:solidFill>
                 <a:latin typeface="Arial"/>
               </a:defRPr>
@@ -18526,7 +18596,7 @@
             <a:pPr algn="l">
               <a:defRPr sz="2000" b="1">
                 <a:solidFill>
-                  <a:srgbClr val="80809A"/>
+                  <a:srgbClr val="2D5BE3"/>
                 </a:solidFill>
                 <a:latin typeface="Arial"/>
               </a:defRPr>
@@ -18552,10 +18622,12 @@
             <a:avLst/>
           </a:prstGeom>
           <a:solidFill>
-            <a:srgbClr val="25253D"/>
+            <a:srgbClr val="F0F2F7"/>
           </a:solidFill>
-          <a:ln>
-            <a:noFill/>
+          <a:ln w="12700">
+            <a:solidFill>
+              <a:srgbClr val="DEE1EB"/>
+            </a:solidFill>
           </a:ln>
         </p:spPr>
         <p:style>
@@ -18608,7 +18680,7 @@
               </a:spcAft>
               <a:defRPr sz="1600" b="1">
                 <a:solidFill>
-                  <a:srgbClr val="4ECB71"/>
+                  <a:srgbClr val="1B9E4B"/>
                 </a:solidFill>
                 <a:latin typeface="Arial"/>
               </a:defRPr>
@@ -18624,7 +18696,7 @@
               </a:spcAft>
               <a:defRPr sz="1300" b="0">
                 <a:solidFill>
-                  <a:srgbClr val="00D4AA"/>
+                  <a:srgbClr val="009B8D"/>
                 </a:solidFill>
                 <a:latin typeface="Arial"/>
               </a:defRPr>
@@ -18640,7 +18712,7 @@
               </a:spcAft>
               <a:defRPr sz="1200" b="0">
                 <a:solidFill>
-                  <a:srgbClr val="B0B0C5"/>
+                  <a:srgbClr val="3D3D56"/>
                 </a:solidFill>
                 <a:latin typeface="Arial"/>
               </a:defRPr>
@@ -18656,7 +18728,7 @@
               </a:spcAft>
               <a:defRPr sz="1200" b="0">
                 <a:solidFill>
-                  <a:srgbClr val="FF8C42"/>
+                  <a:srgbClr val="E86A17"/>
                 </a:solidFill>
                 <a:latin typeface="Arial"/>
               </a:defRPr>
@@ -18692,7 +18764,7 @@
             <a:pPr algn="r">
               <a:defRPr sz="1000" b="0">
                 <a:solidFill>
-                  <a:srgbClr val="80809A"/>
+                  <a:srgbClr val="787896"/>
                 </a:solidFill>
                 <a:latin typeface="Arial"/>
               </a:defRPr>
@@ -18717,7 +18789,7 @@
     <p:bg>
       <p:bgPr>
         <a:solidFill>
-          <a:srgbClr val="1B1B2F"/>
+          <a:srgbClr val="FAFAFC"/>
         </a:solidFill>
         <a:effectLst/>
       </p:bgPr>
@@ -18744,7 +18816,7 @@
             <a:avLst/>
           </a:prstGeom>
           <a:solidFill>
-            <a:srgbClr val="4E8CFF"/>
+            <a:srgbClr val="2D5BE3"/>
           </a:solidFill>
           <a:ln>
             <a:noFill/>
@@ -18787,7 +18859,7 @@
             <a:avLst/>
           </a:prstGeom>
           <a:solidFill>
-            <a:srgbClr val="4E8CFF"/>
+            <a:srgbClr val="2D5BE3"/>
           </a:solidFill>
           <a:ln>
             <a:noFill/>
@@ -18843,7 +18915,7 @@
               </a:spcAft>
               <a:defRPr sz="5200" b="1">
                 <a:solidFill>
-                  <a:srgbClr val="F0F0F5"/>
+                  <a:srgbClr val="2D5BE3"/>
                 </a:solidFill>
                 <a:latin typeface="Arial"/>
               </a:defRPr>
@@ -18859,7 +18931,7 @@
               </a:spcAft>
               <a:defRPr sz="2400" b="0">
                 <a:solidFill>
-                  <a:srgbClr val="00D4AA"/>
+                  <a:srgbClr val="009B8D"/>
                 </a:solidFill>
                 <a:latin typeface="Arial"/>
               </a:defRPr>
@@ -18875,7 +18947,7 @@
               </a:spcAft>
               <a:defRPr sz="1800" b="1">
                 <a:solidFill>
-                  <a:srgbClr val="B0B0C5"/>
+                  <a:srgbClr val="1A1A2E"/>
                 </a:solidFill>
                 <a:latin typeface="Arial"/>
               </a:defRPr>
@@ -18891,7 +18963,7 @@
               </a:spcAft>
               <a:defRPr sz="1500" b="0">
                 <a:solidFill>
-                  <a:srgbClr val="B0B0C5"/>
+                  <a:srgbClr val="3D3D56"/>
                 </a:solidFill>
                 <a:latin typeface="Arial"/>
               </a:defRPr>
@@ -18907,7 +18979,7 @@
               </a:spcAft>
               <a:defRPr sz="1500" b="0">
                 <a:solidFill>
-                  <a:srgbClr val="B0B0C5"/>
+                  <a:srgbClr val="3D3D56"/>
                 </a:solidFill>
                 <a:latin typeface="Arial"/>
               </a:defRPr>
@@ -18923,7 +18995,7 @@
               </a:spcAft>
               <a:defRPr sz="1500" b="0">
                 <a:solidFill>
-                  <a:srgbClr val="B0B0C5"/>
+                  <a:srgbClr val="3D3D56"/>
                 </a:solidFill>
                 <a:latin typeface="Arial"/>
               </a:defRPr>
@@ -18939,7 +19011,7 @@
               </a:spcAft>
               <a:defRPr sz="1500" b="0">
                 <a:solidFill>
-                  <a:srgbClr val="B0B0C5"/>
+                  <a:srgbClr val="3D3D56"/>
                 </a:solidFill>
                 <a:latin typeface="Arial"/>
               </a:defRPr>
@@ -18955,7 +19027,7 @@
               </a:spcAft>
               <a:defRPr sz="1500" b="0">
                 <a:solidFill>
-                  <a:srgbClr val="B0B0C5"/>
+                  <a:srgbClr val="3D3D56"/>
                 </a:solidFill>
                 <a:latin typeface="Arial"/>
               </a:defRPr>
@@ -18981,7 +19053,7 @@
             <a:avLst/>
           </a:prstGeom>
           <a:solidFill>
-            <a:srgbClr val="4E8CFF"/>
+            <a:srgbClr val="2D5BE3"/>
           </a:solidFill>
           <a:ln>
             <a:noFill/>
@@ -19034,7 +19106,7 @@
             <a:pPr algn="r">
               <a:defRPr sz="1000" b="0">
                 <a:solidFill>
-                  <a:srgbClr val="80809A"/>
+                  <a:srgbClr val="787896"/>
                 </a:solidFill>
                 <a:latin typeface="Arial"/>
               </a:defRPr>
@@ -19059,7 +19131,7 @@
     <p:bg>
       <p:bgPr>
         <a:solidFill>
-          <a:srgbClr val="1B1B2F"/>
+          <a:srgbClr val="F5F7FB"/>
         </a:solidFill>
         <a:effectLst/>
       </p:bgPr>
@@ -19086,7 +19158,7 @@
             <a:avLst/>
           </a:prstGeom>
           <a:solidFill>
-            <a:srgbClr val="4E8CFF"/>
+            <a:srgbClr val="2D5BE3"/>
           </a:solidFill>
           <a:ln>
             <a:noFill/>
@@ -19139,7 +19211,7 @@
             <a:pPr algn="l">
               <a:defRPr sz="2000" b="1">
                 <a:solidFill>
-                  <a:srgbClr val="4E8CFF"/>
+                  <a:srgbClr val="2D5BE3"/>
                 </a:solidFill>
                 <a:latin typeface="Arial"/>
               </a:defRPr>
@@ -19175,7 +19247,7 @@
             <a:pPr algn="l">
               <a:defRPr sz="4400" b="1">
                 <a:solidFill>
-                  <a:srgbClr val="F0F0F5"/>
+                  <a:srgbClr val="1A1A2E"/>
                 </a:solidFill>
                 <a:latin typeface="Arial"/>
               </a:defRPr>
@@ -19211,7 +19283,7 @@
             <a:pPr algn="l">
               <a:defRPr sz="1800" b="0">
                 <a:solidFill>
-                  <a:srgbClr val="B0B0C5"/>
+                  <a:srgbClr val="3D3D56"/>
                 </a:solidFill>
                 <a:latin typeface="Arial"/>
               </a:defRPr>
@@ -19237,7 +19309,7 @@
             <a:avLst/>
           </a:prstGeom>
           <a:solidFill>
-            <a:srgbClr val="4E8CFF"/>
+            <a:srgbClr val="2D5BE3"/>
           </a:solidFill>
           <a:ln>
             <a:noFill/>
@@ -19290,7 +19362,7 @@
             <a:pPr algn="r">
               <a:defRPr sz="1000" b="0">
                 <a:solidFill>
-                  <a:srgbClr val="80809A"/>
+                  <a:srgbClr val="787896"/>
                 </a:solidFill>
                 <a:latin typeface="Arial"/>
               </a:defRPr>
@@ -19315,7 +19387,7 @@
     <p:bg>
       <p:bgPr>
         <a:solidFill>
-          <a:srgbClr val="1B1B2F"/>
+          <a:srgbClr val="FAFAFC"/>
         </a:solidFill>
         <a:effectLst/>
       </p:bgPr>
@@ -19342,7 +19414,7 @@
             <a:avLst/>
           </a:prstGeom>
           <a:solidFill>
-            <a:srgbClr val="25253D"/>
+            <a:srgbClr val="FFFFFF"/>
           </a:solidFill>
           <a:ln>
             <a:noFill/>
@@ -19385,7 +19457,7 @@
             <a:avLst/>
           </a:prstGeom>
           <a:solidFill>
-            <a:srgbClr val="4E8CFF"/>
+            <a:srgbClr val="2D5BE3"/>
           </a:solidFill>
           <a:ln>
             <a:noFill/>
@@ -19438,7 +19510,7 @@
             <a:pPr algn="l">
               <a:defRPr sz="2200" b="1">
                 <a:solidFill>
-                  <a:srgbClr val="F0F0F5"/>
+                  <a:srgbClr val="1A1A2E"/>
                 </a:solidFill>
                 <a:latin typeface="Arial"/>
               </a:defRPr>
@@ -19474,7 +19546,7 @@
             <a:pPr algn="r">
               <a:defRPr sz="1200" b="0">
                 <a:solidFill>
-                  <a:srgbClr val="80809A"/>
+                  <a:srgbClr val="787896"/>
                 </a:solidFill>
                 <a:latin typeface="Arial"/>
               </a:defRPr>
@@ -19519,7 +19591,7 @@
                       <a:pPr>
                         <a:defRPr sz="1200" b="1">
                           <a:solidFill>
-                            <a:srgbClr val="F0F0F5"/>
+                            <a:srgbClr val="FFFFFF"/>
                           </a:solidFill>
                           <a:latin typeface="Arial"/>
                         </a:defRPr>
@@ -19531,7 +19603,7 @@
                   </a:txBody>
                   <a:tcPr>
                     <a:solidFill>
-                      <a:srgbClr val="2D3A6D"/>
+                      <a:srgbClr val="2D5BE3"/>
                     </a:solidFill>
                   </a:tcPr>
                 </a:tc>
@@ -19543,7 +19615,7 @@
                       <a:pPr>
                         <a:defRPr sz="1200" b="1">
                           <a:solidFill>
-                            <a:srgbClr val="F0F0F5"/>
+                            <a:srgbClr val="FFFFFF"/>
                           </a:solidFill>
                           <a:latin typeface="Arial"/>
                         </a:defRPr>
@@ -19555,7 +19627,7 @@
                   </a:txBody>
                   <a:tcPr>
                     <a:solidFill>
-                      <a:srgbClr val="2D3A6D"/>
+                      <a:srgbClr val="2D5BE3"/>
                     </a:solidFill>
                   </a:tcPr>
                 </a:tc>
@@ -19567,7 +19639,7 @@
                       <a:pPr>
                         <a:defRPr sz="1200" b="1">
                           <a:solidFill>
-                            <a:srgbClr val="F0F0F5"/>
+                            <a:srgbClr val="FFFFFF"/>
                           </a:solidFill>
                           <a:latin typeface="Arial"/>
                         </a:defRPr>
@@ -19579,7 +19651,7 @@
                   </a:txBody>
                   <a:tcPr>
                     <a:solidFill>
-                      <a:srgbClr val="2D3A6D"/>
+                      <a:srgbClr val="2D5BE3"/>
                     </a:solidFill>
                   </a:tcPr>
                 </a:tc>
@@ -19591,7 +19663,7 @@
                       <a:pPr>
                         <a:defRPr sz="1200" b="1">
                           <a:solidFill>
-                            <a:srgbClr val="F0F0F5"/>
+                            <a:srgbClr val="FFFFFF"/>
                           </a:solidFill>
                           <a:latin typeface="Arial"/>
                         </a:defRPr>
@@ -19603,7 +19675,7 @@
                   </a:txBody>
                   <a:tcPr>
                     <a:solidFill>
-                      <a:srgbClr val="2D3A6D"/>
+                      <a:srgbClr val="2D5BE3"/>
                     </a:solidFill>
                   </a:tcPr>
                 </a:tc>
@@ -19615,7 +19687,7 @@
                       <a:pPr>
                         <a:defRPr sz="1200" b="1">
                           <a:solidFill>
-                            <a:srgbClr val="F0F0F5"/>
+                            <a:srgbClr val="FFFFFF"/>
                           </a:solidFill>
                           <a:latin typeface="Arial"/>
                         </a:defRPr>
@@ -19627,7 +19699,7 @@
                   </a:txBody>
                   <a:tcPr>
                     <a:solidFill>
-                      <a:srgbClr val="2D3A6D"/>
+                      <a:srgbClr val="2D5BE3"/>
                     </a:solidFill>
                   </a:tcPr>
                 </a:tc>
@@ -19641,7 +19713,7 @@
                       <a:pPr>
                         <a:defRPr sz="1100" b="0">
                           <a:solidFill>
-                            <a:srgbClr val="B0B0C5"/>
+                            <a:srgbClr val="3D3D56"/>
                           </a:solidFill>
                           <a:latin typeface="Arial"/>
                         </a:defRPr>
@@ -19653,7 +19725,7 @@
                   </a:txBody>
                   <a:tcPr>
                     <a:solidFill>
-                      <a:srgbClr val="25253D"/>
+                      <a:srgbClr val="FFFFFF"/>
                     </a:solidFill>
                   </a:tcPr>
                 </a:tc>
@@ -19665,7 +19737,7 @@
                       <a:pPr>
                         <a:defRPr sz="1100" b="0">
                           <a:solidFill>
-                            <a:srgbClr val="B0B0C5"/>
+                            <a:srgbClr val="3D3D56"/>
                           </a:solidFill>
                           <a:latin typeface="Arial"/>
                         </a:defRPr>
@@ -19677,7 +19749,7 @@
                   </a:txBody>
                   <a:tcPr>
                     <a:solidFill>
-                      <a:srgbClr val="25253D"/>
+                      <a:srgbClr val="FFFFFF"/>
                     </a:solidFill>
                   </a:tcPr>
                 </a:tc>
@@ -19689,7 +19761,7 @@
                       <a:pPr>
                         <a:defRPr sz="1100" b="0">
                           <a:solidFill>
-                            <a:srgbClr val="B0B0C5"/>
+                            <a:srgbClr val="3D3D56"/>
                           </a:solidFill>
                           <a:latin typeface="Arial"/>
                         </a:defRPr>
@@ -19701,7 +19773,7 @@
                   </a:txBody>
                   <a:tcPr>
                     <a:solidFill>
-                      <a:srgbClr val="25253D"/>
+                      <a:srgbClr val="FFFFFF"/>
                     </a:solidFill>
                   </a:tcPr>
                 </a:tc>
@@ -19713,7 +19785,7 @@
                       <a:pPr>
                         <a:defRPr sz="1100" b="0">
                           <a:solidFill>
-                            <a:srgbClr val="B0B0C5"/>
+                            <a:srgbClr val="3D3D56"/>
                           </a:solidFill>
                           <a:latin typeface="Arial"/>
                         </a:defRPr>
@@ -19725,7 +19797,7 @@
                   </a:txBody>
                   <a:tcPr>
                     <a:solidFill>
-                      <a:srgbClr val="25253D"/>
+                      <a:srgbClr val="FFFFFF"/>
                     </a:solidFill>
                   </a:tcPr>
                 </a:tc>
@@ -19737,7 +19809,7 @@
                       <a:pPr>
                         <a:defRPr sz="1100" b="0">
                           <a:solidFill>
-                            <a:srgbClr val="B0B0C5"/>
+                            <a:srgbClr val="3D3D56"/>
                           </a:solidFill>
                           <a:latin typeface="Arial"/>
                         </a:defRPr>
@@ -19749,7 +19821,7 @@
                   </a:txBody>
                   <a:tcPr>
                     <a:solidFill>
-                      <a:srgbClr val="25253D"/>
+                      <a:srgbClr val="FFFFFF"/>
                     </a:solidFill>
                   </a:tcPr>
                 </a:tc>
@@ -19763,7 +19835,7 @@
                       <a:pPr>
                         <a:defRPr sz="1100" b="0">
                           <a:solidFill>
-                            <a:srgbClr val="B0B0C5"/>
+                            <a:srgbClr val="3D3D56"/>
                           </a:solidFill>
                           <a:latin typeface="Arial"/>
                         </a:defRPr>
@@ -19775,7 +19847,7 @@
                   </a:txBody>
                   <a:tcPr>
                     <a:solidFill>
-                      <a:srgbClr val="202036"/>
+                      <a:srgbClr val="F0F2F7"/>
                     </a:solidFill>
                   </a:tcPr>
                 </a:tc>
@@ -19787,7 +19859,7 @@
                       <a:pPr>
                         <a:defRPr sz="1100" b="0">
                           <a:solidFill>
-                            <a:srgbClr val="B0B0C5"/>
+                            <a:srgbClr val="3D3D56"/>
                           </a:solidFill>
                           <a:latin typeface="Arial"/>
                         </a:defRPr>
@@ -19799,7 +19871,7 @@
                   </a:txBody>
                   <a:tcPr>
                     <a:solidFill>
-                      <a:srgbClr val="202036"/>
+                      <a:srgbClr val="F0F2F7"/>
                     </a:solidFill>
                   </a:tcPr>
                 </a:tc>
@@ -19811,7 +19883,7 @@
                       <a:pPr>
                         <a:defRPr sz="1100" b="0">
                           <a:solidFill>
-                            <a:srgbClr val="B0B0C5"/>
+                            <a:srgbClr val="3D3D56"/>
                           </a:solidFill>
                           <a:latin typeface="Arial"/>
                         </a:defRPr>
@@ -19823,7 +19895,7 @@
                   </a:txBody>
                   <a:tcPr>
                     <a:solidFill>
-                      <a:srgbClr val="202036"/>
+                      <a:srgbClr val="F0F2F7"/>
                     </a:solidFill>
                   </a:tcPr>
                 </a:tc>
@@ -19835,7 +19907,7 @@
                       <a:pPr>
                         <a:defRPr sz="1100" b="0">
                           <a:solidFill>
-                            <a:srgbClr val="B0B0C5"/>
+                            <a:srgbClr val="3D3D56"/>
                           </a:solidFill>
                           <a:latin typeface="Arial"/>
                         </a:defRPr>
@@ -19847,7 +19919,7 @@
                   </a:txBody>
                   <a:tcPr>
                     <a:solidFill>
-                      <a:srgbClr val="202036"/>
+                      <a:srgbClr val="F0F2F7"/>
                     </a:solidFill>
                   </a:tcPr>
                 </a:tc>
@@ -19859,7 +19931,7 @@
                       <a:pPr>
                         <a:defRPr sz="1100" b="0">
                           <a:solidFill>
-                            <a:srgbClr val="B0B0C5"/>
+                            <a:srgbClr val="3D3D56"/>
                           </a:solidFill>
                           <a:latin typeface="Arial"/>
                         </a:defRPr>
@@ -19871,7 +19943,7 @@
                   </a:txBody>
                   <a:tcPr>
                     <a:solidFill>
-                      <a:srgbClr val="202036"/>
+                      <a:srgbClr val="F0F2F7"/>
                     </a:solidFill>
                   </a:tcPr>
                 </a:tc>
@@ -19885,7 +19957,7 @@
                       <a:pPr>
                         <a:defRPr sz="1100" b="0">
                           <a:solidFill>
-                            <a:srgbClr val="B0B0C5"/>
+                            <a:srgbClr val="3D3D56"/>
                           </a:solidFill>
                           <a:latin typeface="Arial"/>
                         </a:defRPr>
@@ -19897,7 +19969,7 @@
                   </a:txBody>
                   <a:tcPr>
                     <a:solidFill>
-                      <a:srgbClr val="25253D"/>
+                      <a:srgbClr val="FFFFFF"/>
                     </a:solidFill>
                   </a:tcPr>
                 </a:tc>
@@ -19909,7 +19981,7 @@
                       <a:pPr>
                         <a:defRPr sz="1100" b="0">
                           <a:solidFill>
-                            <a:srgbClr val="B0B0C5"/>
+                            <a:srgbClr val="3D3D56"/>
                           </a:solidFill>
                           <a:latin typeface="Arial"/>
                         </a:defRPr>
@@ -19921,7 +19993,7 @@
                   </a:txBody>
                   <a:tcPr>
                     <a:solidFill>
-                      <a:srgbClr val="25253D"/>
+                      <a:srgbClr val="FFFFFF"/>
                     </a:solidFill>
                   </a:tcPr>
                 </a:tc>
@@ -19933,7 +20005,7 @@
                       <a:pPr>
                         <a:defRPr sz="1100" b="0">
                           <a:solidFill>
-                            <a:srgbClr val="B0B0C5"/>
+                            <a:srgbClr val="3D3D56"/>
                           </a:solidFill>
                           <a:latin typeface="Arial"/>
                         </a:defRPr>
@@ -19945,7 +20017,7 @@
                   </a:txBody>
                   <a:tcPr>
                     <a:solidFill>
-                      <a:srgbClr val="25253D"/>
+                      <a:srgbClr val="FFFFFF"/>
                     </a:solidFill>
                   </a:tcPr>
                 </a:tc>
@@ -19957,7 +20029,7 @@
                       <a:pPr>
                         <a:defRPr sz="1100" b="0">
                           <a:solidFill>
-                            <a:srgbClr val="B0B0C5"/>
+                            <a:srgbClr val="3D3D56"/>
                           </a:solidFill>
                           <a:latin typeface="Arial"/>
                         </a:defRPr>
@@ -19969,7 +20041,7 @@
                   </a:txBody>
                   <a:tcPr>
                     <a:solidFill>
-                      <a:srgbClr val="25253D"/>
+                      <a:srgbClr val="FFFFFF"/>
                     </a:solidFill>
                   </a:tcPr>
                 </a:tc>
@@ -19981,7 +20053,7 @@
                       <a:pPr>
                         <a:defRPr sz="1100" b="0">
                           <a:solidFill>
-                            <a:srgbClr val="B0B0C5"/>
+                            <a:srgbClr val="3D3D56"/>
                           </a:solidFill>
                           <a:latin typeface="Arial"/>
                         </a:defRPr>
@@ -19993,7 +20065,7 @@
                   </a:txBody>
                   <a:tcPr>
                     <a:solidFill>
-                      <a:srgbClr val="25253D"/>
+                      <a:srgbClr val="FFFFFF"/>
                     </a:solidFill>
                   </a:tcPr>
                 </a:tc>
@@ -20007,7 +20079,7 @@
                       <a:pPr>
                         <a:defRPr sz="1100" b="0">
                           <a:solidFill>
-                            <a:srgbClr val="B0B0C5"/>
+                            <a:srgbClr val="3D3D56"/>
                           </a:solidFill>
                           <a:latin typeface="Arial"/>
                         </a:defRPr>
@@ -20019,7 +20091,7 @@
                   </a:txBody>
                   <a:tcPr>
                     <a:solidFill>
-                      <a:srgbClr val="202036"/>
+                      <a:srgbClr val="F0F2F7"/>
                     </a:solidFill>
                   </a:tcPr>
                 </a:tc>
@@ -20031,7 +20103,7 @@
                       <a:pPr>
                         <a:defRPr sz="1100" b="0">
                           <a:solidFill>
-                            <a:srgbClr val="B0B0C5"/>
+                            <a:srgbClr val="3D3D56"/>
                           </a:solidFill>
                           <a:latin typeface="Arial"/>
                         </a:defRPr>
@@ -20043,7 +20115,7 @@
                   </a:txBody>
                   <a:tcPr>
                     <a:solidFill>
-                      <a:srgbClr val="202036"/>
+                      <a:srgbClr val="F0F2F7"/>
                     </a:solidFill>
                   </a:tcPr>
                 </a:tc>
@@ -20055,7 +20127,7 @@
                       <a:pPr>
                         <a:defRPr sz="1100" b="0">
                           <a:solidFill>
-                            <a:srgbClr val="B0B0C5"/>
+                            <a:srgbClr val="3D3D56"/>
                           </a:solidFill>
                           <a:latin typeface="Arial"/>
                         </a:defRPr>
@@ -20067,7 +20139,7 @@
                   </a:txBody>
                   <a:tcPr>
                     <a:solidFill>
-                      <a:srgbClr val="202036"/>
+                      <a:srgbClr val="F0F2F7"/>
                     </a:solidFill>
                   </a:tcPr>
                 </a:tc>
@@ -20079,7 +20151,7 @@
                       <a:pPr>
                         <a:defRPr sz="1100" b="0">
                           <a:solidFill>
-                            <a:srgbClr val="B0B0C5"/>
+                            <a:srgbClr val="3D3D56"/>
                           </a:solidFill>
                           <a:latin typeface="Arial"/>
                         </a:defRPr>
@@ -20091,7 +20163,7 @@
                   </a:txBody>
                   <a:tcPr>
                     <a:solidFill>
-                      <a:srgbClr val="202036"/>
+                      <a:srgbClr val="F0F2F7"/>
                     </a:solidFill>
                   </a:tcPr>
                 </a:tc>
@@ -20103,7 +20175,7 @@
                       <a:pPr>
                         <a:defRPr sz="1100" b="0">
                           <a:solidFill>
-                            <a:srgbClr val="B0B0C5"/>
+                            <a:srgbClr val="3D3D56"/>
                           </a:solidFill>
                           <a:latin typeface="Arial"/>
                         </a:defRPr>
@@ -20115,7 +20187,7 @@
                   </a:txBody>
                   <a:tcPr>
                     <a:solidFill>
-                      <a:srgbClr val="202036"/>
+                      <a:srgbClr val="F0F2F7"/>
                     </a:solidFill>
                   </a:tcPr>
                 </a:tc>
@@ -20129,7 +20201,7 @@
                       <a:pPr>
                         <a:defRPr sz="1100" b="0">
                           <a:solidFill>
-                            <a:srgbClr val="B0B0C5"/>
+                            <a:srgbClr val="3D3D56"/>
                           </a:solidFill>
                           <a:latin typeface="Arial"/>
                         </a:defRPr>
@@ -20141,7 +20213,7 @@
                   </a:txBody>
                   <a:tcPr>
                     <a:solidFill>
-                      <a:srgbClr val="25253D"/>
+                      <a:srgbClr val="FFFFFF"/>
                     </a:solidFill>
                   </a:tcPr>
                 </a:tc>
@@ -20153,7 +20225,7 @@
                       <a:pPr>
                         <a:defRPr sz="1100" b="0">
                           <a:solidFill>
-                            <a:srgbClr val="B0B0C5"/>
+                            <a:srgbClr val="3D3D56"/>
                           </a:solidFill>
                           <a:latin typeface="Arial"/>
                         </a:defRPr>
@@ -20165,7 +20237,7 @@
                   </a:txBody>
                   <a:tcPr>
                     <a:solidFill>
-                      <a:srgbClr val="25253D"/>
+                      <a:srgbClr val="FFFFFF"/>
                     </a:solidFill>
                   </a:tcPr>
                 </a:tc>
@@ -20177,7 +20249,7 @@
                       <a:pPr>
                         <a:defRPr sz="1100" b="0">
                           <a:solidFill>
-                            <a:srgbClr val="B0B0C5"/>
+                            <a:srgbClr val="3D3D56"/>
                           </a:solidFill>
                           <a:latin typeface="Arial"/>
                         </a:defRPr>
@@ -20189,7 +20261,7 @@
                   </a:txBody>
                   <a:tcPr>
                     <a:solidFill>
-                      <a:srgbClr val="25253D"/>
+                      <a:srgbClr val="FFFFFF"/>
                     </a:solidFill>
                   </a:tcPr>
                 </a:tc>
@@ -20201,7 +20273,7 @@
                       <a:pPr>
                         <a:defRPr sz="1100" b="0">
                           <a:solidFill>
-                            <a:srgbClr val="B0B0C5"/>
+                            <a:srgbClr val="3D3D56"/>
                           </a:solidFill>
                           <a:latin typeface="Arial"/>
                         </a:defRPr>
@@ -20213,7 +20285,7 @@
                   </a:txBody>
                   <a:tcPr>
                     <a:solidFill>
-                      <a:srgbClr val="25253D"/>
+                      <a:srgbClr val="FFFFFF"/>
                     </a:solidFill>
                   </a:tcPr>
                 </a:tc>
@@ -20225,7 +20297,7 @@
                       <a:pPr>
                         <a:defRPr sz="1100" b="0">
                           <a:solidFill>
-                            <a:srgbClr val="B0B0C5"/>
+                            <a:srgbClr val="3D3D56"/>
                           </a:solidFill>
                           <a:latin typeface="Arial"/>
                         </a:defRPr>
@@ -20237,7 +20309,7 @@
                   </a:txBody>
                   <a:tcPr>
                     <a:solidFill>
-                      <a:srgbClr val="25253D"/>
+                      <a:srgbClr val="FFFFFF"/>
                     </a:solidFill>
                   </a:tcPr>
                 </a:tc>
@@ -20251,7 +20323,7 @@
                       <a:pPr>
                         <a:defRPr sz="1100" b="0">
                           <a:solidFill>
-                            <a:srgbClr val="B0B0C5"/>
+                            <a:srgbClr val="3D3D56"/>
                           </a:solidFill>
                           <a:latin typeface="Arial"/>
                         </a:defRPr>
@@ -20263,7 +20335,7 @@
                   </a:txBody>
                   <a:tcPr>
                     <a:solidFill>
-                      <a:srgbClr val="202036"/>
+                      <a:srgbClr val="F0F2F7"/>
                     </a:solidFill>
                   </a:tcPr>
                 </a:tc>
@@ -20275,7 +20347,7 @@
                       <a:pPr>
                         <a:defRPr sz="1100" b="0">
                           <a:solidFill>
-                            <a:srgbClr val="B0B0C5"/>
+                            <a:srgbClr val="3D3D56"/>
                           </a:solidFill>
                           <a:latin typeface="Arial"/>
                         </a:defRPr>
@@ -20287,7 +20359,7 @@
                   </a:txBody>
                   <a:tcPr>
                     <a:solidFill>
-                      <a:srgbClr val="202036"/>
+                      <a:srgbClr val="F0F2F7"/>
                     </a:solidFill>
                   </a:tcPr>
                 </a:tc>
@@ -20299,7 +20371,7 @@
                       <a:pPr>
                         <a:defRPr sz="1100" b="0">
                           <a:solidFill>
-                            <a:srgbClr val="B0B0C5"/>
+                            <a:srgbClr val="3D3D56"/>
                           </a:solidFill>
                           <a:latin typeface="Arial"/>
                         </a:defRPr>
@@ -20311,7 +20383,7 @@
                   </a:txBody>
                   <a:tcPr>
                     <a:solidFill>
-                      <a:srgbClr val="202036"/>
+                      <a:srgbClr val="F0F2F7"/>
                     </a:solidFill>
                   </a:tcPr>
                 </a:tc>
@@ -20323,7 +20395,7 @@
                       <a:pPr>
                         <a:defRPr sz="1100" b="0">
                           <a:solidFill>
-                            <a:srgbClr val="B0B0C5"/>
+                            <a:srgbClr val="3D3D56"/>
                           </a:solidFill>
                           <a:latin typeface="Arial"/>
                         </a:defRPr>
@@ -20335,7 +20407,7 @@
                   </a:txBody>
                   <a:tcPr>
                     <a:solidFill>
-                      <a:srgbClr val="202036"/>
+                      <a:srgbClr val="F0F2F7"/>
                     </a:solidFill>
                   </a:tcPr>
                 </a:tc>
@@ -20347,7 +20419,7 @@
                       <a:pPr>
                         <a:defRPr sz="1100" b="0">
                           <a:solidFill>
-                            <a:srgbClr val="B0B0C5"/>
+                            <a:srgbClr val="3D3D56"/>
                           </a:solidFill>
                           <a:latin typeface="Arial"/>
                         </a:defRPr>
@@ -20359,7 +20431,7 @@
                   </a:txBody>
                   <a:tcPr>
                     <a:solidFill>
-                      <a:srgbClr val="202036"/>
+                      <a:srgbClr val="F0F2F7"/>
                     </a:solidFill>
                   </a:tcPr>
                 </a:tc>
@@ -20373,7 +20445,7 @@
                       <a:pPr>
                         <a:defRPr sz="1100" b="0">
                           <a:solidFill>
-                            <a:srgbClr val="B0B0C5"/>
+                            <a:srgbClr val="3D3D56"/>
                           </a:solidFill>
                           <a:latin typeface="Arial"/>
                         </a:defRPr>
@@ -20385,7 +20457,7 @@
                   </a:txBody>
                   <a:tcPr>
                     <a:solidFill>
-                      <a:srgbClr val="25253D"/>
+                      <a:srgbClr val="FFFFFF"/>
                     </a:solidFill>
                   </a:tcPr>
                 </a:tc>
@@ -20397,7 +20469,7 @@
                       <a:pPr>
                         <a:defRPr sz="1100" b="0">
                           <a:solidFill>
-                            <a:srgbClr val="B0B0C5"/>
+                            <a:srgbClr val="3D3D56"/>
                           </a:solidFill>
                           <a:latin typeface="Arial"/>
                         </a:defRPr>
@@ -20409,7 +20481,7 @@
                   </a:txBody>
                   <a:tcPr>
                     <a:solidFill>
-                      <a:srgbClr val="25253D"/>
+                      <a:srgbClr val="FFFFFF"/>
                     </a:solidFill>
                   </a:tcPr>
                 </a:tc>
@@ -20421,7 +20493,7 @@
                       <a:pPr>
                         <a:defRPr sz="1100" b="0">
                           <a:solidFill>
-                            <a:srgbClr val="B0B0C5"/>
+                            <a:srgbClr val="3D3D56"/>
                           </a:solidFill>
                           <a:latin typeface="Arial"/>
                         </a:defRPr>
@@ -20433,7 +20505,7 @@
                   </a:txBody>
                   <a:tcPr>
                     <a:solidFill>
-                      <a:srgbClr val="25253D"/>
+                      <a:srgbClr val="FFFFFF"/>
                     </a:solidFill>
                   </a:tcPr>
                 </a:tc>
@@ -20445,7 +20517,7 @@
                       <a:pPr>
                         <a:defRPr sz="1100" b="0">
                           <a:solidFill>
-                            <a:srgbClr val="B0B0C5"/>
+                            <a:srgbClr val="3D3D56"/>
                           </a:solidFill>
                           <a:latin typeface="Arial"/>
                         </a:defRPr>
@@ -20457,7 +20529,7 @@
                   </a:txBody>
                   <a:tcPr>
                     <a:solidFill>
-                      <a:srgbClr val="25253D"/>
+                      <a:srgbClr val="FFFFFF"/>
                     </a:solidFill>
                   </a:tcPr>
                 </a:tc>
@@ -20469,7 +20541,7 @@
                       <a:pPr>
                         <a:defRPr sz="1100" b="0">
                           <a:solidFill>
-                            <a:srgbClr val="B0B0C5"/>
+                            <a:srgbClr val="3D3D56"/>
                           </a:solidFill>
                           <a:latin typeface="Arial"/>
                         </a:defRPr>
@@ -20481,7 +20553,7 @@
                   </a:txBody>
                   <a:tcPr>
                     <a:solidFill>
-                      <a:srgbClr val="25253D"/>
+                      <a:srgbClr val="FFFFFF"/>
                     </a:solidFill>
                   </a:tcPr>
                 </a:tc>
@@ -20515,7 +20587,7 @@
             <a:pPr algn="l">
               <a:defRPr sz="1300" b="1">
                 <a:solidFill>
-                  <a:srgbClr val="00D4AA"/>
+                  <a:srgbClr val="009B8D"/>
                 </a:solidFill>
                 <a:latin typeface="Arial"/>
               </a:defRPr>
@@ -20551,7 +20623,7 @@
             <a:pPr algn="r">
               <a:defRPr sz="1000" b="0">
                 <a:solidFill>
-                  <a:srgbClr val="80809A"/>
+                  <a:srgbClr val="787896"/>
                 </a:solidFill>
                 <a:latin typeface="Arial"/>
               </a:defRPr>
@@ -20576,7 +20648,7 @@
     <p:bg>
       <p:bgPr>
         <a:solidFill>
-          <a:srgbClr val="1B1B2F"/>
+          <a:srgbClr val="FAFAFC"/>
         </a:solidFill>
         <a:effectLst/>
       </p:bgPr>
@@ -20603,7 +20675,7 @@
             <a:avLst/>
           </a:prstGeom>
           <a:solidFill>
-            <a:srgbClr val="25253D"/>
+            <a:srgbClr val="FFFFFF"/>
           </a:solidFill>
           <a:ln>
             <a:noFill/>
@@ -20646,7 +20718,7 @@
             <a:avLst/>
           </a:prstGeom>
           <a:solidFill>
-            <a:srgbClr val="4E8CFF"/>
+            <a:srgbClr val="2D5BE3"/>
           </a:solidFill>
           <a:ln>
             <a:noFill/>
@@ -20699,7 +20771,7 @@
             <a:pPr algn="l">
               <a:defRPr sz="2200" b="1">
                 <a:solidFill>
-                  <a:srgbClr val="F0F0F5"/>
+                  <a:srgbClr val="1A1A2E"/>
                 </a:solidFill>
                 <a:latin typeface="Arial"/>
               </a:defRPr>
@@ -20735,7 +20807,7 @@
             <a:pPr algn="r">
               <a:defRPr sz="1200" b="0">
                 <a:solidFill>
-                  <a:srgbClr val="80809A"/>
+                  <a:srgbClr val="787896"/>
                 </a:solidFill>
                 <a:latin typeface="Arial"/>
               </a:defRPr>
@@ -20761,10 +20833,12 @@
             <a:avLst/>
           </a:prstGeom>
           <a:solidFill>
-            <a:srgbClr val="25253D"/>
+            <a:srgbClr val="F0F2F7"/>
           </a:solidFill>
-          <a:ln>
-            <a:noFill/>
+          <a:ln w="12700">
+            <a:solidFill>
+              <a:srgbClr val="DEE1EB"/>
+            </a:solidFill>
           </a:ln>
         </p:spPr>
         <p:style>
@@ -20804,7 +20878,7 @@
             <a:avLst/>
           </a:prstGeom>
           <a:solidFill>
-            <a:srgbClr val="4E8CFF"/>
+            <a:srgbClr val="2D5BE3"/>
           </a:solidFill>
           <a:ln>
             <a:noFill/>
@@ -20860,7 +20934,7 @@
               </a:spcAft>
               <a:defRPr sz="2000" b="1">
                 <a:solidFill>
-                  <a:srgbClr val="4E8CFF"/>
+                  <a:srgbClr val="2D5BE3"/>
                 </a:solidFill>
                 <a:latin typeface="Arial"/>
               </a:defRPr>
@@ -20876,7 +20950,7 @@
               </a:spcAft>
               <a:defRPr sz="1300" b="0">
                 <a:solidFill>
-                  <a:srgbClr val="B0B0C5"/>
+                  <a:srgbClr val="3D3D56"/>
                 </a:solidFill>
                 <a:latin typeface="Arial"/>
               </a:defRPr>
@@ -20906,10 +20980,12 @@
             <a:avLst/>
           </a:prstGeom>
           <a:solidFill>
-            <a:srgbClr val="25253D"/>
+            <a:srgbClr val="F0F2F7"/>
           </a:solidFill>
-          <a:ln>
-            <a:noFill/>
+          <a:ln w="12700">
+            <a:solidFill>
+              <a:srgbClr val="DEE1EB"/>
+            </a:solidFill>
           </a:ln>
         </p:spPr>
         <p:style>
@@ -20949,7 +21025,7 @@
             <a:avLst/>
           </a:prstGeom>
           <a:solidFill>
-            <a:srgbClr val="00D4AA"/>
+            <a:srgbClr val="009B8D"/>
           </a:solidFill>
           <a:ln>
             <a:noFill/>
@@ -21005,7 +21081,7 @@
               </a:spcAft>
               <a:defRPr sz="2000" b="1">
                 <a:solidFill>
-                  <a:srgbClr val="00D4AA"/>
+                  <a:srgbClr val="009B8D"/>
                 </a:solidFill>
                 <a:latin typeface="Arial"/>
               </a:defRPr>
@@ -21021,7 +21097,7 @@
               </a:spcAft>
               <a:defRPr sz="1300" b="0">
                 <a:solidFill>
-                  <a:srgbClr val="B0B0C5"/>
+                  <a:srgbClr val="3D3D56"/>
                 </a:solidFill>
                 <a:latin typeface="Arial"/>
               </a:defRPr>
@@ -21051,10 +21127,12 @@
             <a:avLst/>
           </a:prstGeom>
           <a:solidFill>
-            <a:srgbClr val="25253D"/>
+            <a:srgbClr val="F0F2F7"/>
           </a:solidFill>
-          <a:ln>
-            <a:noFill/>
+          <a:ln w="12700">
+            <a:solidFill>
+              <a:srgbClr val="DEE1EB"/>
+            </a:solidFill>
           </a:ln>
         </p:spPr>
         <p:style>
@@ -21094,7 +21172,7 @@
             <a:avLst/>
           </a:prstGeom>
           <a:solidFill>
-            <a:srgbClr val="FF8C42"/>
+            <a:srgbClr val="E86A17"/>
           </a:solidFill>
           <a:ln>
             <a:noFill/>
@@ -21150,7 +21228,7 @@
               </a:spcAft>
               <a:defRPr sz="2000" b="1">
                 <a:solidFill>
-                  <a:srgbClr val="FF8C42"/>
+                  <a:srgbClr val="E86A17"/>
                 </a:solidFill>
                 <a:latin typeface="Arial"/>
               </a:defRPr>
@@ -21166,7 +21244,7 @@
               </a:spcAft>
               <a:defRPr sz="1300" b="0">
                 <a:solidFill>
-                  <a:srgbClr val="B0B0C5"/>
+                  <a:srgbClr val="3D3D56"/>
                 </a:solidFill>
                 <a:latin typeface="Arial"/>
               </a:defRPr>
@@ -21196,10 +21274,12 @@
             <a:avLst/>
           </a:prstGeom>
           <a:solidFill>
-            <a:srgbClr val="25253D"/>
+            <a:srgbClr val="F0F2F7"/>
           </a:solidFill>
-          <a:ln>
-            <a:noFill/>
+          <a:ln w="12700">
+            <a:solidFill>
+              <a:srgbClr val="DEE1EB"/>
+            </a:solidFill>
           </a:ln>
         </p:spPr>
         <p:style>
@@ -21239,7 +21319,7 @@
             <a:avLst/>
           </a:prstGeom>
           <a:solidFill>
-            <a:srgbClr val="A878FF"/>
+            <a:srgbClr val="7C4DFF"/>
           </a:solidFill>
           <a:ln>
             <a:noFill/>
@@ -21295,7 +21375,7 @@
               </a:spcAft>
               <a:defRPr sz="2000" b="1">
                 <a:solidFill>
-                  <a:srgbClr val="A878FF"/>
+                  <a:srgbClr val="7C4DFF"/>
                 </a:solidFill>
                 <a:latin typeface="Arial"/>
               </a:defRPr>
@@ -21311,7 +21391,7 @@
               </a:spcAft>
               <a:defRPr sz="1300" b="0">
                 <a:solidFill>
-                  <a:srgbClr val="B0B0C5"/>
+                  <a:srgbClr val="3D3D56"/>
                 </a:solidFill>
                 <a:latin typeface="Arial"/>
               </a:defRPr>
@@ -21351,7 +21431,7 @@
             <a:pPr algn="l">
               <a:defRPr sz="1400" b="1">
                 <a:solidFill>
-                  <a:srgbClr val="FF8C42"/>
+                  <a:srgbClr val="E86A17"/>
                 </a:solidFill>
                 <a:latin typeface="Arial"/>
               </a:defRPr>
@@ -21387,7 +21467,7 @@
             <a:pPr algn="r">
               <a:defRPr sz="1000" b="0">
                 <a:solidFill>
-                  <a:srgbClr val="80809A"/>
+                  <a:srgbClr val="787896"/>
                 </a:solidFill>
                 <a:latin typeface="Arial"/>
               </a:defRPr>
@@ -21412,7 +21492,7 @@
     <p:bg>
       <p:bgPr>
         <a:solidFill>
-          <a:srgbClr val="1B1B2F"/>
+          <a:srgbClr val="F5F7FB"/>
         </a:solidFill>
         <a:effectLst/>
       </p:bgPr>
@@ -21439,7 +21519,7 @@
             <a:avLst/>
           </a:prstGeom>
           <a:solidFill>
-            <a:srgbClr val="4E8CFF"/>
+            <a:srgbClr val="2D5BE3"/>
           </a:solidFill>
           <a:ln>
             <a:noFill/>
@@ -21492,7 +21572,7 @@
             <a:pPr algn="l">
               <a:defRPr sz="2000" b="1">
                 <a:solidFill>
-                  <a:srgbClr val="4E8CFF"/>
+                  <a:srgbClr val="2D5BE3"/>
                 </a:solidFill>
                 <a:latin typeface="Arial"/>
               </a:defRPr>
@@ -21528,7 +21608,7 @@
             <a:pPr algn="l">
               <a:defRPr sz="4400" b="1">
                 <a:solidFill>
-                  <a:srgbClr val="F0F0F5"/>
+                  <a:srgbClr val="1A1A2E"/>
                 </a:solidFill>
                 <a:latin typeface="Arial"/>
               </a:defRPr>
@@ -21564,7 +21644,7 @@
             <a:pPr algn="l">
               <a:defRPr sz="1800" b="0">
                 <a:solidFill>
-                  <a:srgbClr val="B0B0C5"/>
+                  <a:srgbClr val="3D3D56"/>
                 </a:solidFill>
                 <a:latin typeface="Arial"/>
               </a:defRPr>
@@ -21590,7 +21670,7 @@
             <a:avLst/>
           </a:prstGeom>
           <a:solidFill>
-            <a:srgbClr val="4E8CFF"/>
+            <a:srgbClr val="2D5BE3"/>
           </a:solidFill>
           <a:ln>
             <a:noFill/>
@@ -21643,7 +21723,7 @@
             <a:pPr algn="r">
               <a:defRPr sz="1000" b="0">
                 <a:solidFill>
-                  <a:srgbClr val="80809A"/>
+                  <a:srgbClr val="787896"/>
                 </a:solidFill>
                 <a:latin typeface="Arial"/>
               </a:defRPr>
@@ -21668,7 +21748,7 @@
     <p:bg>
       <p:bgPr>
         <a:solidFill>
-          <a:srgbClr val="1B1B2F"/>
+          <a:srgbClr val="FAFAFC"/>
         </a:solidFill>
         <a:effectLst/>
       </p:bgPr>
@@ -21695,7 +21775,7 @@
             <a:avLst/>
           </a:prstGeom>
           <a:solidFill>
-            <a:srgbClr val="25253D"/>
+            <a:srgbClr val="FFFFFF"/>
           </a:solidFill>
           <a:ln>
             <a:noFill/>
@@ -21738,7 +21818,7 @@
             <a:avLst/>
           </a:prstGeom>
           <a:solidFill>
-            <a:srgbClr val="4E8CFF"/>
+            <a:srgbClr val="2D5BE3"/>
           </a:solidFill>
           <a:ln>
             <a:noFill/>
@@ -21791,7 +21871,7 @@
             <a:pPr algn="l">
               <a:defRPr sz="2200" b="1">
                 <a:solidFill>
-                  <a:srgbClr val="F0F0F5"/>
+                  <a:srgbClr val="1A1A2E"/>
                 </a:solidFill>
                 <a:latin typeface="Arial"/>
               </a:defRPr>
@@ -21827,7 +21907,7 @@
             <a:pPr algn="r">
               <a:defRPr sz="1200" b="0">
                 <a:solidFill>
-                  <a:srgbClr val="80809A"/>
+                  <a:srgbClr val="787896"/>
                 </a:solidFill>
                 <a:latin typeface="Arial"/>
               </a:defRPr>
@@ -21853,10 +21933,12 @@
             <a:avLst/>
           </a:prstGeom>
           <a:solidFill>
-            <a:srgbClr val="25253D"/>
+            <a:srgbClr val="F0F2F7"/>
           </a:solidFill>
-          <a:ln>
-            <a:noFill/>
+          <a:ln w="12700">
+            <a:solidFill>
+              <a:srgbClr val="DEE1EB"/>
+            </a:solidFill>
           </a:ln>
         </p:spPr>
         <p:style>
@@ -21909,7 +21991,7 @@
               </a:spcAft>
               <a:defRPr sz="1600" b="1">
                 <a:solidFill>
-                  <a:srgbClr val="4E8CFF"/>
+                  <a:srgbClr val="2D5BE3"/>
                 </a:solidFill>
                 <a:latin typeface="Arial"/>
               </a:defRPr>
@@ -21925,7 +22007,7 @@
               </a:spcAft>
               <a:defRPr sz="1200" b="0">
                 <a:solidFill>
-                  <a:srgbClr val="B0B0C5"/>
+                  <a:srgbClr val="3D3D56"/>
                 </a:solidFill>
                 <a:latin typeface="Arial"/>
               </a:defRPr>
@@ -21941,7 +22023,7 @@
               </a:spcAft>
               <a:defRPr sz="1200" b="0">
                 <a:solidFill>
-                  <a:srgbClr val="B0B0C5"/>
+                  <a:srgbClr val="3D3D56"/>
                 </a:solidFill>
                 <a:latin typeface="Arial"/>
               </a:defRPr>
@@ -21957,7 +22039,7 @@
               </a:spcAft>
               <a:defRPr sz="1100" b="0">
                 <a:solidFill>
-                  <a:srgbClr val="00D4AA"/>
+                  <a:srgbClr val="009B8D"/>
                 </a:solidFill>
                 <a:latin typeface="Arial"/>
               </a:defRPr>
@@ -21973,7 +22055,7 @@
               </a:spcAft>
               <a:defRPr sz="1100" b="0">
                 <a:solidFill>
-                  <a:srgbClr val="00D4AA"/>
+                  <a:srgbClr val="009B8D"/>
                 </a:solidFill>
                 <a:latin typeface="Arial"/>
               </a:defRPr>
@@ -21989,7 +22071,7 @@
               </a:spcAft>
               <a:defRPr sz="1200" b="0">
                 <a:solidFill>
-                  <a:srgbClr val="B0B0C5"/>
+                  <a:srgbClr val="3D3D56"/>
                 </a:solidFill>
                 <a:latin typeface="Arial"/>
               </a:defRPr>
@@ -22005,7 +22087,7 @@
               </a:spcAft>
               <a:defRPr sz="1200" b="0">
                 <a:solidFill>
-                  <a:srgbClr val="B0B0C5"/>
+                  <a:srgbClr val="3D3D56"/>
                 </a:solidFill>
                 <a:latin typeface="Arial"/>
               </a:defRPr>
@@ -22021,7 +22103,7 @@
               </a:spcAft>
               <a:defRPr sz="1200" b="0">
                 <a:solidFill>
-                  <a:srgbClr val="B0B0C5"/>
+                  <a:srgbClr val="3D3D56"/>
                 </a:solidFill>
                 <a:latin typeface="Arial"/>
               </a:defRPr>
@@ -22037,7 +22119,7 @@
               </a:spcAft>
               <a:defRPr sz="1200" b="0">
                 <a:solidFill>
-                  <a:srgbClr val="B0B0C5"/>
+                  <a:srgbClr val="3D3D56"/>
                 </a:solidFill>
                 <a:latin typeface="Arial"/>
               </a:defRPr>
@@ -22053,7 +22135,7 @@
               </a:spcAft>
               <a:defRPr sz="1200" b="1">
                 <a:solidFill>
-                  <a:srgbClr val="FF8C42"/>
+                  <a:srgbClr val="E86A17"/>
                 </a:solidFill>
                 <a:latin typeface="Arial"/>
               </a:defRPr>
@@ -22079,10 +22161,12 @@
             <a:avLst/>
           </a:prstGeom>
           <a:solidFill>
-            <a:srgbClr val="25253D"/>
+            <a:srgbClr val="F0F2F7"/>
           </a:solidFill>
-          <a:ln>
-            <a:noFill/>
+          <a:ln w="12700">
+            <a:solidFill>
+              <a:srgbClr val="DEE1EB"/>
+            </a:solidFill>
           </a:ln>
         </p:spPr>
         <p:style>
@@ -22135,7 +22219,7 @@
               </a:spcAft>
               <a:defRPr sz="1600" b="1">
                 <a:solidFill>
-                  <a:srgbClr val="00D4AA"/>
+                  <a:srgbClr val="009B8D"/>
                 </a:solidFill>
                 <a:latin typeface="Arial"/>
               </a:defRPr>
@@ -22151,7 +22235,7 @@
               </a:spcAft>
               <a:defRPr sz="1200" b="0">
                 <a:solidFill>
-                  <a:srgbClr val="B0B0C5"/>
+                  <a:srgbClr val="3D3D56"/>
                 </a:solidFill>
                 <a:latin typeface="Arial"/>
               </a:defRPr>
@@ -22167,7 +22251,7 @@
               </a:spcAft>
               <a:defRPr sz="1200" b="0">
                 <a:solidFill>
-                  <a:srgbClr val="B0B0C5"/>
+                  <a:srgbClr val="3D3D56"/>
                 </a:solidFill>
                 <a:latin typeface="Arial"/>
               </a:defRPr>
@@ -22183,7 +22267,7 @@
               </a:spcAft>
               <a:defRPr sz="1100" b="0">
                 <a:solidFill>
-                  <a:srgbClr val="00D4AA"/>
+                  <a:srgbClr val="009B8D"/>
                 </a:solidFill>
                 <a:latin typeface="Arial"/>
               </a:defRPr>
@@ -22199,7 +22283,7 @@
               </a:spcAft>
               <a:defRPr sz="1200" b="0">
                 <a:solidFill>
-                  <a:srgbClr val="B0B0C5"/>
+                  <a:srgbClr val="3D3D56"/>
                 </a:solidFill>
                 <a:latin typeface="Arial"/>
               </a:defRPr>
@@ -22215,7 +22299,7 @@
               </a:spcAft>
               <a:defRPr sz="1200" b="0">
                 <a:solidFill>
-                  <a:srgbClr val="B0B0C5"/>
+                  <a:srgbClr val="3D3D56"/>
                 </a:solidFill>
                 <a:latin typeface="Arial"/>
               </a:defRPr>
@@ -22231,7 +22315,7 @@
               </a:spcAft>
               <a:defRPr sz="1200" b="0">
                 <a:solidFill>
-                  <a:srgbClr val="B0B0C5"/>
+                  <a:srgbClr val="3D3D56"/>
                 </a:solidFill>
                 <a:latin typeface="Arial"/>
               </a:defRPr>
@@ -22247,7 +22331,7 @@
               </a:spcAft>
               <a:defRPr sz="1200" b="0">
                 <a:solidFill>
-                  <a:srgbClr val="B0B0C5"/>
+                  <a:srgbClr val="3D3D56"/>
                 </a:solidFill>
                 <a:latin typeface="Arial"/>
               </a:defRPr>
@@ -22263,7 +22347,7 @@
               </a:spcAft>
               <a:defRPr sz="1200" b="0">
                 <a:solidFill>
-                  <a:srgbClr val="B0B0C5"/>
+                  <a:srgbClr val="3D3D56"/>
                 </a:solidFill>
                 <a:latin typeface="Arial"/>
               </a:defRPr>
@@ -22279,7 +22363,7 @@
               </a:spcAft>
               <a:defRPr sz="1200" b="0">
                 <a:solidFill>
-                  <a:srgbClr val="B0B0C5"/>
+                  <a:srgbClr val="3D3D56"/>
                 </a:solidFill>
                 <a:latin typeface="Arial"/>
               </a:defRPr>
@@ -22295,7 +22379,7 @@
               </a:spcAft>
               <a:defRPr sz="1200" b="1">
                 <a:solidFill>
-                  <a:srgbClr val="FF8C42"/>
+                  <a:srgbClr val="E86A17"/>
                 </a:solidFill>
                 <a:latin typeface="Arial"/>
               </a:defRPr>
@@ -22321,10 +22405,12 @@
             <a:avLst/>
           </a:prstGeom>
           <a:solidFill>
-            <a:srgbClr val="25253D"/>
+            <a:srgbClr val="F0F2F7"/>
           </a:solidFill>
-          <a:ln>
-            <a:noFill/>
+          <a:ln w="12700">
+            <a:solidFill>
+              <a:srgbClr val="DEE1EB"/>
+            </a:solidFill>
           </a:ln>
         </p:spPr>
         <p:style>
@@ -22377,7 +22463,7 @@
               </a:spcAft>
               <a:defRPr sz="1600" b="1">
                 <a:solidFill>
-                  <a:srgbClr val="A878FF"/>
+                  <a:srgbClr val="7C4DFF"/>
                 </a:solidFill>
                 <a:latin typeface="Arial"/>
               </a:defRPr>
@@ -22393,7 +22479,7 @@
               </a:spcAft>
               <a:defRPr sz="1200" b="0">
                 <a:solidFill>
-                  <a:srgbClr val="B0B0C5"/>
+                  <a:srgbClr val="3D3D56"/>
                 </a:solidFill>
                 <a:latin typeface="Arial"/>
               </a:defRPr>
@@ -22409,7 +22495,7 @@
               </a:spcAft>
               <a:defRPr sz="1200" b="0">
                 <a:solidFill>
-                  <a:srgbClr val="B0B0C5"/>
+                  <a:srgbClr val="3D3D56"/>
                 </a:solidFill>
                 <a:latin typeface="Arial"/>
               </a:defRPr>
@@ -22425,7 +22511,7 @@
               </a:spcAft>
               <a:defRPr sz="1100" b="0">
                 <a:solidFill>
-                  <a:srgbClr val="00D4AA"/>
+                  <a:srgbClr val="009B8D"/>
                 </a:solidFill>
                 <a:latin typeface="Arial"/>
               </a:defRPr>
@@ -22441,7 +22527,7 @@
               </a:spcAft>
               <a:defRPr sz="1200" b="0">
                 <a:solidFill>
-                  <a:srgbClr val="B0B0C5"/>
+                  <a:srgbClr val="3D3D56"/>
                 </a:solidFill>
                 <a:latin typeface="Arial"/>
               </a:defRPr>
@@ -22457,7 +22543,7 @@
               </a:spcAft>
               <a:defRPr sz="1200" b="0">
                 <a:solidFill>
-                  <a:srgbClr val="B0B0C5"/>
+                  <a:srgbClr val="3D3D56"/>
                 </a:solidFill>
                 <a:latin typeface="Arial"/>
               </a:defRPr>
@@ -22473,7 +22559,7 @@
               </a:spcAft>
               <a:defRPr sz="1200" b="0">
                 <a:solidFill>
-                  <a:srgbClr val="B0B0C5"/>
+                  <a:srgbClr val="3D3D56"/>
                 </a:solidFill>
                 <a:latin typeface="Arial"/>
               </a:defRPr>
@@ -22489,7 +22575,7 @@
               </a:spcAft>
               <a:defRPr sz="1100" b="0">
                 <a:solidFill>
-                  <a:srgbClr val="00D4AA"/>
+                  <a:srgbClr val="009B8D"/>
                 </a:solidFill>
                 <a:latin typeface="Arial"/>
               </a:defRPr>
@@ -22505,7 +22591,7 @@
               </a:spcAft>
               <a:defRPr sz="1200" b="0">
                 <a:solidFill>
-                  <a:srgbClr val="B0B0C5"/>
+                  <a:srgbClr val="3D3D56"/>
                 </a:solidFill>
                 <a:latin typeface="Arial"/>
               </a:defRPr>
@@ -22521,7 +22607,7 @@
               </a:spcAft>
               <a:defRPr sz="1200" b="0">
                 <a:solidFill>
-                  <a:srgbClr val="B0B0C5"/>
+                  <a:srgbClr val="3D3D56"/>
                 </a:solidFill>
                 <a:latin typeface="Arial"/>
               </a:defRPr>
@@ -22537,7 +22623,7 @@
               </a:spcAft>
               <a:defRPr sz="1100" b="0">
                 <a:solidFill>
-                  <a:srgbClr val="00D4AA"/>
+                  <a:srgbClr val="009B8D"/>
                 </a:solidFill>
                 <a:latin typeface="Arial"/>
               </a:defRPr>
@@ -22553,7 +22639,7 @@
               </a:spcAft>
               <a:defRPr sz="1200" b="0">
                 <a:solidFill>
-                  <a:srgbClr val="B0B0C5"/>
+                  <a:srgbClr val="3D3D56"/>
                 </a:solidFill>
                 <a:latin typeface="Arial"/>
               </a:defRPr>
@@ -22569,7 +22655,7 @@
               </a:spcAft>
               <a:defRPr sz="1200" b="1">
                 <a:solidFill>
-                  <a:srgbClr val="FF8C42"/>
+                  <a:srgbClr val="E86A17"/>
                 </a:solidFill>
                 <a:latin typeface="Arial"/>
               </a:defRPr>
@@ -22605,7 +22691,7 @@
             <a:pPr algn="r">
               <a:defRPr sz="1000" b="0">
                 <a:solidFill>
-                  <a:srgbClr val="80809A"/>
+                  <a:srgbClr val="787896"/>
                 </a:solidFill>
                 <a:latin typeface="Arial"/>
               </a:defRPr>
@@ -22630,7 +22716,7 @@
     <p:bg>
       <p:bgPr>
         <a:solidFill>
-          <a:srgbClr val="1B1B2F"/>
+          <a:srgbClr val="FAFAFC"/>
         </a:solidFill>
         <a:effectLst/>
       </p:bgPr>
@@ -22657,7 +22743,7 @@
             <a:avLst/>
           </a:prstGeom>
           <a:solidFill>
-            <a:srgbClr val="25253D"/>
+            <a:srgbClr val="FFFFFF"/>
           </a:solidFill>
           <a:ln>
             <a:noFill/>
@@ -22700,7 +22786,7 @@
             <a:avLst/>
           </a:prstGeom>
           <a:solidFill>
-            <a:srgbClr val="4E8CFF"/>
+            <a:srgbClr val="2D5BE3"/>
           </a:solidFill>
           <a:ln>
             <a:noFill/>
@@ -22753,7 +22839,7 @@
             <a:pPr algn="l">
               <a:defRPr sz="2200" b="1">
                 <a:solidFill>
-                  <a:srgbClr val="F0F0F5"/>
+                  <a:srgbClr val="1A1A2E"/>
                 </a:solidFill>
                 <a:latin typeface="Arial"/>
               </a:defRPr>
@@ -22789,7 +22875,7 @@
             <a:pPr algn="r">
               <a:defRPr sz="1200" b="0">
                 <a:solidFill>
-                  <a:srgbClr val="80809A"/>
+                  <a:srgbClr val="787896"/>
                 </a:solidFill>
                 <a:latin typeface="Arial"/>
               </a:defRPr>
@@ -22834,7 +22920,7 @@
                       <a:pPr>
                         <a:defRPr sz="1200" b="1">
                           <a:solidFill>
-                            <a:srgbClr val="F0F0F5"/>
+                            <a:srgbClr val="FFFFFF"/>
                           </a:solidFill>
                           <a:latin typeface="Arial"/>
                         </a:defRPr>
@@ -22846,7 +22932,7 @@
                   </a:txBody>
                   <a:tcPr>
                     <a:solidFill>
-                      <a:srgbClr val="2D3A6D"/>
+                      <a:srgbClr val="2D5BE3"/>
                     </a:solidFill>
                   </a:tcPr>
                 </a:tc>
@@ -22858,7 +22944,7 @@
                       <a:pPr>
                         <a:defRPr sz="1200" b="1">
                           <a:solidFill>
-                            <a:srgbClr val="F0F0F5"/>
+                            <a:srgbClr val="FFFFFF"/>
                           </a:solidFill>
                           <a:latin typeface="Arial"/>
                         </a:defRPr>
@@ -22870,7 +22956,7 @@
                   </a:txBody>
                   <a:tcPr>
                     <a:solidFill>
-                      <a:srgbClr val="2D3A6D"/>
+                      <a:srgbClr val="2D5BE3"/>
                     </a:solidFill>
                   </a:tcPr>
                 </a:tc>
@@ -22882,7 +22968,7 @@
                       <a:pPr>
                         <a:defRPr sz="1200" b="1">
                           <a:solidFill>
-                            <a:srgbClr val="F0F0F5"/>
+                            <a:srgbClr val="FFFFFF"/>
                           </a:solidFill>
                           <a:latin typeface="Arial"/>
                         </a:defRPr>
@@ -22894,7 +22980,7 @@
                   </a:txBody>
                   <a:tcPr>
                     <a:solidFill>
-                      <a:srgbClr val="2D3A6D"/>
+                      <a:srgbClr val="2D5BE3"/>
                     </a:solidFill>
                   </a:tcPr>
                 </a:tc>
@@ -22906,7 +22992,7 @@
                       <a:pPr>
                         <a:defRPr sz="1200" b="1">
                           <a:solidFill>
-                            <a:srgbClr val="F0F0F5"/>
+                            <a:srgbClr val="FFFFFF"/>
                           </a:solidFill>
                           <a:latin typeface="Arial"/>
                         </a:defRPr>
@@ -22918,7 +23004,7 @@
                   </a:txBody>
                   <a:tcPr>
                     <a:solidFill>
-                      <a:srgbClr val="2D3A6D"/>
+                      <a:srgbClr val="2D5BE3"/>
                     </a:solidFill>
                   </a:tcPr>
                 </a:tc>
@@ -22930,7 +23016,7 @@
                       <a:pPr>
                         <a:defRPr sz="1200" b="1">
                           <a:solidFill>
-                            <a:srgbClr val="F0F0F5"/>
+                            <a:srgbClr val="FFFFFF"/>
                           </a:solidFill>
                           <a:latin typeface="Arial"/>
                         </a:defRPr>
@@ -22942,7 +23028,7 @@
                   </a:txBody>
                   <a:tcPr>
                     <a:solidFill>
-                      <a:srgbClr val="2D3A6D"/>
+                      <a:srgbClr val="2D5BE3"/>
                     </a:solidFill>
                   </a:tcPr>
                 </a:tc>
@@ -22956,7 +23042,7 @@
                       <a:pPr>
                         <a:defRPr sz="1100" b="0">
                           <a:solidFill>
-                            <a:srgbClr val="B0B0C5"/>
+                            <a:srgbClr val="3D3D56"/>
                           </a:solidFill>
                           <a:latin typeface="Arial"/>
                         </a:defRPr>
@@ -22968,7 +23054,7 @@
                   </a:txBody>
                   <a:tcPr>
                     <a:solidFill>
-                      <a:srgbClr val="25253D"/>
+                      <a:srgbClr val="FFFFFF"/>
                     </a:solidFill>
                   </a:tcPr>
                 </a:tc>
@@ -22980,7 +23066,7 @@
                       <a:pPr>
                         <a:defRPr sz="1100" b="0">
                           <a:solidFill>
-                            <a:srgbClr val="B0B0C5"/>
+                            <a:srgbClr val="3D3D56"/>
                           </a:solidFill>
                           <a:latin typeface="Arial"/>
                         </a:defRPr>
@@ -22992,7 +23078,7 @@
                   </a:txBody>
                   <a:tcPr>
                     <a:solidFill>
-                      <a:srgbClr val="25253D"/>
+                      <a:srgbClr val="FFFFFF"/>
                     </a:solidFill>
                   </a:tcPr>
                 </a:tc>
@@ -23004,7 +23090,7 @@
                       <a:pPr>
                         <a:defRPr sz="1100" b="0">
                           <a:solidFill>
-                            <a:srgbClr val="B0B0C5"/>
+                            <a:srgbClr val="3D3D56"/>
                           </a:solidFill>
                           <a:latin typeface="Arial"/>
                         </a:defRPr>
@@ -23017,7 +23103,7 @@
                       <a:pPr>
                         <a:defRPr sz="1100" b="0">
                           <a:solidFill>
-                            <a:srgbClr val="B0B0C5"/>
+                            <a:srgbClr val="3D3D56"/>
                           </a:solidFill>
                           <a:latin typeface="Arial"/>
                         </a:defRPr>
@@ -23029,7 +23115,7 @@
                   </a:txBody>
                   <a:tcPr>
                     <a:solidFill>
-                      <a:srgbClr val="25253D"/>
+                      <a:srgbClr val="FFFFFF"/>
                     </a:solidFill>
                   </a:tcPr>
                 </a:tc>
@@ -23041,7 +23127,7 @@
                       <a:pPr>
                         <a:defRPr sz="1100" b="0">
                           <a:solidFill>
-                            <a:srgbClr val="B0B0C5"/>
+                            <a:srgbClr val="3D3D56"/>
                           </a:solidFill>
                           <a:latin typeface="Arial"/>
                         </a:defRPr>
@@ -23053,7 +23139,7 @@
                   </a:txBody>
                   <a:tcPr>
                     <a:solidFill>
-                      <a:srgbClr val="25253D"/>
+                      <a:srgbClr val="FFFFFF"/>
                     </a:solidFill>
                   </a:tcPr>
                 </a:tc>
@@ -23065,7 +23151,7 @@
                       <a:pPr>
                         <a:defRPr sz="1100" b="0">
                           <a:solidFill>
-                            <a:srgbClr val="B0B0C5"/>
+                            <a:srgbClr val="3D3D56"/>
                           </a:solidFill>
                           <a:latin typeface="Arial"/>
                         </a:defRPr>
@@ -23077,7 +23163,7 @@
                   </a:txBody>
                   <a:tcPr>
                     <a:solidFill>
-                      <a:srgbClr val="25253D"/>
+                      <a:srgbClr val="FFFFFF"/>
                     </a:solidFill>
                   </a:tcPr>
                 </a:tc>
@@ -23091,7 +23177,7 @@
                       <a:pPr>
                         <a:defRPr sz="1100" b="0">
                           <a:solidFill>
-                            <a:srgbClr val="B0B0C5"/>
+                            <a:srgbClr val="3D3D56"/>
                           </a:solidFill>
                           <a:latin typeface="Arial"/>
                         </a:defRPr>
@@ -23103,7 +23189,7 @@
                   </a:txBody>
                   <a:tcPr>
                     <a:solidFill>
-                      <a:srgbClr val="202036"/>
+                      <a:srgbClr val="F0F2F7"/>
                     </a:solidFill>
                   </a:tcPr>
                 </a:tc>
@@ -23115,7 +23201,7 @@
                       <a:pPr>
                         <a:defRPr sz="1100" b="0">
                           <a:solidFill>
-                            <a:srgbClr val="B0B0C5"/>
+                            <a:srgbClr val="3D3D56"/>
                           </a:solidFill>
                           <a:latin typeface="Arial"/>
                         </a:defRPr>
@@ -23127,7 +23213,7 @@
                   </a:txBody>
                   <a:tcPr>
                     <a:solidFill>
-                      <a:srgbClr val="202036"/>
+                      <a:srgbClr val="F0F2F7"/>
                     </a:solidFill>
                   </a:tcPr>
                 </a:tc>
@@ -23139,7 +23225,7 @@
                       <a:pPr>
                         <a:defRPr sz="1100" b="0">
                           <a:solidFill>
-                            <a:srgbClr val="B0B0C5"/>
+                            <a:srgbClr val="3D3D56"/>
                           </a:solidFill>
                           <a:latin typeface="Arial"/>
                         </a:defRPr>
@@ -23152,7 +23238,7 @@
                       <a:pPr>
                         <a:defRPr sz="1100" b="0">
                           <a:solidFill>
-                            <a:srgbClr val="B0B0C5"/>
+                            <a:srgbClr val="3D3D56"/>
                           </a:solidFill>
                           <a:latin typeface="Arial"/>
                         </a:defRPr>
@@ -23164,7 +23250,7 @@
                   </a:txBody>
                   <a:tcPr>
                     <a:solidFill>
-                      <a:srgbClr val="202036"/>
+                      <a:srgbClr val="F0F2F7"/>
                     </a:solidFill>
                   </a:tcPr>
                 </a:tc>
@@ -23176,7 +23262,7 @@
                       <a:pPr>
                         <a:defRPr sz="1100" b="0">
                           <a:solidFill>
-                            <a:srgbClr val="B0B0C5"/>
+                            <a:srgbClr val="3D3D56"/>
                           </a:solidFill>
                           <a:latin typeface="Arial"/>
                         </a:defRPr>
@@ -23188,7 +23274,7 @@
                   </a:txBody>
                   <a:tcPr>
                     <a:solidFill>
-                      <a:srgbClr val="202036"/>
+                      <a:srgbClr val="F0F2F7"/>
                     </a:solidFill>
                   </a:tcPr>
                 </a:tc>
@@ -23200,7 +23286,7 @@
                       <a:pPr>
                         <a:defRPr sz="1100" b="0">
                           <a:solidFill>
-                            <a:srgbClr val="B0B0C5"/>
+                            <a:srgbClr val="3D3D56"/>
                           </a:solidFill>
                           <a:latin typeface="Arial"/>
                         </a:defRPr>
@@ -23212,7 +23298,7 @@
                   </a:txBody>
                   <a:tcPr>
                     <a:solidFill>
-                      <a:srgbClr val="202036"/>
+                      <a:srgbClr val="F0F2F7"/>
                     </a:solidFill>
                   </a:tcPr>
                 </a:tc>
@@ -23226,7 +23312,7 @@
                       <a:pPr>
                         <a:defRPr sz="1100" b="0">
                           <a:solidFill>
-                            <a:srgbClr val="B0B0C5"/>
+                            <a:srgbClr val="3D3D56"/>
                           </a:solidFill>
                           <a:latin typeface="Arial"/>
                         </a:defRPr>
@@ -23238,7 +23324,7 @@
                   </a:txBody>
                   <a:tcPr>
                     <a:solidFill>
-                      <a:srgbClr val="25253D"/>
+                      <a:srgbClr val="FFFFFF"/>
                     </a:solidFill>
                   </a:tcPr>
                 </a:tc>
@@ -23250,7 +23336,7 @@
                       <a:pPr>
                         <a:defRPr sz="1100" b="0">
                           <a:solidFill>
-                            <a:srgbClr val="B0B0C5"/>
+                            <a:srgbClr val="3D3D56"/>
                           </a:solidFill>
                           <a:latin typeface="Arial"/>
                         </a:defRPr>
@@ -23262,7 +23348,7 @@
                   </a:txBody>
                   <a:tcPr>
                     <a:solidFill>
-                      <a:srgbClr val="25253D"/>
+                      <a:srgbClr val="FFFFFF"/>
                     </a:solidFill>
                   </a:tcPr>
                 </a:tc>
@@ -23274,7 +23360,7 @@
                       <a:pPr>
                         <a:defRPr sz="1100" b="0">
                           <a:solidFill>
-                            <a:srgbClr val="B0B0C5"/>
+                            <a:srgbClr val="3D3D56"/>
                           </a:solidFill>
                           <a:latin typeface="Arial"/>
                         </a:defRPr>
@@ -23287,7 +23373,7 @@
                       <a:pPr>
                         <a:defRPr sz="1100" b="0">
                           <a:solidFill>
-                            <a:srgbClr val="B0B0C5"/>
+                            <a:srgbClr val="3D3D56"/>
                           </a:solidFill>
                           <a:latin typeface="Arial"/>
                         </a:defRPr>
@@ -23299,7 +23385,7 @@
                   </a:txBody>
                   <a:tcPr>
                     <a:solidFill>
-                      <a:srgbClr val="25253D"/>
+                      <a:srgbClr val="FFFFFF"/>
                     </a:solidFill>
                   </a:tcPr>
                 </a:tc>
@@ -23311,7 +23397,7 @@
                       <a:pPr>
                         <a:defRPr sz="1100" b="0">
                           <a:solidFill>
-                            <a:srgbClr val="B0B0C5"/>
+                            <a:srgbClr val="3D3D56"/>
                           </a:solidFill>
                           <a:latin typeface="Arial"/>
                         </a:defRPr>
@@ -23323,7 +23409,7 @@
                   </a:txBody>
                   <a:tcPr>
                     <a:solidFill>
-                      <a:srgbClr val="25253D"/>
+                      <a:srgbClr val="FFFFFF"/>
                     </a:solidFill>
                   </a:tcPr>
                 </a:tc>
@@ -23335,7 +23421,7 @@
                       <a:pPr>
                         <a:defRPr sz="1100" b="0">
                           <a:solidFill>
-                            <a:srgbClr val="B0B0C5"/>
+                            <a:srgbClr val="3D3D56"/>
                           </a:solidFill>
                           <a:latin typeface="Arial"/>
                         </a:defRPr>
@@ -23347,7 +23433,7 @@
                   </a:txBody>
                   <a:tcPr>
                     <a:solidFill>
-                      <a:srgbClr val="25253D"/>
+                      <a:srgbClr val="FFFFFF"/>
                     </a:solidFill>
                   </a:tcPr>
                 </a:tc>
@@ -23361,7 +23447,7 @@
                       <a:pPr>
                         <a:defRPr sz="1100" b="0">
                           <a:solidFill>
-                            <a:srgbClr val="B0B0C5"/>
+                            <a:srgbClr val="3D3D56"/>
                           </a:solidFill>
                           <a:latin typeface="Arial"/>
                         </a:defRPr>
@@ -23373,7 +23459,7 @@
                   </a:txBody>
                   <a:tcPr>
                     <a:solidFill>
-                      <a:srgbClr val="202036"/>
+                      <a:srgbClr val="F0F2F7"/>
                     </a:solidFill>
                   </a:tcPr>
                 </a:tc>
@@ -23385,7 +23471,7 @@
                       <a:pPr>
                         <a:defRPr sz="1100" b="0">
                           <a:solidFill>
-                            <a:srgbClr val="B0B0C5"/>
+                            <a:srgbClr val="3D3D56"/>
                           </a:solidFill>
                           <a:latin typeface="Arial"/>
                         </a:defRPr>
@@ -23397,7 +23483,7 @@
                   </a:txBody>
                   <a:tcPr>
                     <a:solidFill>
-                      <a:srgbClr val="202036"/>
+                      <a:srgbClr val="F0F2F7"/>
                     </a:solidFill>
                   </a:tcPr>
                 </a:tc>
@@ -23409,7 +23495,7 @@
                       <a:pPr>
                         <a:defRPr sz="1100" b="0">
                           <a:solidFill>
-                            <a:srgbClr val="B0B0C5"/>
+                            <a:srgbClr val="3D3D56"/>
                           </a:solidFill>
                           <a:latin typeface="Arial"/>
                         </a:defRPr>
@@ -23422,7 +23508,7 @@
                       <a:pPr>
                         <a:defRPr sz="1100" b="0">
                           <a:solidFill>
-                            <a:srgbClr val="B0B0C5"/>
+                            <a:srgbClr val="3D3D56"/>
                           </a:solidFill>
                           <a:latin typeface="Arial"/>
                         </a:defRPr>
@@ -23434,7 +23520,7 @@
                   </a:txBody>
                   <a:tcPr>
                     <a:solidFill>
-                      <a:srgbClr val="202036"/>
+                      <a:srgbClr val="F0F2F7"/>
                     </a:solidFill>
                   </a:tcPr>
                 </a:tc>
@@ -23446,7 +23532,7 @@
                       <a:pPr>
                         <a:defRPr sz="1100" b="0">
                           <a:solidFill>
-                            <a:srgbClr val="B0B0C5"/>
+                            <a:srgbClr val="3D3D56"/>
                           </a:solidFill>
                           <a:latin typeface="Arial"/>
                         </a:defRPr>
@@ -23458,7 +23544,7 @@
                   </a:txBody>
                   <a:tcPr>
                     <a:solidFill>
-                      <a:srgbClr val="202036"/>
+                      <a:srgbClr val="F0F2F7"/>
                     </a:solidFill>
                   </a:tcPr>
                 </a:tc>
@@ -23470,7 +23556,7 @@
                       <a:pPr>
                         <a:defRPr sz="1100" b="0">
                           <a:solidFill>
-                            <a:srgbClr val="B0B0C5"/>
+                            <a:srgbClr val="3D3D56"/>
                           </a:solidFill>
                           <a:latin typeface="Arial"/>
                         </a:defRPr>
@@ -23482,7 +23568,7 @@
                   </a:txBody>
                   <a:tcPr>
                     <a:solidFill>
-                      <a:srgbClr val="202036"/>
+                      <a:srgbClr val="F0F2F7"/>
                     </a:solidFill>
                   </a:tcPr>
                 </a:tc>
@@ -23496,7 +23582,7 @@
                       <a:pPr>
                         <a:defRPr sz="1100" b="0">
                           <a:solidFill>
-                            <a:srgbClr val="B0B0C5"/>
+                            <a:srgbClr val="3D3D56"/>
                           </a:solidFill>
                           <a:latin typeface="Arial"/>
                         </a:defRPr>
@@ -23508,7 +23594,7 @@
                   </a:txBody>
                   <a:tcPr>
                     <a:solidFill>
-                      <a:srgbClr val="25253D"/>
+                      <a:srgbClr val="FFFFFF"/>
                     </a:solidFill>
                   </a:tcPr>
                 </a:tc>
@@ -23520,7 +23606,7 @@
                       <a:pPr>
                         <a:defRPr sz="1100" b="0">
                           <a:solidFill>
-                            <a:srgbClr val="B0B0C5"/>
+                            <a:srgbClr val="3D3D56"/>
                           </a:solidFill>
                           <a:latin typeface="Arial"/>
                         </a:defRPr>
@@ -23532,7 +23618,7 @@
                   </a:txBody>
                   <a:tcPr>
                     <a:solidFill>
-                      <a:srgbClr val="25253D"/>
+                      <a:srgbClr val="FFFFFF"/>
                     </a:solidFill>
                   </a:tcPr>
                 </a:tc>
@@ -23544,7 +23630,7 @@
                       <a:pPr>
                         <a:defRPr sz="1100" b="0">
                           <a:solidFill>
-                            <a:srgbClr val="B0B0C5"/>
+                            <a:srgbClr val="3D3D56"/>
                           </a:solidFill>
                           <a:latin typeface="Arial"/>
                         </a:defRPr>
@@ -23557,7 +23643,7 @@
                       <a:pPr>
                         <a:defRPr sz="1100" b="0">
                           <a:solidFill>
-                            <a:srgbClr val="B0B0C5"/>
+                            <a:srgbClr val="3D3D56"/>
                           </a:solidFill>
                           <a:latin typeface="Arial"/>
                         </a:defRPr>
@@ -23569,7 +23655,7 @@
                   </a:txBody>
                   <a:tcPr>
                     <a:solidFill>
-                      <a:srgbClr val="25253D"/>
+                      <a:srgbClr val="FFFFFF"/>
                     </a:solidFill>
                   </a:tcPr>
                 </a:tc>
@@ -23581,7 +23667,7 @@
                       <a:pPr>
                         <a:defRPr sz="1100" b="0">
                           <a:solidFill>
-                            <a:srgbClr val="B0B0C5"/>
+                            <a:srgbClr val="3D3D56"/>
                           </a:solidFill>
                           <a:latin typeface="Arial"/>
                         </a:defRPr>
@@ -23593,7 +23679,7 @@
                   </a:txBody>
                   <a:tcPr>
                     <a:solidFill>
-                      <a:srgbClr val="25253D"/>
+                      <a:srgbClr val="FFFFFF"/>
                     </a:solidFill>
                   </a:tcPr>
                 </a:tc>
@@ -23605,7 +23691,7 @@
                       <a:pPr>
                         <a:defRPr sz="1100" b="0">
                           <a:solidFill>
-                            <a:srgbClr val="B0B0C5"/>
+                            <a:srgbClr val="3D3D56"/>
                           </a:solidFill>
                           <a:latin typeface="Arial"/>
                         </a:defRPr>
@@ -23617,7 +23703,7 @@
                   </a:txBody>
                   <a:tcPr>
                     <a:solidFill>
-                      <a:srgbClr val="25253D"/>
+                      <a:srgbClr val="FFFFFF"/>
                     </a:solidFill>
                   </a:tcPr>
                 </a:tc>
@@ -23631,7 +23717,7 @@
                       <a:pPr>
                         <a:defRPr sz="1100" b="0">
                           <a:solidFill>
-                            <a:srgbClr val="B0B0C5"/>
+                            <a:srgbClr val="3D3D56"/>
                           </a:solidFill>
                           <a:latin typeface="Arial"/>
                         </a:defRPr>
@@ -23643,7 +23729,7 @@
                   </a:txBody>
                   <a:tcPr>
                     <a:solidFill>
-                      <a:srgbClr val="202036"/>
+                      <a:srgbClr val="F0F2F7"/>
                     </a:solidFill>
                   </a:tcPr>
                 </a:tc>
@@ -23655,7 +23741,7 @@
                       <a:pPr>
                         <a:defRPr sz="1100" b="0">
                           <a:solidFill>
-                            <a:srgbClr val="B0B0C5"/>
+                            <a:srgbClr val="3D3D56"/>
                           </a:solidFill>
                           <a:latin typeface="Arial"/>
                         </a:defRPr>
@@ -23667,7 +23753,7 @@
                   </a:txBody>
                   <a:tcPr>
                     <a:solidFill>
-                      <a:srgbClr val="202036"/>
+                      <a:srgbClr val="F0F2F7"/>
                     </a:solidFill>
                   </a:tcPr>
                 </a:tc>
@@ -23679,7 +23765,7 @@
                       <a:pPr>
                         <a:defRPr sz="1100" b="0">
                           <a:solidFill>
-                            <a:srgbClr val="B0B0C5"/>
+                            <a:srgbClr val="3D3D56"/>
                           </a:solidFill>
                           <a:latin typeface="Arial"/>
                         </a:defRPr>
@@ -23692,7 +23778,7 @@
                       <a:pPr>
                         <a:defRPr sz="1100" b="0">
                           <a:solidFill>
-                            <a:srgbClr val="B0B0C5"/>
+                            <a:srgbClr val="3D3D56"/>
                           </a:solidFill>
                           <a:latin typeface="Arial"/>
                         </a:defRPr>
@@ -23704,7 +23790,7 @@
                   </a:txBody>
                   <a:tcPr>
                     <a:solidFill>
-                      <a:srgbClr val="202036"/>
+                      <a:srgbClr val="F0F2F7"/>
                     </a:solidFill>
                   </a:tcPr>
                 </a:tc>
@@ -23716,7 +23802,7 @@
                       <a:pPr>
                         <a:defRPr sz="1100" b="0">
                           <a:solidFill>
-                            <a:srgbClr val="B0B0C5"/>
+                            <a:srgbClr val="3D3D56"/>
                           </a:solidFill>
                           <a:latin typeface="Arial"/>
                         </a:defRPr>
@@ -23728,7 +23814,7 @@
                   </a:txBody>
                   <a:tcPr>
                     <a:solidFill>
-                      <a:srgbClr val="202036"/>
+                      <a:srgbClr val="F0F2F7"/>
                     </a:solidFill>
                   </a:tcPr>
                 </a:tc>
@@ -23740,7 +23826,7 @@
                       <a:pPr>
                         <a:defRPr sz="1100" b="0">
                           <a:solidFill>
-                            <a:srgbClr val="B0B0C5"/>
+                            <a:srgbClr val="3D3D56"/>
                           </a:solidFill>
                           <a:latin typeface="Arial"/>
                         </a:defRPr>
@@ -23752,7 +23838,7 @@
                   </a:txBody>
                   <a:tcPr>
                     <a:solidFill>
-                      <a:srgbClr val="202036"/>
+                      <a:srgbClr val="F0F2F7"/>
                     </a:solidFill>
                   </a:tcPr>
                 </a:tc>
@@ -23766,7 +23852,7 @@
                       <a:pPr>
                         <a:defRPr sz="1100" b="0">
                           <a:solidFill>
-                            <a:srgbClr val="B0B0C5"/>
+                            <a:srgbClr val="3D3D56"/>
                           </a:solidFill>
                           <a:latin typeface="Arial"/>
                         </a:defRPr>
@@ -23778,7 +23864,7 @@
                   </a:txBody>
                   <a:tcPr>
                     <a:solidFill>
-                      <a:srgbClr val="25253D"/>
+                      <a:srgbClr val="FFFFFF"/>
                     </a:solidFill>
                   </a:tcPr>
                 </a:tc>
@@ -23790,7 +23876,7 @@
                       <a:pPr>
                         <a:defRPr sz="1100" b="0">
                           <a:solidFill>
-                            <a:srgbClr val="B0B0C5"/>
+                            <a:srgbClr val="3D3D56"/>
                           </a:solidFill>
                           <a:latin typeface="Arial"/>
                         </a:defRPr>
@@ -23802,7 +23888,7 @@
                   </a:txBody>
                   <a:tcPr>
                     <a:solidFill>
-                      <a:srgbClr val="25253D"/>
+                      <a:srgbClr val="FFFFFF"/>
                     </a:solidFill>
                   </a:tcPr>
                 </a:tc>
@@ -23814,7 +23900,7 @@
                       <a:pPr>
                         <a:defRPr sz="1100" b="0">
                           <a:solidFill>
-                            <a:srgbClr val="B0B0C5"/>
+                            <a:srgbClr val="3D3D56"/>
                           </a:solidFill>
                           <a:latin typeface="Arial"/>
                         </a:defRPr>
@@ -23827,7 +23913,7 @@
                       <a:pPr>
                         <a:defRPr sz="1100" b="0">
                           <a:solidFill>
-                            <a:srgbClr val="B0B0C5"/>
+                            <a:srgbClr val="3D3D56"/>
                           </a:solidFill>
                           <a:latin typeface="Arial"/>
                         </a:defRPr>
@@ -23839,7 +23925,7 @@
                   </a:txBody>
                   <a:tcPr>
                     <a:solidFill>
-                      <a:srgbClr val="25253D"/>
+                      <a:srgbClr val="FFFFFF"/>
                     </a:solidFill>
                   </a:tcPr>
                 </a:tc>
@@ -23851,7 +23937,7 @@
                       <a:pPr>
                         <a:defRPr sz="1100" b="0">
                           <a:solidFill>
-                            <a:srgbClr val="B0B0C5"/>
+                            <a:srgbClr val="3D3D56"/>
                           </a:solidFill>
                           <a:latin typeface="Arial"/>
                         </a:defRPr>
@@ -23863,7 +23949,7 @@
                   </a:txBody>
                   <a:tcPr>
                     <a:solidFill>
-                      <a:srgbClr val="25253D"/>
+                      <a:srgbClr val="FFFFFF"/>
                     </a:solidFill>
                   </a:tcPr>
                 </a:tc>
@@ -23875,7 +23961,7 @@
                       <a:pPr>
                         <a:defRPr sz="1100" b="0">
                           <a:solidFill>
-                            <a:srgbClr val="B0B0C5"/>
+                            <a:srgbClr val="3D3D56"/>
                           </a:solidFill>
                           <a:latin typeface="Arial"/>
                         </a:defRPr>
@@ -23887,7 +23973,7 @@
                   </a:txBody>
                   <a:tcPr>
                     <a:solidFill>
-                      <a:srgbClr val="25253D"/>
+                      <a:srgbClr val="FFFFFF"/>
                     </a:solidFill>
                   </a:tcPr>
                 </a:tc>
@@ -23921,7 +24007,7 @@
             <a:pPr algn="l">
               <a:defRPr sz="1400" b="1">
                 <a:solidFill>
-                  <a:srgbClr val="00D4AA"/>
+                  <a:srgbClr val="009B8D"/>
                 </a:solidFill>
                 <a:latin typeface="Arial"/>
               </a:defRPr>
@@ -23957,7 +24043,7 @@
             <a:pPr algn="r">
               <a:defRPr sz="1000" b="0">
                 <a:solidFill>
-                  <a:srgbClr val="80809A"/>
+                  <a:srgbClr val="787896"/>
                 </a:solidFill>
                 <a:latin typeface="Arial"/>
               </a:defRPr>
@@ -23982,7 +24068,7 @@
     <p:bg>
       <p:bgPr>
         <a:solidFill>
-          <a:srgbClr val="1B1B2F"/>
+          <a:srgbClr val="FAFAFC"/>
         </a:solidFill>
         <a:effectLst/>
       </p:bgPr>
@@ -24009,7 +24095,7 @@
             <a:avLst/>
           </a:prstGeom>
           <a:solidFill>
-            <a:srgbClr val="25253D"/>
+            <a:srgbClr val="FFFFFF"/>
           </a:solidFill>
           <a:ln>
             <a:noFill/>
@@ -24052,7 +24138,7 @@
             <a:avLst/>
           </a:prstGeom>
           <a:solidFill>
-            <a:srgbClr val="4E8CFF"/>
+            <a:srgbClr val="2D5BE3"/>
           </a:solidFill>
           <a:ln>
             <a:noFill/>
@@ -24105,7 +24191,7 @@
             <a:pPr algn="l">
               <a:defRPr sz="2200" b="1">
                 <a:solidFill>
-                  <a:srgbClr val="F0F0F5"/>
+                  <a:srgbClr val="1A1A2E"/>
                 </a:solidFill>
                 <a:latin typeface="Arial"/>
               </a:defRPr>
@@ -24141,7 +24227,7 @@
             <a:pPr algn="r">
               <a:defRPr sz="1200" b="0">
                 <a:solidFill>
-                  <a:srgbClr val="80809A"/>
+                  <a:srgbClr val="787896"/>
                 </a:solidFill>
                 <a:latin typeface="Arial"/>
               </a:defRPr>
@@ -24167,10 +24253,12 @@
             <a:avLst/>
           </a:prstGeom>
           <a:solidFill>
-            <a:srgbClr val="25253D"/>
+            <a:srgbClr val="F0F2F7"/>
           </a:solidFill>
-          <a:ln>
-            <a:noFill/>
+          <a:ln w="12700">
+            <a:solidFill>
+              <a:srgbClr val="DEE1EB"/>
+            </a:solidFill>
           </a:ln>
         </p:spPr>
         <p:style>
@@ -24223,7 +24311,7 @@
               </a:spcAft>
               <a:defRPr sz="1600" b="1">
                 <a:solidFill>
-                  <a:srgbClr val="4E8CFF"/>
+                  <a:srgbClr val="2D5BE3"/>
                 </a:solidFill>
                 <a:latin typeface="Arial"/>
               </a:defRPr>
@@ -24239,7 +24327,7 @@
               </a:spcAft>
               <a:defRPr sz="1300" b="0">
                 <a:solidFill>
-                  <a:srgbClr val="B0B0C5"/>
+                  <a:srgbClr val="3D3D56"/>
                 </a:solidFill>
                 <a:latin typeface="Arial"/>
               </a:defRPr>
@@ -24255,7 +24343,7 @@
               </a:spcAft>
               <a:defRPr sz="1300" b="0">
                 <a:solidFill>
-                  <a:srgbClr val="4ECB71"/>
+                  <a:srgbClr val="1B9E4B"/>
                 </a:solidFill>
                 <a:latin typeface="Arial"/>
               </a:defRPr>
@@ -24271,7 +24359,7 @@
               </a:spcAft>
               <a:defRPr sz="1300" b="0">
                 <a:solidFill>
-                  <a:srgbClr val="FF8C42"/>
+                  <a:srgbClr val="E86A17"/>
                 </a:solidFill>
                 <a:latin typeface="Arial"/>
               </a:defRPr>
@@ -24287,7 +24375,7 @@
               </a:spcAft>
               <a:defRPr sz="1200" b="1">
                 <a:solidFill>
-                  <a:srgbClr val="00D4AA"/>
+                  <a:srgbClr val="009B8D"/>
                 </a:solidFill>
                 <a:latin typeface="Arial"/>
               </a:defRPr>
@@ -24313,10 +24401,12 @@
             <a:avLst/>
           </a:prstGeom>
           <a:solidFill>
-            <a:srgbClr val="25253D"/>
+            <a:srgbClr val="F0F2F7"/>
           </a:solidFill>
-          <a:ln>
-            <a:noFill/>
+          <a:ln w="12700">
+            <a:solidFill>
+              <a:srgbClr val="DEE1EB"/>
+            </a:solidFill>
           </a:ln>
         </p:spPr>
         <p:style>
@@ -24369,7 +24459,7 @@
               </a:spcAft>
               <a:defRPr sz="1600" b="1">
                 <a:solidFill>
-                  <a:srgbClr val="A878FF"/>
+                  <a:srgbClr val="7C4DFF"/>
                 </a:solidFill>
                 <a:latin typeface="Arial"/>
               </a:defRPr>
@@ -24385,7 +24475,7 @@
               </a:spcAft>
               <a:defRPr sz="1300" b="0">
                 <a:solidFill>
-                  <a:srgbClr val="B0B0C5"/>
+                  <a:srgbClr val="3D3D56"/>
                 </a:solidFill>
                 <a:latin typeface="Arial"/>
               </a:defRPr>
@@ -24401,7 +24491,7 @@
               </a:spcAft>
               <a:defRPr sz="1300" b="0">
                 <a:solidFill>
-                  <a:srgbClr val="B0B0C5"/>
+                  <a:srgbClr val="3D3D56"/>
                 </a:solidFill>
                 <a:latin typeface="Arial"/>
               </a:defRPr>
@@ -24417,7 +24507,7 @@
               </a:spcAft>
               <a:defRPr sz="1300" b="0">
                 <a:solidFill>
-                  <a:srgbClr val="4ECB71"/>
+                  <a:srgbClr val="1B9E4B"/>
                 </a:solidFill>
                 <a:latin typeface="Arial"/>
               </a:defRPr>
@@ -24433,7 +24523,7 @@
               </a:spcAft>
               <a:defRPr sz="1200" b="1">
                 <a:solidFill>
-                  <a:srgbClr val="00D4AA"/>
+                  <a:srgbClr val="009B8D"/>
                 </a:solidFill>
                 <a:latin typeface="Arial"/>
               </a:defRPr>
@@ -24459,10 +24549,12 @@
             <a:avLst/>
           </a:prstGeom>
           <a:solidFill>
-            <a:srgbClr val="25253D"/>
+            <a:srgbClr val="F0F2F7"/>
           </a:solidFill>
-          <a:ln>
-            <a:noFill/>
+          <a:ln w="12700">
+            <a:solidFill>
+              <a:srgbClr val="DEE1EB"/>
+            </a:solidFill>
           </a:ln>
         </p:spPr>
         <p:style>
@@ -24515,7 +24607,7 @@
               </a:spcAft>
               <a:defRPr sz="1600" b="1">
                 <a:solidFill>
-                  <a:srgbClr val="FF8C42"/>
+                  <a:srgbClr val="E86A17"/>
                 </a:solidFill>
                 <a:latin typeface="Arial"/>
               </a:defRPr>
@@ -24531,7 +24623,7 @@
               </a:spcAft>
               <a:defRPr sz="1300" b="0">
                 <a:solidFill>
-                  <a:srgbClr val="B0B0C5"/>
+                  <a:srgbClr val="3D3D56"/>
                 </a:solidFill>
                 <a:latin typeface="Arial"/>
               </a:defRPr>
@@ -24547,7 +24639,7 @@
               </a:spcAft>
               <a:defRPr sz="1300" b="0">
                 <a:solidFill>
-                  <a:srgbClr val="B0B0C5"/>
+                  <a:srgbClr val="3D3D56"/>
                 </a:solidFill>
                 <a:latin typeface="Arial"/>
               </a:defRPr>
@@ -24563,7 +24655,7 @@
               </a:spcAft>
               <a:defRPr sz="1300" b="0">
                 <a:solidFill>
-                  <a:srgbClr val="4ECB71"/>
+                  <a:srgbClr val="1B9E4B"/>
                 </a:solidFill>
                 <a:latin typeface="Arial"/>
               </a:defRPr>
@@ -24579,7 +24671,7 @@
               </a:spcAft>
               <a:defRPr sz="1200" b="1">
                 <a:solidFill>
-                  <a:srgbClr val="00D4AA"/>
+                  <a:srgbClr val="009B8D"/>
                 </a:solidFill>
                 <a:latin typeface="Arial"/>
               </a:defRPr>
@@ -24605,10 +24697,12 @@
             <a:avLst/>
           </a:prstGeom>
           <a:solidFill>
-            <a:srgbClr val="25253D"/>
+            <a:srgbClr val="F0F2F7"/>
           </a:solidFill>
-          <a:ln>
-            <a:noFill/>
+          <a:ln w="12700">
+            <a:solidFill>
+              <a:srgbClr val="DEE1EB"/>
+            </a:solidFill>
           </a:ln>
         </p:spPr>
         <p:style>
@@ -24661,7 +24755,7 @@
               </a:spcAft>
               <a:defRPr sz="1600" b="1">
                 <a:solidFill>
-                  <a:srgbClr val="FF6B9D"/>
+                  <a:srgbClr val="D6336C"/>
                 </a:solidFill>
                 <a:latin typeface="Arial"/>
               </a:defRPr>
@@ -24677,7 +24771,7 @@
               </a:spcAft>
               <a:defRPr sz="1300" b="0">
                 <a:solidFill>
-                  <a:srgbClr val="B0B0C5"/>
+                  <a:srgbClr val="3D3D56"/>
                 </a:solidFill>
                 <a:latin typeface="Arial"/>
               </a:defRPr>
@@ -24693,7 +24787,7 @@
               </a:spcAft>
               <a:defRPr sz="1300" b="0">
                 <a:solidFill>
-                  <a:srgbClr val="B0B0C5"/>
+                  <a:srgbClr val="3D3D56"/>
                 </a:solidFill>
                 <a:latin typeface="Arial"/>
               </a:defRPr>
@@ -24709,7 +24803,7 @@
               </a:spcAft>
               <a:defRPr sz="1300" b="0">
                 <a:solidFill>
-                  <a:srgbClr val="B0B0C5"/>
+                  <a:srgbClr val="3D3D56"/>
                 </a:solidFill>
                 <a:latin typeface="Arial"/>
               </a:defRPr>
@@ -24725,7 +24819,7 @@
               </a:spcAft>
               <a:defRPr sz="1200" b="1">
                 <a:solidFill>
-                  <a:srgbClr val="00D4AA"/>
+                  <a:srgbClr val="009B8D"/>
                 </a:solidFill>
                 <a:latin typeface="Arial"/>
               </a:defRPr>
@@ -24761,7 +24855,7 @@
             <a:pPr algn="r">
               <a:defRPr sz="1000" b="0">
                 <a:solidFill>
-                  <a:srgbClr val="80809A"/>
+                  <a:srgbClr val="787896"/>
                 </a:solidFill>
                 <a:latin typeface="Arial"/>
               </a:defRPr>
